--- a/docs/lecture_slides/Week 8/2026/Week8_Lecture18_Slides_10_12_2026.pptx
+++ b/docs/lecture_slides/Week 8/2026/Week8_Lecture18_Slides_10_12_2026.pptx
@@ -14,16 +14,6 @@
     <p:sldId id="415" r:id="rId8"/>
     <p:sldId id="360" r:id="rId9"/>
     <p:sldId id="416" r:id="rId10"/>
-    <p:sldId id="426" r:id="rId11"/>
-    <p:sldId id="417" r:id="rId12"/>
-    <p:sldId id="418" r:id="rId13"/>
-    <p:sldId id="419" r:id="rId14"/>
-    <p:sldId id="420" r:id="rId15"/>
-    <p:sldId id="421" r:id="rId16"/>
-    <p:sldId id="422" r:id="rId17"/>
-    <p:sldId id="423" r:id="rId18"/>
-    <p:sldId id="424" r:id="rId19"/>
-    <p:sldId id="425" r:id="rId20"/>
   </p:sldIdLst>
   <p:sldSz cx="12192000" cy="6858000"/>
   <p:notesSz cx="6858000" cy="9144000"/>
@@ -277,7 +267,7 @@
           <a:p>
             <a:fld id="{06882561-BD16-4A95-ACA1-5204E478F2FE}" type="datetimeFigureOut">
               <a:rPr lang="en-US" smtClean="0"/>
-              <a:t>10/12/2026</a:t>
+              <a:t>10/18/2026</a:t>
             </a:fld>
             <a:endParaRPr lang="en-US"/>
           </a:p>
@@ -475,7 +465,7 @@
           <a:p>
             <a:fld id="{06882561-BD16-4A95-ACA1-5204E478F2FE}" type="datetimeFigureOut">
               <a:rPr lang="en-US" smtClean="0"/>
-              <a:t>10/12/2026</a:t>
+              <a:t>10/18/2026</a:t>
             </a:fld>
             <a:endParaRPr lang="en-US"/>
           </a:p>
@@ -683,7 +673,7 @@
           <a:p>
             <a:fld id="{06882561-BD16-4A95-ACA1-5204E478F2FE}" type="datetimeFigureOut">
               <a:rPr lang="en-US" smtClean="0"/>
-              <a:t>10/12/2026</a:t>
+              <a:t>10/18/2026</a:t>
             </a:fld>
             <a:endParaRPr lang="en-US"/>
           </a:p>
@@ -881,7 +871,7 @@
           <a:p>
             <a:fld id="{06882561-BD16-4A95-ACA1-5204E478F2FE}" type="datetimeFigureOut">
               <a:rPr lang="en-US" smtClean="0"/>
-              <a:t>10/12/2026</a:t>
+              <a:t>10/18/2026</a:t>
             </a:fld>
             <a:endParaRPr lang="en-US"/>
           </a:p>
@@ -1156,7 +1146,7 @@
           <a:p>
             <a:fld id="{06882561-BD16-4A95-ACA1-5204E478F2FE}" type="datetimeFigureOut">
               <a:rPr lang="en-US" smtClean="0"/>
-              <a:t>10/12/2026</a:t>
+              <a:t>10/18/2026</a:t>
             </a:fld>
             <a:endParaRPr lang="en-US"/>
           </a:p>
@@ -1421,7 +1411,7 @@
           <a:p>
             <a:fld id="{06882561-BD16-4A95-ACA1-5204E478F2FE}" type="datetimeFigureOut">
               <a:rPr lang="en-US" smtClean="0"/>
-              <a:t>10/12/2026</a:t>
+              <a:t>10/18/2026</a:t>
             </a:fld>
             <a:endParaRPr lang="en-US"/>
           </a:p>
@@ -1833,7 +1823,7 @@
           <a:p>
             <a:fld id="{06882561-BD16-4A95-ACA1-5204E478F2FE}" type="datetimeFigureOut">
               <a:rPr lang="en-US" smtClean="0"/>
-              <a:t>10/12/2026</a:t>
+              <a:t>10/18/2026</a:t>
             </a:fld>
             <a:endParaRPr lang="en-US"/>
           </a:p>
@@ -1974,7 +1964,7 @@
           <a:p>
             <a:fld id="{06882561-BD16-4A95-ACA1-5204E478F2FE}" type="datetimeFigureOut">
               <a:rPr lang="en-US" smtClean="0"/>
-              <a:t>10/12/2026</a:t>
+              <a:t>10/18/2026</a:t>
             </a:fld>
             <a:endParaRPr lang="en-US"/>
           </a:p>
@@ -2087,7 +2077,7 @@
           <a:p>
             <a:fld id="{06882561-BD16-4A95-ACA1-5204E478F2FE}" type="datetimeFigureOut">
               <a:rPr lang="en-US" smtClean="0"/>
-              <a:t>10/12/2026</a:t>
+              <a:t>10/18/2026</a:t>
             </a:fld>
             <a:endParaRPr lang="en-US"/>
           </a:p>
@@ -2398,7 +2388,7 @@
           <a:p>
             <a:fld id="{06882561-BD16-4A95-ACA1-5204E478F2FE}" type="datetimeFigureOut">
               <a:rPr lang="en-US" smtClean="0"/>
-              <a:t>10/12/2026</a:t>
+              <a:t>10/18/2026</a:t>
             </a:fld>
             <a:endParaRPr lang="en-US"/>
           </a:p>
@@ -2686,7 +2676,7 @@
           <a:p>
             <a:fld id="{06882561-BD16-4A95-ACA1-5204E478F2FE}" type="datetimeFigureOut">
               <a:rPr lang="en-US" smtClean="0"/>
-              <a:t>10/12/2026</a:t>
+              <a:t>10/18/2026</a:t>
             </a:fld>
             <a:endParaRPr lang="en-US"/>
           </a:p>
@@ -2927,7 +2917,7 @@
           <a:p>
             <a:fld id="{06882561-BD16-4A95-ACA1-5204E478F2FE}" type="datetimeFigureOut">
               <a:rPr lang="en-US" smtClean="0"/>
-              <a:t>10/12/2026</a:t>
+              <a:t>10/18/2026</a:t>
             </a:fld>
             <a:endParaRPr lang="en-US"/>
           </a:p>
@@ -3394,7 +3384,7 @@
                   <a:srgbClr val="1F3864"/>
                 </a:solidFill>
               </a:rPr>
-              <a:t>Sampling Distributions, the Central Limit Theorem and Confidence Intervals</a:t>
+              <a:t>Sampling Distributions and the Standard Error</a:t>
             </a:r>
             <a:endParaRPr lang="en-US" dirty="0">
               <a:solidFill>
@@ -3414,5821 +3404,6 @@
   <p:clrMapOvr>
     <a:masterClrMapping/>
   </p:clrMapOvr>
-</p:sld>
-</file>
-
-<file path=ppt/slides/slide10.xml><?xml version="1.0" encoding="utf-8"?>
-<p:sld xmlns:a="http://schemas.openxmlformats.org/drawingml/2006/main" xmlns:r="http://schemas.openxmlformats.org/officeDocument/2006/relationships" xmlns:p="http://schemas.openxmlformats.org/presentationml/2006/main">
-  <p:cSld>
-    <p:spTree>
-      <p:nvGrpSpPr>
-        <p:cNvPr id="1" name=""/>
-        <p:cNvGrpSpPr/>
-        <p:nvPr/>
-      </p:nvGrpSpPr>
-      <p:grpSpPr>
-        <a:xfrm>
-          <a:off x="0" y="0"/>
-          <a:ext cx="0" cy="0"/>
-          <a:chOff x="0" y="0"/>
-          <a:chExt cx="0" cy="0"/>
-        </a:xfrm>
-      </p:grpSpPr>
-      <p:sp>
-        <p:nvSpPr>
-          <p:cNvPr id="2" name="Title 1">
-            <a:extLst>
-              <a:ext uri="{FF2B5EF4-FFF2-40B4-BE49-F238E27FC236}">
-                <a16:creationId xmlns:a16="http://schemas.microsoft.com/office/drawing/2014/main" id="{C08D30B1-1864-30EF-7EAB-9BEE656C0012}"/>
-              </a:ext>
-            </a:extLst>
-          </p:cNvPr>
-          <p:cNvSpPr>
-            <a:spLocks noGrp="1"/>
-          </p:cNvSpPr>
-          <p:nvPr>
-            <p:ph type="title"/>
-          </p:nvPr>
-        </p:nvSpPr>
-        <p:spPr/>
-        <p:txBody>
-          <a:bodyPr>
-            <a:noAutofit/>
-          </a:bodyPr>
-          <a:lstStyle/>
-          <a:p>
-            <a:r>
-              <a:rPr lang="en-US">
-                <a:solidFill>
-                  <a:srgbClr val="1F3864"/>
-                </a:solidFill>
-              </a:rPr>
-              <a:t>Data: waiting for a goal</a:t>
-            </a:r>
-          </a:p>
-        </p:txBody>
-      </p:sp>
-      <p:sp>
-        <p:nvSpPr>
-          <p:cNvPr id="4" name="Slide Number Placeholder 3">
-            <a:extLst>
-              <a:ext uri="{FF2B5EF4-FFF2-40B4-BE49-F238E27FC236}">
-                <a16:creationId xmlns:a16="http://schemas.microsoft.com/office/drawing/2014/main" id="{3F875068-D051-44AE-498E-1BEBEDE3A7C8}"/>
-              </a:ext>
-            </a:extLst>
-          </p:cNvPr>
-          <p:cNvSpPr>
-            <a:spLocks noGrp="1"/>
-          </p:cNvSpPr>
-          <p:nvPr>
-            <p:ph type="sldNum" sz="quarter" idx="12"/>
-          </p:nvPr>
-        </p:nvSpPr>
-        <p:spPr/>
-        <p:txBody>
-          <a:bodyPr/>
-          <a:lstStyle/>
-          <a:p>
-            <a:fld id="{A80A81DD-F10A-4B1C-963A-0ABBB4865886}" type="slidenum">
-              <a:rPr lang="en-US" sz="1600" smtClean="0"/>
-              <a:t>10</a:t>
-            </a:fld>
-            <a:endParaRPr lang="en-US" sz="1600"/>
-          </a:p>
-        </p:txBody>
-      </p:sp>
-      <p:sp>
-        <p:nvSpPr>
-          <p:cNvPr id="3" name="Title rule">
-            <a:extLst>
-              <a:ext uri="{FF2B5EF4-FFF2-40B4-BE49-F238E27FC236}">
-                <a16:creationId xmlns:a16="http://schemas.microsoft.com/office/drawing/2014/main" id="{30656AA8-9645-F028-C769-A313710853CC}"/>
-              </a:ext>
-            </a:extLst>
-          </p:cNvPr>
-          <p:cNvSpPr/>
-          <p:nvPr/>
-        </p:nvSpPr>
-        <p:spPr>
-          <a:xfrm>
-            <a:off x="838200" y="1600200"/>
-            <a:ext cx="10515600" cy="38100"/>
-          </a:xfrm>
-          <a:prstGeom prst="rect">
-            <a:avLst/>
-          </a:prstGeom>
-          <a:solidFill>
-            <a:srgbClr val="4472C4"/>
-          </a:solidFill>
-          <a:ln w="12700" cap="flat" cmpd="sng" algn="ctr">
-            <a:noFill/>
-            <a:prstDash val="solid"/>
-            <a:miter lim="800000"/>
-          </a:ln>
-          <a:effectLst/>
-          <a:extLst>
-            <a:ext uri="{91240B29-F687-4F45-9708-019B960494DF}">
-              <a14:hiddenLine xmlns:a14="http://schemas.microsoft.com/office/drawing/2010/main" w="12700" cap="flat" cmpd="sng" algn="ctr">
-                <a:solidFill>
-                  <a:schemeClr val="accent1">
-                    <a:shade val="15000"/>
-                  </a:schemeClr>
-                </a:solidFill>
-                <a:prstDash val="solid"/>
-                <a:miter lim="800000"/>
-              </a14:hiddenLine>
-            </a:ext>
-          </a:extLst>
-        </p:spPr>
-        <p:style>
-          <a:lnRef idx="2">
-            <a:schemeClr val="accent1">
-              <a:shade val="15000"/>
-            </a:schemeClr>
-          </a:lnRef>
-          <a:fillRef idx="1">
-            <a:schemeClr val="accent1"/>
-          </a:fillRef>
-          <a:effectRef idx="0">
-            <a:schemeClr val="accent1"/>
-          </a:effectRef>
-          <a:fontRef idx="minor">
-            <a:schemeClr val="lt1"/>
-          </a:fontRef>
-        </p:style>
-        <p:txBody>
-          <a:bodyPr rtlCol="0" anchor="ctr"/>
-          <a:lstStyle/>
-          <a:p>
-            <a:pPr algn="ctr"/>
-            <a:endParaRPr lang="en-US"/>
-          </a:p>
-        </p:txBody>
-      </p:sp>
-      <p:sp>
-        <p:nvSpPr>
-          <p:cNvPr id="8" name="Context">
-            <a:extLst>
-              <a:ext uri="{FF2B5EF4-FFF2-40B4-BE49-F238E27FC236}">
-                <a16:creationId xmlns:a16="http://schemas.microsoft.com/office/drawing/2014/main" id="{71E3EA8C-31B4-DAD4-BC4A-65D72E59AD46}"/>
-              </a:ext>
-            </a:extLst>
-          </p:cNvPr>
-          <p:cNvSpPr txBox="1"/>
-          <p:nvPr/>
-        </p:nvSpPr>
-        <p:spPr>
-          <a:xfrm>
-            <a:off x="762000" y="1879600"/>
-            <a:ext cx="10668000" cy="381000"/>
-          </a:xfrm>
-          <a:prstGeom prst="rect">
-            <a:avLst/>
-          </a:prstGeom>
-          <a:noFill/>
-        </p:spPr>
-        <p:txBody>
-          <a:bodyPr vert="horz" wrap="square" rtlCol="0">
-            <a:spAutoFit/>
-          </a:bodyPr>
-          <a:lstStyle/>
-          <a:p>
-            <a:pPr>
-              <a:spcAft>
-                <a:spcPts val="200"/>
-              </a:spcAft>
-            </a:pPr>
-            <a:r>
-              <a:rPr lang="en-US">
-                <a:solidFill>
-                  <a:srgbClr val="000000"/>
-                </a:solidFill>
-                <a:latin typeface="Calibri" panose="020F0502020204030204" pitchFamily="34" charset="0"/>
-              </a:rPr>
-              <a:t>The 2022 World Cup had 172 goals in 64 matches: 2.69 goals per 90-minute match.</a:t>
-            </a:r>
-          </a:p>
-        </p:txBody>
-      </p:sp>
-      <p:sp>
-        <p:nvSpPr>
-          <p:cNvPr id="9" name="Numbers">
-            <a:extLst>
-              <a:ext uri="{FF2B5EF4-FFF2-40B4-BE49-F238E27FC236}">
-                <a16:creationId xmlns:a16="http://schemas.microsoft.com/office/drawing/2014/main" id="{C419F151-05B2-3E4B-BAE8-BB1F06D9D1FD}"/>
-              </a:ext>
-            </a:extLst>
-          </p:cNvPr>
-          <p:cNvSpPr txBox="1"/>
-          <p:nvPr/>
-        </p:nvSpPr>
-        <p:spPr>
-          <a:xfrm>
-            <a:off x="762000" y="2311400"/>
-            <a:ext cx="10668000" cy="400110"/>
-          </a:xfrm>
-          <a:prstGeom prst="rect">
-            <a:avLst/>
-          </a:prstGeom>
-          <a:noFill/>
-        </p:spPr>
-        <p:txBody>
-          <a:bodyPr vert="horz" wrap="square" rtlCol="0">
-            <a:spAutoFit/>
-          </a:bodyPr>
-          <a:lstStyle/>
-          <a:p>
-            <a:pPr>
-              <a:spcAft>
-                <a:spcPts val="200"/>
-              </a:spcAft>
-            </a:pPr>
-            <a:r>
-              <a:rPr lang="en-US" sz="2000" b="1">
-                <a:solidFill>
-                  <a:srgbClr val="000000"/>
-                </a:solidFill>
-                <a:latin typeface="Calibri" panose="020F0502020204030204" pitchFamily="34" charset="0"/>
-              </a:rPr>
-              <a:t>X = minutes until the next goal, simulated at 2.69 goals per 90 minutes</a:t>
-            </a:r>
-          </a:p>
-        </p:txBody>
-      </p:sp>
-      <p:sp>
-        <p:nvSpPr>
-          <p:cNvPr id="10" name="Question">
-            <a:extLst>
-              <a:ext uri="{FF2B5EF4-FFF2-40B4-BE49-F238E27FC236}">
-                <a16:creationId xmlns:a16="http://schemas.microsoft.com/office/drawing/2014/main" id="{B31E395F-B84E-D1E9-D22A-222467FC4105}"/>
-              </a:ext>
-            </a:extLst>
-          </p:cNvPr>
-          <p:cNvSpPr txBox="1"/>
-          <p:nvPr/>
-        </p:nvSpPr>
-        <p:spPr>
-          <a:xfrm>
-            <a:off x="762000" y="5099110"/>
-            <a:ext cx="10668000" cy="369332"/>
-          </a:xfrm>
-          <a:prstGeom prst="rect">
-            <a:avLst/>
-          </a:prstGeom>
-          <a:noFill/>
-        </p:spPr>
-        <p:txBody>
-          <a:bodyPr vert="horz" wrap="square" rtlCol="0">
-            <a:spAutoFit/>
-          </a:bodyPr>
-          <a:lstStyle/>
-          <a:p>
-            <a:pPr>
-              <a:spcAft>
-                <a:spcPts val="200"/>
-              </a:spcAft>
-            </a:pPr>
-            <a:r>
-              <a:rPr lang="en-US">
-                <a:solidFill>
-                  <a:srgbClr val="000000"/>
-                </a:solidFill>
-                <a:latin typeface="Calibri" panose="020F0502020204030204" pitchFamily="34" charset="0"/>
-              </a:rPr>
-              <a:t>μ = 90 / 2.69 ≈ 33.5 min;   σ ≈ 33.5 min.   Most waits are short and a few are very long.</a:t>
-            </a:r>
-          </a:p>
-        </p:txBody>
-      </p:sp>
-      <p:graphicFrame>
-        <p:nvGraphicFramePr>
-          <p:cNvPr id="5" name="Data table">
-            <a:extLst>
-              <a:ext uri="{FF2B5EF4-FFF2-40B4-BE49-F238E27FC236}">
-                <a16:creationId xmlns:a16="http://schemas.microsoft.com/office/drawing/2014/main" id="{107D57CA-D659-5E39-E6B7-B1821FDE1989}"/>
-              </a:ext>
-            </a:extLst>
-          </p:cNvPr>
-          <p:cNvGraphicFramePr>
-            <a:graphicFrameLocks noGrp="1"/>
-          </p:cNvGraphicFramePr>
-          <p:nvPr>
-            <p:extLst>
-              <p:ext uri="{D42A27DB-BD31-4B8C-83A1-F6EECF244321}">
-                <p14:modId xmlns:p14="http://schemas.microsoft.com/office/powerpoint/2010/main" val="1529483959"/>
-              </p:ext>
-            </p:extLst>
-          </p:nvPr>
-        </p:nvGraphicFramePr>
-        <p:xfrm>
-          <a:off x="762000" y="2838510"/>
-          <a:ext cx="3810000" cy="2133600"/>
-        </p:xfrm>
-        <a:graphic>
-          <a:graphicData uri="http://schemas.openxmlformats.org/drawingml/2006/table">
-            <a:tbl>
-              <a:tblPr firstRow="1" bandRow="1">
-                <a:tableStyleId>{3B4B98B0-60AC-42C2-AFA5-B58CD77FA1E5}</a:tableStyleId>
-              </a:tblPr>
-              <a:tblGrid>
-                <a:gridCol w="1905000">
-                  <a:extLst>
-                    <a:ext uri="{9D8B030D-6E8A-4147-A177-3AD203B41FA5}">
-                      <a16:colId xmlns:a16="http://schemas.microsoft.com/office/drawing/2014/main" val="330255408"/>
-                    </a:ext>
-                  </a:extLst>
-                </a:gridCol>
-                <a:gridCol w="1905000">
-                  <a:extLst>
-                    <a:ext uri="{9D8B030D-6E8A-4147-A177-3AD203B41FA5}">
-                      <a16:colId xmlns:a16="http://schemas.microsoft.com/office/drawing/2014/main" val="3431246229"/>
-                    </a:ext>
-                  </a:extLst>
-                </a:gridCol>
-              </a:tblGrid>
-              <a:tr h="304800">
-                <a:tc>
-                  <a:txBody>
-                    <a:bodyPr/>
-                    <a:lstStyle/>
-                    <a:p>
-                      <a:r>
-                        <a:rPr lang="en-US" sz="1600" b="1">
-                          <a:latin typeface="Calibri" panose="020F0502020204030204" pitchFamily="34" charset="0"/>
-                        </a:rPr>
-                        <a:t>WAIT</a:t>
-                      </a:r>
-                    </a:p>
-                  </a:txBody>
-                  <a:tcPr marT="25400" marB="25400"/>
-                </a:tc>
-                <a:tc>
-                  <a:txBody>
-                    <a:bodyPr/>
-                    <a:lstStyle/>
-                    <a:p>
-                      <a:r>
-                        <a:rPr lang="en-US" sz="1600" b="1">
-                          <a:latin typeface="Calibri" panose="020F0502020204030204" pitchFamily="34" charset="0"/>
-                        </a:rPr>
-                        <a:t>MINUTES</a:t>
-                      </a:r>
-                    </a:p>
-                  </a:txBody>
-                  <a:tcPr marT="25400" marB="25400"/>
-                </a:tc>
-                <a:extLst>
-                  <a:ext uri="{0D108BD9-81ED-4DB2-BD59-A6C34878D82A}">
-                    <a16:rowId xmlns:a16="http://schemas.microsoft.com/office/drawing/2014/main" val="3735979105"/>
-                  </a:ext>
-                </a:extLst>
-              </a:tr>
-              <a:tr h="304800">
-                <a:tc>
-                  <a:txBody>
-                    <a:bodyPr/>
-                    <a:lstStyle/>
-                    <a:p>
-                      <a:r>
-                        <a:rPr lang="en-US" sz="1600">
-                          <a:latin typeface="Calibri" panose="020F0502020204030204" pitchFamily="34" charset="0"/>
-                        </a:rPr>
-                        <a:t>1</a:t>
-                      </a:r>
-                    </a:p>
-                  </a:txBody>
-                  <a:tcPr marT="25400" marB="25400"/>
-                </a:tc>
-                <a:tc>
-                  <a:txBody>
-                    <a:bodyPr/>
-                    <a:lstStyle/>
-                    <a:p>
-                      <a:r>
-                        <a:rPr lang="en-US" sz="1600">
-                          <a:latin typeface="Calibri" panose="020F0502020204030204" pitchFamily="34" charset="0"/>
-                        </a:rPr>
-                        <a:t>1.6</a:t>
-                      </a:r>
-                    </a:p>
-                  </a:txBody>
-                  <a:tcPr marT="25400" marB="25400"/>
-                </a:tc>
-                <a:extLst>
-                  <a:ext uri="{0D108BD9-81ED-4DB2-BD59-A6C34878D82A}">
-                    <a16:rowId xmlns:a16="http://schemas.microsoft.com/office/drawing/2014/main" val="188483433"/>
-                  </a:ext>
-                </a:extLst>
-              </a:tr>
-              <a:tr h="304800">
-                <a:tc>
-                  <a:txBody>
-                    <a:bodyPr/>
-                    <a:lstStyle/>
-                    <a:p>
-                      <a:r>
-                        <a:rPr lang="en-US" sz="1600">
-                          <a:latin typeface="Calibri" panose="020F0502020204030204" pitchFamily="34" charset="0"/>
-                        </a:rPr>
-                        <a:t>2</a:t>
-                      </a:r>
-                    </a:p>
-                  </a:txBody>
-                  <a:tcPr marT="25400" marB="25400"/>
-                </a:tc>
-                <a:tc>
-                  <a:txBody>
-                    <a:bodyPr/>
-                    <a:lstStyle/>
-                    <a:p>
-                      <a:r>
-                        <a:rPr lang="en-US" sz="1600">
-                          <a:latin typeface="Calibri" panose="020F0502020204030204" pitchFamily="34" charset="0"/>
-                        </a:rPr>
-                        <a:t>54.3</a:t>
-                      </a:r>
-                    </a:p>
-                  </a:txBody>
-                  <a:tcPr marT="25400" marB="25400"/>
-                </a:tc>
-                <a:extLst>
-                  <a:ext uri="{0D108BD9-81ED-4DB2-BD59-A6C34878D82A}">
-                    <a16:rowId xmlns:a16="http://schemas.microsoft.com/office/drawing/2014/main" val="1214692265"/>
-                  </a:ext>
-                </a:extLst>
-              </a:tr>
-              <a:tr h="304800">
-                <a:tc>
-                  <a:txBody>
-                    <a:bodyPr/>
-                    <a:lstStyle/>
-                    <a:p>
-                      <a:r>
-                        <a:rPr lang="en-US" sz="1600">
-                          <a:latin typeface="Calibri" panose="020F0502020204030204" pitchFamily="34" charset="0"/>
-                        </a:rPr>
-                        <a:t>3</a:t>
-                      </a:r>
-                    </a:p>
-                  </a:txBody>
-                  <a:tcPr marT="25400" marB="25400"/>
-                </a:tc>
-                <a:tc>
-                  <a:txBody>
-                    <a:bodyPr/>
-                    <a:lstStyle/>
-                    <a:p>
-                      <a:r>
-                        <a:rPr lang="en-US" sz="1600">
-                          <a:latin typeface="Calibri" panose="020F0502020204030204" pitchFamily="34" charset="0"/>
-                        </a:rPr>
-                        <a:t>57.3</a:t>
-                      </a:r>
-                    </a:p>
-                  </a:txBody>
-                  <a:tcPr marT="25400" marB="25400"/>
-                </a:tc>
-                <a:extLst>
-                  <a:ext uri="{0D108BD9-81ED-4DB2-BD59-A6C34878D82A}">
-                    <a16:rowId xmlns:a16="http://schemas.microsoft.com/office/drawing/2014/main" val="2893545131"/>
-                  </a:ext>
-                </a:extLst>
-              </a:tr>
-              <a:tr h="304800">
-                <a:tc>
-                  <a:txBody>
-                    <a:bodyPr/>
-                    <a:lstStyle/>
-                    <a:p>
-                      <a:r>
-                        <a:rPr lang="en-US" sz="1600">
-                          <a:latin typeface="Calibri" panose="020F0502020204030204" pitchFamily="34" charset="0"/>
-                        </a:rPr>
-                        <a:t>4</a:t>
-                      </a:r>
-                    </a:p>
-                  </a:txBody>
-                  <a:tcPr marT="25400" marB="25400"/>
-                </a:tc>
-                <a:tc>
-                  <a:txBody>
-                    <a:bodyPr/>
-                    <a:lstStyle/>
-                    <a:p>
-                      <a:r>
-                        <a:rPr lang="en-US" sz="1600">
-                          <a:latin typeface="Calibri" panose="020F0502020204030204" pitchFamily="34" charset="0"/>
-                        </a:rPr>
-                        <a:t>27.2</a:t>
-                      </a:r>
-                    </a:p>
-                  </a:txBody>
-                  <a:tcPr marT="25400" marB="25400"/>
-                </a:tc>
-                <a:extLst>
-                  <a:ext uri="{0D108BD9-81ED-4DB2-BD59-A6C34878D82A}">
-                    <a16:rowId xmlns:a16="http://schemas.microsoft.com/office/drawing/2014/main" val="3525875763"/>
-                  </a:ext>
-                </a:extLst>
-              </a:tr>
-              <a:tr h="304800">
-                <a:tc>
-                  <a:txBody>
-                    <a:bodyPr/>
-                    <a:lstStyle/>
-                    <a:p>
-                      <a:r>
-                        <a:rPr lang="en-US" sz="1600">
-                          <a:latin typeface="Calibri" panose="020F0502020204030204" pitchFamily="34" charset="0"/>
-                        </a:rPr>
-                        <a:t>5</a:t>
-                      </a:r>
-                    </a:p>
-                  </a:txBody>
-                  <a:tcPr marT="25400" marB="25400"/>
-                </a:tc>
-                <a:tc>
-                  <a:txBody>
-                    <a:bodyPr/>
-                    <a:lstStyle/>
-                    <a:p>
-                      <a:r>
-                        <a:rPr lang="en-US" sz="1600">
-                          <a:latin typeface="Calibri" panose="020F0502020204030204" pitchFamily="34" charset="0"/>
-                        </a:rPr>
-                        <a:t>18.3</a:t>
-                      </a:r>
-                    </a:p>
-                  </a:txBody>
-                  <a:tcPr marT="25400" marB="25400"/>
-                </a:tc>
-                <a:extLst>
-                  <a:ext uri="{0D108BD9-81ED-4DB2-BD59-A6C34878D82A}">
-                    <a16:rowId xmlns:a16="http://schemas.microsoft.com/office/drawing/2014/main" val="3449720881"/>
-                  </a:ext>
-                </a:extLst>
-              </a:tr>
-              <a:tr h="304800">
-                <a:tc>
-                  <a:txBody>
-                    <a:bodyPr/>
-                    <a:lstStyle/>
-                    <a:p>
-                      <a:r>
-                        <a:rPr lang="en-US" sz="1600">
-                          <a:latin typeface="Calibri" panose="020F0502020204030204" pitchFamily="34" charset="0"/>
-                        </a:rPr>
-                        <a:t>…</a:t>
-                      </a:r>
-                    </a:p>
-                  </a:txBody>
-                  <a:tcPr marT="25400" marB="25400"/>
-                </a:tc>
-                <a:tc>
-                  <a:txBody>
-                    <a:bodyPr/>
-                    <a:lstStyle/>
-                    <a:p>
-                      <a:r>
-                        <a:rPr lang="en-US" sz="1600">
-                          <a:latin typeface="Calibri" panose="020F0502020204030204" pitchFamily="34" charset="0"/>
-                        </a:rPr>
-                        <a:t>…</a:t>
-                      </a:r>
-                    </a:p>
-                  </a:txBody>
-                  <a:tcPr marT="25400" marB="25400"/>
-                </a:tc>
-                <a:extLst>
-                  <a:ext uri="{0D108BD9-81ED-4DB2-BD59-A6C34878D82A}">
-                    <a16:rowId xmlns:a16="http://schemas.microsoft.com/office/drawing/2014/main" val="1009998618"/>
-                  </a:ext>
-                </a:extLst>
-              </a:tr>
-            </a:tbl>
-          </a:graphicData>
-        </a:graphic>
-      </p:graphicFrame>
-    </p:spTree>
-    <p:extLst>
-      <p:ext uri="{BB962C8B-B14F-4D97-AF65-F5344CB8AC3E}">
-        <p14:creationId xmlns:p14="http://schemas.microsoft.com/office/powerpoint/2010/main" val="2199998708"/>
-      </p:ext>
-    </p:extLst>
-  </p:cSld>
-  <p:clrMapOvr>
-    <a:masterClrMapping/>
-  </p:clrMapOvr>
-</p:sld>
-</file>
-
-<file path=ppt/slides/slide11.xml><?xml version="1.0" encoding="utf-8"?>
-<p:sld xmlns:a="http://schemas.openxmlformats.org/drawingml/2006/main" xmlns:r="http://schemas.openxmlformats.org/officeDocument/2006/relationships" xmlns:p="http://schemas.openxmlformats.org/presentationml/2006/main">
-  <p:cSld>
-    <p:spTree>
-      <p:nvGrpSpPr>
-        <p:cNvPr id="1" name=""/>
-        <p:cNvGrpSpPr/>
-        <p:nvPr/>
-      </p:nvGrpSpPr>
-      <p:grpSpPr>
-        <a:xfrm>
-          <a:off x="0" y="0"/>
-          <a:ext cx="0" cy="0"/>
-          <a:chOff x="0" y="0"/>
-          <a:chExt cx="0" cy="0"/>
-        </a:xfrm>
-      </p:grpSpPr>
-      <p:sp>
-        <p:nvSpPr>
-          <p:cNvPr id="2" name="Title 1">
-            <a:extLst>
-              <a:ext uri="{FF2B5EF4-FFF2-40B4-BE49-F238E27FC236}">
-                <a16:creationId xmlns:a16="http://schemas.microsoft.com/office/drawing/2014/main" id="{C08D30B1-1864-30EF-7EAB-9BEE656C0012}"/>
-              </a:ext>
-            </a:extLst>
-          </p:cNvPr>
-          <p:cNvSpPr>
-            <a:spLocks noGrp="1"/>
-          </p:cNvSpPr>
-          <p:nvPr>
-            <p:ph type="title"/>
-          </p:nvPr>
-        </p:nvSpPr>
-        <p:spPr/>
-        <p:txBody>
-          <a:bodyPr>
-            <a:noAutofit/>
-          </a:bodyPr>
-          <a:lstStyle/>
-          <a:p>
-            <a:r>
-              <a:rPr lang="en-US">
-                <a:solidFill>
-                  <a:srgbClr val="1F3864"/>
-                </a:solidFill>
-              </a:rPr>
-              <a:t>Averaging a skewed variable</a:t>
-            </a:r>
-          </a:p>
-        </p:txBody>
-      </p:sp>
-      <p:sp>
-        <p:nvSpPr>
-          <p:cNvPr id="4" name="Slide Number Placeholder 3">
-            <a:extLst>
-              <a:ext uri="{FF2B5EF4-FFF2-40B4-BE49-F238E27FC236}">
-                <a16:creationId xmlns:a16="http://schemas.microsoft.com/office/drawing/2014/main" id="{3F875068-D051-44AE-498E-1BEBEDE3A7C8}"/>
-              </a:ext>
-            </a:extLst>
-          </p:cNvPr>
-          <p:cNvSpPr>
-            <a:spLocks noGrp="1"/>
-          </p:cNvSpPr>
-          <p:nvPr>
-            <p:ph type="sldNum" sz="quarter" idx="12"/>
-          </p:nvPr>
-        </p:nvSpPr>
-        <p:spPr/>
-        <p:txBody>
-          <a:bodyPr/>
-          <a:lstStyle/>
-          <a:p>
-            <a:fld id="{A80A81DD-F10A-4B1C-963A-0ABBB4865886}" type="slidenum">
-              <a:rPr lang="en-US" sz="1600" smtClean="0"/>
-              <a:t>11</a:t>
-            </a:fld>
-            <a:endParaRPr lang="en-US" sz="1600"/>
-          </a:p>
-        </p:txBody>
-      </p:sp>
-      <p:sp>
-        <p:nvSpPr>
-          <p:cNvPr id="3" name="Title rule">
-            <a:extLst>
-              <a:ext uri="{FF2B5EF4-FFF2-40B4-BE49-F238E27FC236}">
-                <a16:creationId xmlns:a16="http://schemas.microsoft.com/office/drawing/2014/main" id="{30656AA8-9645-F028-C769-A313710853CC}"/>
-              </a:ext>
-            </a:extLst>
-          </p:cNvPr>
-          <p:cNvSpPr/>
-          <p:nvPr/>
-        </p:nvSpPr>
-        <p:spPr>
-          <a:xfrm>
-            <a:off x="838200" y="1600200"/>
-            <a:ext cx="10515600" cy="38100"/>
-          </a:xfrm>
-          <a:prstGeom prst="rect">
-            <a:avLst/>
-          </a:prstGeom>
-          <a:solidFill>
-            <a:srgbClr val="4472C4"/>
-          </a:solidFill>
-          <a:ln w="12700" cap="flat" cmpd="sng" algn="ctr">
-            <a:noFill/>
-            <a:prstDash val="solid"/>
-            <a:miter lim="800000"/>
-          </a:ln>
-          <a:effectLst/>
-          <a:extLst>
-            <a:ext uri="{91240B29-F687-4F45-9708-019B960494DF}">
-              <a14:hiddenLine xmlns:a14="http://schemas.microsoft.com/office/drawing/2010/main" w="12700" cap="flat" cmpd="sng" algn="ctr">
-                <a:solidFill>
-                  <a:schemeClr val="accent1">
-                    <a:shade val="15000"/>
-                  </a:schemeClr>
-                </a:solidFill>
-                <a:prstDash val="solid"/>
-                <a:miter lim="800000"/>
-              </a14:hiddenLine>
-            </a:ext>
-          </a:extLst>
-        </p:spPr>
-        <p:style>
-          <a:lnRef idx="2">
-            <a:schemeClr val="accent1">
-              <a:shade val="15000"/>
-            </a:schemeClr>
-          </a:lnRef>
-          <a:fillRef idx="1">
-            <a:schemeClr val="accent1"/>
-          </a:fillRef>
-          <a:effectRef idx="0">
-            <a:schemeClr val="accent1"/>
-          </a:effectRef>
-          <a:fontRef idx="minor">
-            <a:schemeClr val="lt1"/>
-          </a:fontRef>
-        </p:style>
-        <p:txBody>
-          <a:bodyPr rtlCol="0" anchor="ctr"/>
-          <a:lstStyle/>
-          <a:p>
-            <a:pPr algn="ctr"/>
-            <a:endParaRPr lang="en-US"/>
-          </a:p>
-        </p:txBody>
-      </p:sp>
-      <p:sp>
-        <p:nvSpPr>
-          <p:cNvPr id="8" name="Context">
-            <a:extLst>
-              <a:ext uri="{FF2B5EF4-FFF2-40B4-BE49-F238E27FC236}">
-                <a16:creationId xmlns:a16="http://schemas.microsoft.com/office/drawing/2014/main" id="{71E3EA8C-31B4-DAD4-BC4A-65D72E59AD46}"/>
-              </a:ext>
-            </a:extLst>
-          </p:cNvPr>
-          <p:cNvSpPr txBox="1"/>
-          <p:nvPr/>
-        </p:nvSpPr>
-        <p:spPr>
-          <a:xfrm>
-            <a:off x="762000" y="1879600"/>
-            <a:ext cx="10668000" cy="381000"/>
-          </a:xfrm>
-          <a:prstGeom prst="rect">
-            <a:avLst/>
-          </a:prstGeom>
-          <a:noFill/>
-        </p:spPr>
-        <p:txBody>
-          <a:bodyPr vert="horz" wrap="square" rtlCol="0">
-            <a:spAutoFit/>
-          </a:bodyPr>
-          <a:lstStyle/>
-          <a:p>
-            <a:pPr>
-              <a:spcAft>
-                <a:spcPts val="200"/>
-              </a:spcAft>
-            </a:pPr>
-            <a:r>
-              <a:rPr lang="en-US">
-                <a:solidFill>
-                  <a:srgbClr val="000000"/>
-                </a:solidFill>
-                <a:latin typeface="Calibri" panose="020F0502020204030204" pitchFamily="34" charset="0"/>
-              </a:rPr>
-              <a:t>Each panel: draw n waits, average them to get x̄, and repeat 10,000 times (n = 1 is a single wait).</a:t>
-            </a:r>
-          </a:p>
-        </p:txBody>
-      </p:sp>
-      <p:sp>
-        <p:nvSpPr>
-          <p:cNvPr id="10" name="Question">
-            <a:extLst>
-              <a:ext uri="{FF2B5EF4-FFF2-40B4-BE49-F238E27FC236}">
-                <a16:creationId xmlns:a16="http://schemas.microsoft.com/office/drawing/2014/main" id="{B31E395F-B84E-D1E9-D22A-222467FC4105}"/>
-              </a:ext>
-            </a:extLst>
-          </p:cNvPr>
-          <p:cNvSpPr txBox="1"/>
-          <p:nvPr/>
-        </p:nvSpPr>
-        <p:spPr>
-          <a:xfrm>
-            <a:off x="762000" y="2286000"/>
-            <a:ext cx="10668000" cy="369332"/>
-          </a:xfrm>
-          <a:prstGeom prst="rect">
-            <a:avLst/>
-          </a:prstGeom>
-          <a:noFill/>
-        </p:spPr>
-        <p:txBody>
-          <a:bodyPr vert="horz" wrap="square" rtlCol="0">
-            <a:spAutoFit/>
-          </a:bodyPr>
-          <a:lstStyle/>
-          <a:p>
-            <a:pPr>
-              <a:spcAft>
-                <a:spcPts val="200"/>
-              </a:spcAft>
-            </a:pPr>
-            <a:r>
-              <a:rPr lang="en-US" b="1">
-                <a:solidFill>
-                  <a:srgbClr val="C00000"/>
-                </a:solidFill>
-                <a:latin typeface="Calibri" panose="020F0502020204030204" pitchFamily="34" charset="0"/>
-              </a:rPr>
-              <a:t>As n grows, what happens to the shape, the center and the spread of x̄?</a:t>
-            </a:r>
-          </a:p>
-        </p:txBody>
-      </p:sp>
-      <p:sp>
-        <p:nvSpPr>
-          <p:cNvPr id="11" name="Result">
-            <a:extLst>
-              <a:ext uri="{FF2B5EF4-FFF2-40B4-BE49-F238E27FC236}">
-                <a16:creationId xmlns:a16="http://schemas.microsoft.com/office/drawing/2014/main" id="{5A70F68E-0D93-07B8-82B2-4D8F2F681D0D}"/>
-              </a:ext>
-            </a:extLst>
-          </p:cNvPr>
-          <p:cNvSpPr/>
-          <p:nvPr/>
-        </p:nvSpPr>
-        <p:spPr>
-          <a:xfrm>
-            <a:off x="762000" y="5487432"/>
-            <a:ext cx="10668000" cy="470595"/>
-          </a:xfrm>
-          <a:prstGeom prst="roundRect">
-            <a:avLst>
-              <a:gd name="adj" fmla="val 4000"/>
-            </a:avLst>
-          </a:prstGeom>
-          <a:solidFill>
-            <a:srgbClr val="F2F6FC"/>
-          </a:solidFill>
-          <a:ln w="15875">
-            <a:solidFill>
-              <a:srgbClr val="4472C4"/>
-            </a:solidFill>
-          </a:ln>
-        </p:spPr>
-        <p:style>
-          <a:lnRef idx="2">
-            <a:schemeClr val="accent1">
-              <a:shade val="15000"/>
-            </a:schemeClr>
-          </a:lnRef>
-          <a:fillRef idx="1">
-            <a:schemeClr val="accent1"/>
-          </a:fillRef>
-          <a:effectRef idx="0">
-            <a:schemeClr val="accent1"/>
-          </a:effectRef>
-          <a:fontRef idx="minor">
-            <a:schemeClr val="lt1"/>
-          </a:fontRef>
-        </p:style>
-        <p:txBody>
-          <a:bodyPr wrap="square" lIns="152400" tIns="76200" rIns="152400" bIns="76200" rtlCol="0" anchor="ctr">
-            <a:spAutoFit/>
-          </a:bodyPr>
-          <a:lstStyle/>
-          <a:p>
-            <a:r>
-              <a:rPr lang="en-US" sz="2000" b="1">
-                <a:solidFill>
-                  <a:srgbClr val="C00000"/>
-                </a:solidFill>
-                <a:latin typeface="Calibri" panose="020F0502020204030204" pitchFamily="34" charset="0"/>
-              </a:rPr>
-              <a:t>Shape: the skew fades into a bell.   Center: stays at 33.5.   Spread: shrinks like σ / √n</a:t>
-            </a:r>
-          </a:p>
-        </p:txBody>
-      </p:sp>
-      <p:pic>
-        <p:nvPicPr>
-          <p:cNvPr id="7" name="l18_clt_goals.png">
-            <a:extLst>
-              <a:ext uri="{FF2B5EF4-FFF2-40B4-BE49-F238E27FC236}">
-                <a16:creationId xmlns:a16="http://schemas.microsoft.com/office/drawing/2014/main" id="{3E5C2E90-12D8-2822-9FB1-C2183DE96578}"/>
-              </a:ext>
-            </a:extLst>
-          </p:cNvPr>
-          <p:cNvPicPr>
-            <a:picLocks/>
-          </p:cNvPicPr>
-          <p:nvPr/>
-        </p:nvPicPr>
-        <p:blipFill>
-          <a:blip r:embed="rId2">
-            <a:extLst>
-              <a:ext uri="{28A0092B-C50C-407E-A947-70E740481C1C}">
-                <a14:useLocalDpi xmlns:a14="http://schemas.microsoft.com/office/drawing/2010/main" val="0"/>
-              </a:ext>
-            </a:extLst>
-          </a:blip>
-          <a:stretch>
-            <a:fillRect/>
-          </a:stretch>
-        </p:blipFill>
-        <p:spPr>
-          <a:xfrm>
-            <a:off x="762000" y="2706132"/>
-            <a:ext cx="10668000" cy="2730500"/>
-          </a:xfrm>
-          <a:prstGeom prst="rect">
-            <a:avLst/>
-          </a:prstGeom>
-        </p:spPr>
-      </p:pic>
-    </p:spTree>
-    <p:extLst>
-      <p:ext uri="{BB962C8B-B14F-4D97-AF65-F5344CB8AC3E}">
-        <p14:creationId xmlns:p14="http://schemas.microsoft.com/office/powerpoint/2010/main" val="929193732"/>
-      </p:ext>
-    </p:extLst>
-  </p:cSld>
-  <p:clrMapOvr>
-    <a:masterClrMapping/>
-  </p:clrMapOvr>
-  <p:timing>
-    <p:tnLst>
-      <p:par>
-        <p:cTn id="1" dur="indefinite" restart="never" nodeType="tmRoot">
-          <p:childTnLst>
-            <p:seq concurrent="1" nextAc="seek">
-              <p:cTn id="2" dur="indefinite" nodeType="mainSeq">
-                <p:childTnLst>
-                  <p:par>
-                    <p:cTn id="3" fill="hold">
-                      <p:stCondLst>
-                        <p:cond delay="indefinite"/>
-                      </p:stCondLst>
-                      <p:childTnLst>
-                        <p:par>
-                          <p:cTn id="4" fill="hold">
-                            <p:stCondLst>
-                              <p:cond delay="0"/>
-                            </p:stCondLst>
-                            <p:childTnLst>
-                              <p:par>
-                                <p:cTn id="5" presetID="1" presetClass="entr" presetSubtype="0" fill="hold" grpId="0" nodeType="clickEffect">
-                                  <p:stCondLst>
-                                    <p:cond delay="0"/>
-                                  </p:stCondLst>
-                                  <p:childTnLst>
-                                    <p:set>
-                                      <p:cBhvr>
-                                        <p:cTn id="6" dur="1" fill="hold">
-                                          <p:stCondLst>
-                                            <p:cond delay="0"/>
-                                          </p:stCondLst>
-                                        </p:cTn>
-                                        <p:tgtEl>
-                                          <p:spTgt spid="11"/>
-                                        </p:tgtEl>
-                                        <p:attrNameLst>
-                                          <p:attrName>style.visibility</p:attrName>
-                                        </p:attrNameLst>
-                                      </p:cBhvr>
-                                      <p:to>
-                                        <p:strVal val="visible"/>
-                                      </p:to>
-                                    </p:set>
-                                  </p:childTnLst>
-                                </p:cTn>
-                              </p:par>
-                            </p:childTnLst>
-                          </p:cTn>
-                        </p:par>
-                      </p:childTnLst>
-                    </p:cTn>
-                  </p:par>
-                </p:childTnLst>
-              </p:cTn>
-              <p:prevCondLst>
-                <p:cond evt="onPrev" delay="0">
-                  <p:tgtEl>
-                    <p:sldTgt/>
-                  </p:tgtEl>
-                </p:cond>
-              </p:prevCondLst>
-              <p:nextCondLst>
-                <p:cond evt="onNext" delay="0">
-                  <p:tgtEl>
-                    <p:sldTgt/>
-                  </p:tgtEl>
-                </p:cond>
-              </p:nextCondLst>
-            </p:seq>
-          </p:childTnLst>
-        </p:cTn>
-      </p:par>
-    </p:tnLst>
-    <p:bldLst>
-      <p:bldP spid="11" grpId="0" animBg="1"/>
-    </p:bldLst>
-  </p:timing>
-</p:sld>
-</file>
-
-<file path=ppt/slides/slide12.xml><?xml version="1.0" encoding="utf-8"?>
-<p:sld xmlns:a="http://schemas.openxmlformats.org/drawingml/2006/main" xmlns:r="http://schemas.openxmlformats.org/officeDocument/2006/relationships" xmlns:p="http://schemas.openxmlformats.org/presentationml/2006/main">
-  <p:cSld>
-    <p:spTree>
-      <p:nvGrpSpPr>
-        <p:cNvPr id="1" name=""/>
-        <p:cNvGrpSpPr/>
-        <p:nvPr/>
-      </p:nvGrpSpPr>
-      <p:grpSpPr>
-        <a:xfrm>
-          <a:off x="0" y="0"/>
-          <a:ext cx="0" cy="0"/>
-          <a:chOff x="0" y="0"/>
-          <a:chExt cx="0" cy="0"/>
-        </a:xfrm>
-      </p:grpSpPr>
-      <p:sp>
-        <p:nvSpPr>
-          <p:cNvPr id="2" name="Title 1">
-            <a:extLst>
-              <a:ext uri="{FF2B5EF4-FFF2-40B4-BE49-F238E27FC236}">
-                <a16:creationId xmlns:a16="http://schemas.microsoft.com/office/drawing/2014/main" id="{D617AB41-6AD1-9EF2-7F95-46A904399681}"/>
-              </a:ext>
-            </a:extLst>
-          </p:cNvPr>
-          <p:cNvSpPr>
-            <a:spLocks noGrp="1"/>
-          </p:cNvSpPr>
-          <p:nvPr>
-            <p:ph type="title"/>
-          </p:nvPr>
-        </p:nvSpPr>
-        <p:spPr/>
-        <p:txBody>
-          <a:bodyPr>
-            <a:noAutofit/>
-          </a:bodyPr>
-          <a:lstStyle/>
-          <a:p>
-            <a:r>
-              <a:rPr lang="en-US">
-                <a:solidFill>
-                  <a:srgbClr val="1F3864"/>
-                </a:solidFill>
-              </a:rPr>
-              <a:t>The central limit theorem</a:t>
-            </a:r>
-          </a:p>
-        </p:txBody>
-      </p:sp>
-      <p:sp>
-        <p:nvSpPr>
-          <p:cNvPr id="4" name="Slide Number Placeholder 3">
-            <a:extLst>
-              <a:ext uri="{FF2B5EF4-FFF2-40B4-BE49-F238E27FC236}">
-                <a16:creationId xmlns:a16="http://schemas.microsoft.com/office/drawing/2014/main" id="{97D44AE5-98B5-B840-6B8A-D345C7C2E2F0}"/>
-              </a:ext>
-            </a:extLst>
-          </p:cNvPr>
-          <p:cNvSpPr>
-            <a:spLocks noGrp="1"/>
-          </p:cNvSpPr>
-          <p:nvPr>
-            <p:ph type="sldNum" sz="quarter" idx="12"/>
-          </p:nvPr>
-        </p:nvSpPr>
-        <p:spPr/>
-        <p:txBody>
-          <a:bodyPr/>
-          <a:lstStyle/>
-          <a:p>
-            <a:fld id="{A80A81DD-F10A-4B1C-963A-0ABBB4865886}" type="slidenum">
-              <a:rPr lang="en-US" sz="1600" smtClean="0"/>
-              <a:t>12</a:t>
-            </a:fld>
-            <a:endParaRPr lang="en-US" sz="1600"/>
-          </a:p>
-        </p:txBody>
-      </p:sp>
-      <p:sp>
-        <p:nvSpPr>
-          <p:cNvPr id="5" name="TextBox 4">
-            <a:extLst>
-              <a:ext uri="{FF2B5EF4-FFF2-40B4-BE49-F238E27FC236}">
-                <a16:creationId xmlns:a16="http://schemas.microsoft.com/office/drawing/2014/main" id="{A34AAE17-27CE-D7A3-C663-11BB48ACBF5B}"/>
-              </a:ext>
-            </a:extLst>
-          </p:cNvPr>
-          <p:cNvSpPr txBox="1"/>
-          <p:nvPr/>
-        </p:nvSpPr>
-        <p:spPr>
-          <a:xfrm>
-            <a:off x="762000" y="1879600"/>
-            <a:ext cx="10668000" cy="345440"/>
-          </a:xfrm>
-          <a:prstGeom prst="rect">
-            <a:avLst/>
-          </a:prstGeom>
-          <a:noFill/>
-        </p:spPr>
-        <p:txBody>
-          <a:bodyPr vert="horz" wrap="square" rtlCol="0">
-            <a:spAutoFit/>
-          </a:bodyPr>
-          <a:lstStyle/>
-          <a:p>
-            <a:pPr marL="304800" indent="-304800"/>
-            <a:r>
-              <a:rPr lang="en-US" sz="1600">
-                <a:solidFill>
-                  <a:srgbClr val="000000"/>
-                </a:solidFill>
-              </a:rPr>
-              <a:t>central limit theorem</a:t>
-            </a:r>
-          </a:p>
-        </p:txBody>
-      </p:sp>
-      <p:sp>
-        <p:nvSpPr>
-          <p:cNvPr id="6" name="TextBox 5">
-            <a:extLst>
-              <a:ext uri="{FF2B5EF4-FFF2-40B4-BE49-F238E27FC236}">
-                <a16:creationId xmlns:a16="http://schemas.microsoft.com/office/drawing/2014/main" id="{E410A0F8-5E1E-9A1D-B64C-50827EE6C9B2}"/>
-              </a:ext>
-            </a:extLst>
-          </p:cNvPr>
-          <p:cNvSpPr txBox="1"/>
-          <p:nvPr/>
-        </p:nvSpPr>
-        <p:spPr>
-          <a:xfrm>
-            <a:off x="1117600" y="2225040"/>
-            <a:ext cx="10312400" cy="338554"/>
-          </a:xfrm>
-          <a:prstGeom prst="rect">
-            <a:avLst/>
-          </a:prstGeom>
-          <a:noFill/>
-        </p:spPr>
-        <p:txBody>
-          <a:bodyPr vert="horz" wrap="square" rtlCol="0">
-            <a:spAutoFit/>
-          </a:bodyPr>
-          <a:lstStyle/>
-          <a:p>
-            <a:r>
-              <a:rPr lang="en-US" sz="1600" b="1">
-                <a:solidFill>
-                  <a:srgbClr val="C00000"/>
-                </a:solidFill>
-              </a:rPr>
-              <a:t>for large n, x̄ is approximately N(μ, σ / √n), whatever the shape of the population</a:t>
-            </a:r>
-          </a:p>
-        </p:txBody>
-      </p:sp>
-      <p:sp>
-        <p:nvSpPr>
-          <p:cNvPr id="7" name="TextBox 6">
-            <a:extLst>
-              <a:ext uri="{FF2B5EF4-FFF2-40B4-BE49-F238E27FC236}">
-                <a16:creationId xmlns:a16="http://schemas.microsoft.com/office/drawing/2014/main" id="{47D3CD95-D52E-5227-B663-7C0A72677B6E}"/>
-              </a:ext>
-            </a:extLst>
-          </p:cNvPr>
-          <p:cNvSpPr txBox="1"/>
-          <p:nvPr/>
-        </p:nvSpPr>
-        <p:spPr>
-          <a:xfrm>
-            <a:off x="762000" y="2741394"/>
-            <a:ext cx="10668000" cy="345440"/>
-          </a:xfrm>
-          <a:prstGeom prst="rect">
-            <a:avLst/>
-          </a:prstGeom>
-          <a:noFill/>
-        </p:spPr>
-        <p:txBody>
-          <a:bodyPr vert="horz" wrap="square" rtlCol="0">
-            <a:spAutoFit/>
-          </a:bodyPr>
-          <a:lstStyle/>
-          <a:p>
-            <a:pPr marL="304800" indent="-304800"/>
-            <a:r>
-              <a:rPr lang="en-US" sz="1600">
-                <a:solidFill>
-                  <a:srgbClr val="000000"/>
-                </a:solidFill>
-              </a:rPr>
-              <a:t>how large is large enough?</a:t>
-            </a:r>
-          </a:p>
-        </p:txBody>
-      </p:sp>
-      <p:sp>
-        <p:nvSpPr>
-          <p:cNvPr id="8" name="TextBox 7">
-            <a:extLst>
-              <a:ext uri="{FF2B5EF4-FFF2-40B4-BE49-F238E27FC236}">
-                <a16:creationId xmlns:a16="http://schemas.microsoft.com/office/drawing/2014/main" id="{1CE3E601-601D-C6B1-8265-C079CB8C9269}"/>
-              </a:ext>
-            </a:extLst>
-          </p:cNvPr>
-          <p:cNvSpPr txBox="1"/>
-          <p:nvPr/>
-        </p:nvSpPr>
-        <p:spPr>
-          <a:xfrm>
-            <a:off x="1117600" y="3086834"/>
-            <a:ext cx="10312400" cy="338554"/>
-          </a:xfrm>
-          <a:prstGeom prst="rect">
-            <a:avLst/>
-          </a:prstGeom>
-          <a:noFill/>
-        </p:spPr>
-        <p:txBody>
-          <a:bodyPr vert="horz" wrap="square" rtlCol="0">
-            <a:spAutoFit/>
-          </a:bodyPr>
-          <a:lstStyle/>
-          <a:p>
-            <a:r>
-              <a:rPr lang="en-US" sz="1600" b="1">
-                <a:solidFill>
-                  <a:srgbClr val="C00000"/>
-                </a:solidFill>
-              </a:rPr>
-              <a:t>n ≥ 30 for x̄;     np &gt; 5 and n(1 − p) &gt; 5 for p̂</a:t>
-            </a:r>
-          </a:p>
-        </p:txBody>
-      </p:sp>
-      <p:sp>
-        <p:nvSpPr>
-          <p:cNvPr id="9" name="TextBox 8">
-            <a:extLst>
-              <a:ext uri="{FF2B5EF4-FFF2-40B4-BE49-F238E27FC236}">
-                <a16:creationId xmlns:a16="http://schemas.microsoft.com/office/drawing/2014/main" id="{FB002BF4-8037-2F73-E27A-7A453477E389}"/>
-              </a:ext>
-            </a:extLst>
-          </p:cNvPr>
-          <p:cNvSpPr txBox="1"/>
-          <p:nvPr/>
-        </p:nvSpPr>
-        <p:spPr>
-          <a:xfrm>
-            <a:off x="762000" y="3603188"/>
-            <a:ext cx="10668000" cy="345440"/>
-          </a:xfrm>
-          <a:prstGeom prst="rect">
-            <a:avLst/>
-          </a:prstGeom>
-          <a:noFill/>
-        </p:spPr>
-        <p:txBody>
-          <a:bodyPr vert="horz" wrap="square" rtlCol="0">
-            <a:spAutoFit/>
-          </a:bodyPr>
-          <a:lstStyle/>
-          <a:p>
-            <a:pPr marL="304800" indent="-304800"/>
-            <a:r>
-              <a:rPr lang="en-US" sz="1600">
-                <a:solidFill>
-                  <a:srgbClr val="000000"/>
-                </a:solidFill>
-              </a:rPr>
-              <a:t>why it matters</a:t>
-            </a:r>
-          </a:p>
-        </p:txBody>
-      </p:sp>
-      <p:sp>
-        <p:nvSpPr>
-          <p:cNvPr id="10" name="TextBox 9">
-            <a:extLst>
-              <a:ext uri="{FF2B5EF4-FFF2-40B4-BE49-F238E27FC236}">
-                <a16:creationId xmlns:a16="http://schemas.microsoft.com/office/drawing/2014/main" id="{10F3B3E3-D27C-E008-C93E-ED70BD2A4754}"/>
-              </a:ext>
-            </a:extLst>
-          </p:cNvPr>
-          <p:cNvSpPr txBox="1"/>
-          <p:nvPr/>
-        </p:nvSpPr>
-        <p:spPr>
-          <a:xfrm>
-            <a:off x="1117600" y="3948628"/>
-            <a:ext cx="10312400" cy="338554"/>
-          </a:xfrm>
-          <a:prstGeom prst="rect">
-            <a:avLst/>
-          </a:prstGeom>
-          <a:noFill/>
-        </p:spPr>
-        <p:txBody>
-          <a:bodyPr vert="horz" wrap="square" rtlCol="0">
-            <a:spAutoFit/>
-          </a:bodyPr>
-          <a:lstStyle/>
-          <a:p>
-            <a:r>
-              <a:rPr lang="en-US" sz="1600" b="1">
-                <a:solidFill>
-                  <a:srgbClr val="C00000"/>
-                </a:solidFill>
-              </a:rPr>
-              <a:t>the empirical rule applies:  about 95% of samples give a statistic within 2 SE of its mean</a:t>
-            </a:r>
-            <a:endParaRPr lang="en-US" sz="1600" b="1" dirty="0">
-              <a:solidFill>
-                <a:srgbClr val="C00000"/>
-              </a:solidFill>
-            </a:endParaRPr>
-          </a:p>
-        </p:txBody>
-      </p:sp>
-      <p:sp>
-        <p:nvSpPr>
-          <p:cNvPr id="3" name="Title rule">
-            <a:extLst>
-              <a:ext uri="{FF2B5EF4-FFF2-40B4-BE49-F238E27FC236}">
-                <a16:creationId xmlns:a16="http://schemas.microsoft.com/office/drawing/2014/main" id="{B469CAAB-2B69-6863-7C28-0C5959E5734B}"/>
-              </a:ext>
-            </a:extLst>
-          </p:cNvPr>
-          <p:cNvSpPr/>
-          <p:nvPr/>
-        </p:nvSpPr>
-        <p:spPr>
-          <a:xfrm>
-            <a:off x="838200" y="1600200"/>
-            <a:ext cx="10515600" cy="38100"/>
-          </a:xfrm>
-          <a:prstGeom prst="rect">
-            <a:avLst/>
-          </a:prstGeom>
-          <a:solidFill>
-            <a:srgbClr val="4472C4"/>
-          </a:solidFill>
-          <a:ln w="12700" cap="flat" cmpd="sng" algn="ctr">
-            <a:noFill/>
-            <a:prstDash val="solid"/>
-            <a:miter lim="800000"/>
-          </a:ln>
-          <a:effectLst/>
-          <a:extLst>
-            <a:ext uri="{91240B29-F687-4F45-9708-019B960494DF}">
-              <a14:hiddenLine xmlns:a14="http://schemas.microsoft.com/office/drawing/2010/main" w="12700" cap="flat" cmpd="sng" algn="ctr">
-                <a:solidFill>
-                  <a:schemeClr val="accent1">
-                    <a:shade val="15000"/>
-                  </a:schemeClr>
-                </a:solidFill>
-                <a:prstDash val="solid"/>
-                <a:miter lim="800000"/>
-              </a14:hiddenLine>
-            </a:ext>
-          </a:extLst>
-        </p:spPr>
-        <p:style>
-          <a:lnRef idx="2">
-            <a:schemeClr val="accent1">
-              <a:shade val="15000"/>
-            </a:schemeClr>
-          </a:lnRef>
-          <a:fillRef idx="1">
-            <a:schemeClr val="accent1"/>
-          </a:fillRef>
-          <a:effectRef idx="0">
-            <a:schemeClr val="accent1"/>
-          </a:effectRef>
-          <a:fontRef idx="minor">
-            <a:schemeClr val="lt1"/>
-          </a:fontRef>
-        </p:style>
-        <p:txBody>
-          <a:bodyPr rtlCol="0" anchor="ctr"/>
-          <a:lstStyle/>
-          <a:p>
-            <a:pPr algn="ctr"/>
-            <a:endParaRPr lang="en-US"/>
-          </a:p>
-        </p:txBody>
-      </p:sp>
-    </p:spTree>
-    <p:extLst>
-      <p:ext uri="{BB962C8B-B14F-4D97-AF65-F5344CB8AC3E}">
-        <p14:creationId xmlns:p14="http://schemas.microsoft.com/office/powerpoint/2010/main" val="1159517537"/>
-      </p:ext>
-    </p:extLst>
-  </p:cSld>
-  <p:clrMapOvr>
-    <a:masterClrMapping/>
-  </p:clrMapOvr>
-  <p:timing>
-    <p:tnLst>
-      <p:par>
-        <p:cTn id="1" dur="indefinite" restart="never" nodeType="tmRoot">
-          <p:childTnLst>
-            <p:seq concurrent="1" nextAc="seek">
-              <p:cTn id="2" dur="indefinite" nodeType="mainSeq">
-                <p:childTnLst>
-                  <p:par>
-                    <p:cTn id="3" fill="hold">
-                      <p:stCondLst>
-                        <p:cond delay="indefinite"/>
-                      </p:stCondLst>
-                      <p:childTnLst>
-                        <p:par>
-                          <p:cTn id="4" fill="hold">
-                            <p:stCondLst>
-                              <p:cond delay="0"/>
-                            </p:stCondLst>
-                            <p:childTnLst>
-                              <p:par>
-                                <p:cTn id="5" presetID="34" presetClass="entr" presetSubtype="0" fill="hold" grpId="0" nodeType="clickEffect">
-                                  <p:stCondLst>
-                                    <p:cond delay="0"/>
-                                  </p:stCondLst>
-                                  <p:childTnLst>
-                                    <p:set>
-                                      <p:cBhvr>
-                                        <p:cTn id="6" dur="1" fill="hold">
-                                          <p:stCondLst>
-                                            <p:cond delay="0"/>
-                                          </p:stCondLst>
-                                        </p:cTn>
-                                        <p:tgtEl>
-                                          <p:spTgt spid="6"/>
-                                        </p:tgtEl>
-                                        <p:attrNameLst>
-                                          <p:attrName>style.visibility</p:attrName>
-                                        </p:attrNameLst>
-                                      </p:cBhvr>
-                                      <p:to>
-                                        <p:strVal val="visible"/>
-                                      </p:to>
-                                    </p:set>
-                                    <p:anim from="(-#ppt_w/2)" to="(#ppt_x)" calcmode="lin" valueType="num">
-                                      <p:cBhvr>
-                                        <p:cTn id="7" dur="600" fill="hold">
-                                          <p:stCondLst>
-                                            <p:cond delay="0"/>
-                                          </p:stCondLst>
-                                        </p:cTn>
-                                        <p:tgtEl>
-                                          <p:spTgt spid="6"/>
-                                        </p:tgtEl>
-                                        <p:attrNameLst>
-                                          <p:attrName>ppt_x</p:attrName>
-                                        </p:attrNameLst>
-                                      </p:cBhvr>
-                                    </p:anim>
-                                    <p:anim from="0" to="-1.0" calcmode="lin" valueType="num">
-                                      <p:cBhvr>
-                                        <p:cTn id="8" dur="200" decel="50000" autoRev="1" fill="hold">
-                                          <p:stCondLst>
-                                            <p:cond delay="600"/>
-                                          </p:stCondLst>
-                                        </p:cTn>
-                                        <p:tgtEl>
-                                          <p:spTgt spid="6"/>
-                                        </p:tgtEl>
-                                        <p:attrNameLst>
-                                          <p:attrName>xshear</p:attrName>
-                                        </p:attrNameLst>
-                                      </p:cBhvr>
-                                    </p:anim>
-                                    <p:animScale>
-                                      <p:cBhvr>
-                                        <p:cTn id="9" dur="200" decel="100000" autoRev="1" fill="hold">
-                                          <p:stCondLst>
-                                            <p:cond delay="600"/>
-                                          </p:stCondLst>
-                                        </p:cTn>
-                                        <p:tgtEl>
-                                          <p:spTgt spid="6"/>
-                                        </p:tgtEl>
-                                      </p:cBhvr>
-                                      <p:from x="100000" y="100000"/>
-                                      <p:to x="80000" y="100000"/>
-                                    </p:animScale>
-                                    <p:anim by="(#ppt_h/3+#ppt_w*0.1)" calcmode="lin" valueType="num">
-                                      <p:cBhvr additive="sum">
-                                        <p:cTn id="10" dur="200" decel="100000" autoRev="1" fill="hold">
-                                          <p:stCondLst>
-                                            <p:cond delay="600"/>
-                                          </p:stCondLst>
-                                        </p:cTn>
-                                        <p:tgtEl>
-                                          <p:spTgt spid="6"/>
-                                        </p:tgtEl>
-                                        <p:attrNameLst>
-                                          <p:attrName>ppt_x</p:attrName>
-                                        </p:attrNameLst>
-                                      </p:cBhvr>
-                                    </p:anim>
-                                  </p:childTnLst>
-                                </p:cTn>
-                              </p:par>
-                            </p:childTnLst>
-                          </p:cTn>
-                        </p:par>
-                      </p:childTnLst>
-                    </p:cTn>
-                  </p:par>
-                  <p:par>
-                    <p:cTn id="11" fill="hold">
-                      <p:stCondLst>
-                        <p:cond delay="indefinite"/>
-                      </p:stCondLst>
-                      <p:childTnLst>
-                        <p:par>
-                          <p:cTn id="12" fill="hold">
-                            <p:stCondLst>
-                              <p:cond delay="0"/>
-                            </p:stCondLst>
-                            <p:childTnLst>
-                              <p:par>
-                                <p:cTn id="13" presetID="34" presetClass="entr" presetSubtype="0" fill="hold" grpId="0" nodeType="clickEffect">
-                                  <p:stCondLst>
-                                    <p:cond delay="0"/>
-                                  </p:stCondLst>
-                                  <p:childTnLst>
-                                    <p:set>
-                                      <p:cBhvr>
-                                        <p:cTn id="14" dur="1" fill="hold">
-                                          <p:stCondLst>
-                                            <p:cond delay="0"/>
-                                          </p:stCondLst>
-                                        </p:cTn>
-                                        <p:tgtEl>
-                                          <p:spTgt spid="8"/>
-                                        </p:tgtEl>
-                                        <p:attrNameLst>
-                                          <p:attrName>style.visibility</p:attrName>
-                                        </p:attrNameLst>
-                                      </p:cBhvr>
-                                      <p:to>
-                                        <p:strVal val="visible"/>
-                                      </p:to>
-                                    </p:set>
-                                    <p:anim from="(-#ppt_w/2)" to="(#ppt_x)" calcmode="lin" valueType="num">
-                                      <p:cBhvr>
-                                        <p:cTn id="15" dur="600" fill="hold">
-                                          <p:stCondLst>
-                                            <p:cond delay="0"/>
-                                          </p:stCondLst>
-                                        </p:cTn>
-                                        <p:tgtEl>
-                                          <p:spTgt spid="8"/>
-                                        </p:tgtEl>
-                                        <p:attrNameLst>
-                                          <p:attrName>ppt_x</p:attrName>
-                                        </p:attrNameLst>
-                                      </p:cBhvr>
-                                    </p:anim>
-                                    <p:anim from="0" to="-1.0" calcmode="lin" valueType="num">
-                                      <p:cBhvr>
-                                        <p:cTn id="16" dur="200" decel="50000" autoRev="1" fill="hold">
-                                          <p:stCondLst>
-                                            <p:cond delay="600"/>
-                                          </p:stCondLst>
-                                        </p:cTn>
-                                        <p:tgtEl>
-                                          <p:spTgt spid="8"/>
-                                        </p:tgtEl>
-                                        <p:attrNameLst>
-                                          <p:attrName>xshear</p:attrName>
-                                        </p:attrNameLst>
-                                      </p:cBhvr>
-                                    </p:anim>
-                                    <p:animScale>
-                                      <p:cBhvr>
-                                        <p:cTn id="17" dur="200" decel="100000" autoRev="1" fill="hold">
-                                          <p:stCondLst>
-                                            <p:cond delay="600"/>
-                                          </p:stCondLst>
-                                        </p:cTn>
-                                        <p:tgtEl>
-                                          <p:spTgt spid="8"/>
-                                        </p:tgtEl>
-                                      </p:cBhvr>
-                                      <p:from x="100000" y="100000"/>
-                                      <p:to x="80000" y="100000"/>
-                                    </p:animScale>
-                                    <p:anim by="(#ppt_h/3+#ppt_w*0.1)" calcmode="lin" valueType="num">
-                                      <p:cBhvr additive="sum">
-                                        <p:cTn id="18" dur="200" decel="100000" autoRev="1" fill="hold">
-                                          <p:stCondLst>
-                                            <p:cond delay="600"/>
-                                          </p:stCondLst>
-                                        </p:cTn>
-                                        <p:tgtEl>
-                                          <p:spTgt spid="8"/>
-                                        </p:tgtEl>
-                                        <p:attrNameLst>
-                                          <p:attrName>ppt_x</p:attrName>
-                                        </p:attrNameLst>
-                                      </p:cBhvr>
-                                    </p:anim>
-                                  </p:childTnLst>
-                                </p:cTn>
-                              </p:par>
-                            </p:childTnLst>
-                          </p:cTn>
-                        </p:par>
-                      </p:childTnLst>
-                    </p:cTn>
-                  </p:par>
-                  <p:par>
-                    <p:cTn id="19" fill="hold">
-                      <p:stCondLst>
-                        <p:cond delay="indefinite"/>
-                      </p:stCondLst>
-                      <p:childTnLst>
-                        <p:par>
-                          <p:cTn id="20" fill="hold">
-                            <p:stCondLst>
-                              <p:cond delay="0"/>
-                            </p:stCondLst>
-                            <p:childTnLst>
-                              <p:par>
-                                <p:cTn id="21" presetID="34" presetClass="entr" presetSubtype="0" fill="hold" grpId="0" nodeType="clickEffect">
-                                  <p:stCondLst>
-                                    <p:cond delay="0"/>
-                                  </p:stCondLst>
-                                  <p:childTnLst>
-                                    <p:set>
-                                      <p:cBhvr>
-                                        <p:cTn id="22" dur="1" fill="hold">
-                                          <p:stCondLst>
-                                            <p:cond delay="0"/>
-                                          </p:stCondLst>
-                                        </p:cTn>
-                                        <p:tgtEl>
-                                          <p:spTgt spid="10"/>
-                                        </p:tgtEl>
-                                        <p:attrNameLst>
-                                          <p:attrName>style.visibility</p:attrName>
-                                        </p:attrNameLst>
-                                      </p:cBhvr>
-                                      <p:to>
-                                        <p:strVal val="visible"/>
-                                      </p:to>
-                                    </p:set>
-                                    <p:anim from="(-#ppt_w/2)" to="(#ppt_x)" calcmode="lin" valueType="num">
-                                      <p:cBhvr>
-                                        <p:cTn id="23" dur="600" fill="hold">
-                                          <p:stCondLst>
-                                            <p:cond delay="0"/>
-                                          </p:stCondLst>
-                                        </p:cTn>
-                                        <p:tgtEl>
-                                          <p:spTgt spid="10"/>
-                                        </p:tgtEl>
-                                        <p:attrNameLst>
-                                          <p:attrName>ppt_x</p:attrName>
-                                        </p:attrNameLst>
-                                      </p:cBhvr>
-                                    </p:anim>
-                                    <p:anim from="0" to="-1.0" calcmode="lin" valueType="num">
-                                      <p:cBhvr>
-                                        <p:cTn id="24" dur="200" decel="50000" autoRev="1" fill="hold">
-                                          <p:stCondLst>
-                                            <p:cond delay="600"/>
-                                          </p:stCondLst>
-                                        </p:cTn>
-                                        <p:tgtEl>
-                                          <p:spTgt spid="10"/>
-                                        </p:tgtEl>
-                                        <p:attrNameLst>
-                                          <p:attrName>xshear</p:attrName>
-                                        </p:attrNameLst>
-                                      </p:cBhvr>
-                                    </p:anim>
-                                    <p:animScale>
-                                      <p:cBhvr>
-                                        <p:cTn id="25" dur="200" decel="100000" autoRev="1" fill="hold">
-                                          <p:stCondLst>
-                                            <p:cond delay="600"/>
-                                          </p:stCondLst>
-                                        </p:cTn>
-                                        <p:tgtEl>
-                                          <p:spTgt spid="10"/>
-                                        </p:tgtEl>
-                                      </p:cBhvr>
-                                      <p:from x="100000" y="100000"/>
-                                      <p:to x="80000" y="100000"/>
-                                    </p:animScale>
-                                    <p:anim by="(#ppt_h/3+#ppt_w*0.1)" calcmode="lin" valueType="num">
-                                      <p:cBhvr additive="sum">
-                                        <p:cTn id="26" dur="200" decel="100000" autoRev="1" fill="hold">
-                                          <p:stCondLst>
-                                            <p:cond delay="600"/>
-                                          </p:stCondLst>
-                                        </p:cTn>
-                                        <p:tgtEl>
-                                          <p:spTgt spid="10"/>
-                                        </p:tgtEl>
-                                        <p:attrNameLst>
-                                          <p:attrName>ppt_x</p:attrName>
-                                        </p:attrNameLst>
-                                      </p:cBhvr>
-                                    </p:anim>
-                                  </p:childTnLst>
-                                </p:cTn>
-                              </p:par>
-                            </p:childTnLst>
-                          </p:cTn>
-                        </p:par>
-                      </p:childTnLst>
-                    </p:cTn>
-                  </p:par>
-                </p:childTnLst>
-              </p:cTn>
-              <p:prevCondLst>
-                <p:cond evt="onPrev" delay="0">
-                  <p:tgtEl>
-                    <p:sldTgt/>
-                  </p:tgtEl>
-                </p:cond>
-              </p:prevCondLst>
-              <p:nextCondLst>
-                <p:cond evt="onNext" delay="0">
-                  <p:tgtEl>
-                    <p:sldTgt/>
-                  </p:tgtEl>
-                </p:cond>
-              </p:nextCondLst>
-            </p:seq>
-          </p:childTnLst>
-        </p:cTn>
-      </p:par>
-    </p:tnLst>
-    <p:bldLst>
-      <p:bldP spid="6" grpId="0"/>
-      <p:bldP spid="8" grpId="0"/>
-      <p:bldP spid="10" grpId="0"/>
-    </p:bldLst>
-  </p:timing>
-</p:sld>
-</file>
-
-<file path=ppt/slides/slide13.xml><?xml version="1.0" encoding="utf-8"?>
-<p:sld xmlns:a="http://schemas.openxmlformats.org/drawingml/2006/main" xmlns:r="http://schemas.openxmlformats.org/officeDocument/2006/relationships" xmlns:p="http://schemas.openxmlformats.org/presentationml/2006/main">
-  <p:cSld>
-    <p:spTree>
-      <p:nvGrpSpPr>
-        <p:cNvPr id="1" name=""/>
-        <p:cNvGrpSpPr/>
-        <p:nvPr/>
-      </p:nvGrpSpPr>
-      <p:grpSpPr>
-        <a:xfrm>
-          <a:off x="0" y="0"/>
-          <a:ext cx="0" cy="0"/>
-          <a:chOff x="0" y="0"/>
-          <a:chExt cx="0" cy="0"/>
-        </a:xfrm>
-      </p:grpSpPr>
-      <p:sp>
-        <p:nvSpPr>
-          <p:cNvPr id="2" name="Title 1">
-            <a:extLst>
-              <a:ext uri="{FF2B5EF4-FFF2-40B4-BE49-F238E27FC236}">
-                <a16:creationId xmlns:a16="http://schemas.microsoft.com/office/drawing/2014/main" id="{C08D30B1-1864-30EF-7EAB-9BEE656C0012}"/>
-              </a:ext>
-            </a:extLst>
-          </p:cNvPr>
-          <p:cNvSpPr>
-            <a:spLocks noGrp="1"/>
-          </p:cNvSpPr>
-          <p:nvPr>
-            <p:ph type="title"/>
-          </p:nvPr>
-        </p:nvSpPr>
-        <p:spPr/>
-        <p:txBody>
-          <a:bodyPr>
-            <a:noAutofit/>
-          </a:bodyPr>
-          <a:lstStyle/>
-          <a:p>
-            <a:r>
-              <a:rPr lang="en-US">
-                <a:solidFill>
-                  <a:srgbClr val="1F3864"/>
-                </a:solidFill>
-              </a:rPr>
-              <a:t>The CLT for a proportion</a:t>
-            </a:r>
-          </a:p>
-        </p:txBody>
-      </p:sp>
-      <p:sp>
-        <p:nvSpPr>
-          <p:cNvPr id="4" name="Slide Number Placeholder 3">
-            <a:extLst>
-              <a:ext uri="{FF2B5EF4-FFF2-40B4-BE49-F238E27FC236}">
-                <a16:creationId xmlns:a16="http://schemas.microsoft.com/office/drawing/2014/main" id="{3F875068-D051-44AE-498E-1BEBEDE3A7C8}"/>
-              </a:ext>
-            </a:extLst>
-          </p:cNvPr>
-          <p:cNvSpPr>
-            <a:spLocks noGrp="1"/>
-          </p:cNvSpPr>
-          <p:nvPr>
-            <p:ph type="sldNum" sz="quarter" idx="12"/>
-          </p:nvPr>
-        </p:nvSpPr>
-        <p:spPr/>
-        <p:txBody>
-          <a:bodyPr/>
-          <a:lstStyle/>
-          <a:p>
-            <a:fld id="{A80A81DD-F10A-4B1C-963A-0ABBB4865886}" type="slidenum">
-              <a:rPr lang="en-US" sz="1600" smtClean="0"/>
-              <a:t>13</a:t>
-            </a:fld>
-            <a:endParaRPr lang="en-US" sz="1600"/>
-          </a:p>
-        </p:txBody>
-      </p:sp>
-      <p:sp>
-        <p:nvSpPr>
-          <p:cNvPr id="3" name="Title rule">
-            <a:extLst>
-              <a:ext uri="{FF2B5EF4-FFF2-40B4-BE49-F238E27FC236}">
-                <a16:creationId xmlns:a16="http://schemas.microsoft.com/office/drawing/2014/main" id="{30656AA8-9645-F028-C769-A313710853CC}"/>
-              </a:ext>
-            </a:extLst>
-          </p:cNvPr>
-          <p:cNvSpPr/>
-          <p:nvPr/>
-        </p:nvSpPr>
-        <p:spPr>
-          <a:xfrm>
-            <a:off x="838200" y="1600200"/>
-            <a:ext cx="10515600" cy="38100"/>
-          </a:xfrm>
-          <a:prstGeom prst="rect">
-            <a:avLst/>
-          </a:prstGeom>
-          <a:solidFill>
-            <a:srgbClr val="4472C4"/>
-          </a:solidFill>
-          <a:ln w="12700" cap="flat" cmpd="sng" algn="ctr">
-            <a:noFill/>
-            <a:prstDash val="solid"/>
-            <a:miter lim="800000"/>
-          </a:ln>
-          <a:effectLst/>
-          <a:extLst>
-            <a:ext uri="{91240B29-F687-4F45-9708-019B960494DF}">
-              <a14:hiddenLine xmlns:a14="http://schemas.microsoft.com/office/drawing/2010/main" w="12700" cap="flat" cmpd="sng" algn="ctr">
-                <a:solidFill>
-                  <a:schemeClr val="accent1">
-                    <a:shade val="15000"/>
-                  </a:schemeClr>
-                </a:solidFill>
-                <a:prstDash val="solid"/>
-                <a:miter lim="800000"/>
-              </a14:hiddenLine>
-            </a:ext>
-          </a:extLst>
-        </p:spPr>
-        <p:style>
-          <a:lnRef idx="2">
-            <a:schemeClr val="accent1">
-              <a:shade val="15000"/>
-            </a:schemeClr>
-          </a:lnRef>
-          <a:fillRef idx="1">
-            <a:schemeClr val="accent1"/>
-          </a:fillRef>
-          <a:effectRef idx="0">
-            <a:schemeClr val="accent1"/>
-          </a:effectRef>
-          <a:fontRef idx="minor">
-            <a:schemeClr val="lt1"/>
-          </a:fontRef>
-        </p:style>
-        <p:txBody>
-          <a:bodyPr rtlCol="0" anchor="ctr"/>
-          <a:lstStyle/>
-          <a:p>
-            <a:pPr algn="ctr"/>
-            <a:endParaRPr lang="en-US"/>
-          </a:p>
-        </p:txBody>
-      </p:sp>
-      <p:sp>
-        <p:nvSpPr>
-          <p:cNvPr id="8" name="Context">
-            <a:extLst>
-              <a:ext uri="{FF2B5EF4-FFF2-40B4-BE49-F238E27FC236}">
-                <a16:creationId xmlns:a16="http://schemas.microsoft.com/office/drawing/2014/main" id="{71E3EA8C-31B4-DAD4-BC4A-65D72E59AD46}"/>
-              </a:ext>
-            </a:extLst>
-          </p:cNvPr>
-          <p:cNvSpPr txBox="1"/>
-          <p:nvPr/>
-        </p:nvSpPr>
-        <p:spPr>
-          <a:xfrm>
-            <a:off x="762000" y="1879600"/>
-            <a:ext cx="10668000" cy="381000"/>
-          </a:xfrm>
-          <a:prstGeom prst="rect">
-            <a:avLst/>
-          </a:prstGeom>
-          <a:noFill/>
-        </p:spPr>
-        <p:txBody>
-          <a:bodyPr vert="horz" wrap="square" rtlCol="0">
-            <a:spAutoFit/>
-          </a:bodyPr>
-          <a:lstStyle/>
-          <a:p>
-            <a:pPr>
-              <a:spcAft>
-                <a:spcPts val="200"/>
-              </a:spcAft>
-            </a:pPr>
-            <a:r>
-              <a:rPr lang="en-US">
-                <a:solidFill>
-                  <a:srgbClr val="000000"/>
-                </a:solidFill>
-                <a:latin typeface="Calibri" panose="020F0502020204030204" pitchFamily="34" charset="0"/>
-              </a:rPr>
-              <a:t>Exact sampling distributions of p̂, the proportion of free throws Stephen Curry makes;  p = 0.912.</a:t>
-            </a:r>
-          </a:p>
-        </p:txBody>
-      </p:sp>
-      <p:sp>
-        <p:nvSpPr>
-          <p:cNvPr id="10" name="Question">
-            <a:extLst>
-              <a:ext uri="{FF2B5EF4-FFF2-40B4-BE49-F238E27FC236}">
-                <a16:creationId xmlns:a16="http://schemas.microsoft.com/office/drawing/2014/main" id="{B31E395F-B84E-D1E9-D22A-222467FC4105}"/>
-              </a:ext>
-            </a:extLst>
-          </p:cNvPr>
-          <p:cNvSpPr txBox="1"/>
-          <p:nvPr/>
-        </p:nvSpPr>
-        <p:spPr>
-          <a:xfrm>
-            <a:off x="762000" y="2286000"/>
-            <a:ext cx="10668000" cy="369332"/>
-          </a:xfrm>
-          <a:prstGeom prst="rect">
-            <a:avLst/>
-          </a:prstGeom>
-          <a:noFill/>
-        </p:spPr>
-        <p:txBody>
-          <a:bodyPr vert="horz" wrap="square" rtlCol="0">
-            <a:spAutoFit/>
-          </a:bodyPr>
-          <a:lstStyle/>
-          <a:p>
-            <a:pPr>
-              <a:spcAft>
-                <a:spcPts val="200"/>
-              </a:spcAft>
-            </a:pPr>
-            <a:r>
-              <a:rPr lang="en-US" b="1">
-                <a:solidFill>
-                  <a:srgbClr val="C00000"/>
-                </a:solidFill>
-                <a:latin typeface="Calibri" panose="020F0502020204030204" pitchFamily="34" charset="0"/>
-              </a:rPr>
-              <a:t>For which n is n(1 − p) &gt; 5? Which distributions look like a bell?</a:t>
-            </a:r>
-          </a:p>
-        </p:txBody>
-      </p:sp>
-      <p:sp>
-        <p:nvSpPr>
-          <p:cNvPr id="11" name="Result">
-            <a:extLst>
-              <a:ext uri="{FF2B5EF4-FFF2-40B4-BE49-F238E27FC236}">
-                <a16:creationId xmlns:a16="http://schemas.microsoft.com/office/drawing/2014/main" id="{5A70F68E-0D93-07B8-82B2-4D8F2F681D0D}"/>
-              </a:ext>
-            </a:extLst>
-          </p:cNvPr>
-          <p:cNvSpPr/>
-          <p:nvPr/>
-        </p:nvSpPr>
-        <p:spPr>
-          <a:xfrm>
-            <a:off x="762000" y="5487432"/>
-            <a:ext cx="10668000" cy="470595"/>
-          </a:xfrm>
-          <a:prstGeom prst="roundRect">
-            <a:avLst>
-              <a:gd name="adj" fmla="val 4000"/>
-            </a:avLst>
-          </a:prstGeom>
-          <a:solidFill>
-            <a:srgbClr val="F2F6FC"/>
-          </a:solidFill>
-          <a:ln w="15875">
-            <a:solidFill>
-              <a:srgbClr val="4472C4"/>
-            </a:solidFill>
-          </a:ln>
-        </p:spPr>
-        <p:style>
-          <a:lnRef idx="2">
-            <a:schemeClr val="accent1">
-              <a:shade val="15000"/>
-            </a:schemeClr>
-          </a:lnRef>
-          <a:fillRef idx="1">
-            <a:schemeClr val="accent1"/>
-          </a:fillRef>
-          <a:effectRef idx="0">
-            <a:schemeClr val="accent1"/>
-          </a:effectRef>
-          <a:fontRef idx="minor">
-            <a:schemeClr val="lt1"/>
-          </a:fontRef>
-        </p:style>
-        <p:txBody>
-          <a:bodyPr wrap="square" lIns="152400" tIns="76200" rIns="152400" bIns="76200" rtlCol="0" anchor="ctr">
-            <a:spAutoFit/>
-          </a:bodyPr>
-          <a:lstStyle/>
-          <a:p>
-            <a:r>
-              <a:rPr lang="en-US" sz="2000" b="1">
-                <a:solidFill>
-                  <a:srgbClr val="C00000"/>
-                </a:solidFill>
-                <a:latin typeface="Calibri" panose="020F0502020204030204" pitchFamily="34" charset="0"/>
-              </a:rPr>
-              <a:t>n(1 − p) = 0.88,  2.64,  8.8:  only n = 100 passes, and only n = 100 is close to a bell</a:t>
-            </a:r>
-          </a:p>
-        </p:txBody>
-      </p:sp>
-      <p:pic>
-        <p:nvPicPr>
-          <p:cNvPr id="7" name="l18_phat_curry.png">
-            <a:extLst>
-              <a:ext uri="{FF2B5EF4-FFF2-40B4-BE49-F238E27FC236}">
-                <a16:creationId xmlns:a16="http://schemas.microsoft.com/office/drawing/2014/main" id="{E1C1137D-42A1-4D9F-45D0-027AB419DB35}"/>
-              </a:ext>
-            </a:extLst>
-          </p:cNvPr>
-          <p:cNvPicPr>
-            <a:picLocks/>
-          </p:cNvPicPr>
-          <p:nvPr/>
-        </p:nvPicPr>
-        <p:blipFill>
-          <a:blip r:embed="rId2">
-            <a:extLst>
-              <a:ext uri="{28A0092B-C50C-407E-A947-70E740481C1C}">
-                <a14:useLocalDpi xmlns:a14="http://schemas.microsoft.com/office/drawing/2010/main" val="0"/>
-              </a:ext>
-            </a:extLst>
-          </a:blip>
-          <a:stretch>
-            <a:fillRect/>
-          </a:stretch>
-        </p:blipFill>
-        <p:spPr>
-          <a:xfrm>
-            <a:off x="762000" y="2706132"/>
-            <a:ext cx="10668000" cy="2730500"/>
-          </a:xfrm>
-          <a:prstGeom prst="rect">
-            <a:avLst/>
-          </a:prstGeom>
-        </p:spPr>
-      </p:pic>
-    </p:spTree>
-    <p:extLst>
-      <p:ext uri="{BB962C8B-B14F-4D97-AF65-F5344CB8AC3E}">
-        <p14:creationId xmlns:p14="http://schemas.microsoft.com/office/powerpoint/2010/main" val="137977322"/>
-      </p:ext>
-    </p:extLst>
-  </p:cSld>
-  <p:clrMapOvr>
-    <a:masterClrMapping/>
-  </p:clrMapOvr>
-  <p:timing>
-    <p:tnLst>
-      <p:par>
-        <p:cTn id="1" dur="indefinite" restart="never" nodeType="tmRoot">
-          <p:childTnLst>
-            <p:seq concurrent="1" nextAc="seek">
-              <p:cTn id="2" dur="indefinite" nodeType="mainSeq">
-                <p:childTnLst>
-                  <p:par>
-                    <p:cTn id="3" fill="hold">
-                      <p:stCondLst>
-                        <p:cond delay="indefinite"/>
-                      </p:stCondLst>
-                      <p:childTnLst>
-                        <p:par>
-                          <p:cTn id="4" fill="hold">
-                            <p:stCondLst>
-                              <p:cond delay="0"/>
-                            </p:stCondLst>
-                            <p:childTnLst>
-                              <p:par>
-                                <p:cTn id="5" presetID="1" presetClass="entr" presetSubtype="0" fill="hold" grpId="0" nodeType="clickEffect">
-                                  <p:stCondLst>
-                                    <p:cond delay="0"/>
-                                  </p:stCondLst>
-                                  <p:childTnLst>
-                                    <p:set>
-                                      <p:cBhvr>
-                                        <p:cTn id="6" dur="1" fill="hold">
-                                          <p:stCondLst>
-                                            <p:cond delay="0"/>
-                                          </p:stCondLst>
-                                        </p:cTn>
-                                        <p:tgtEl>
-                                          <p:spTgt spid="11"/>
-                                        </p:tgtEl>
-                                        <p:attrNameLst>
-                                          <p:attrName>style.visibility</p:attrName>
-                                        </p:attrNameLst>
-                                      </p:cBhvr>
-                                      <p:to>
-                                        <p:strVal val="visible"/>
-                                      </p:to>
-                                    </p:set>
-                                  </p:childTnLst>
-                                </p:cTn>
-                              </p:par>
-                            </p:childTnLst>
-                          </p:cTn>
-                        </p:par>
-                      </p:childTnLst>
-                    </p:cTn>
-                  </p:par>
-                </p:childTnLst>
-              </p:cTn>
-              <p:prevCondLst>
-                <p:cond evt="onPrev" delay="0">
-                  <p:tgtEl>
-                    <p:sldTgt/>
-                  </p:tgtEl>
-                </p:cond>
-              </p:prevCondLst>
-              <p:nextCondLst>
-                <p:cond evt="onNext" delay="0">
-                  <p:tgtEl>
-                    <p:sldTgt/>
-                  </p:tgtEl>
-                </p:cond>
-              </p:nextCondLst>
-            </p:seq>
-          </p:childTnLst>
-        </p:cTn>
-      </p:par>
-    </p:tnLst>
-    <p:bldLst>
-      <p:bldP spid="11" grpId="0" animBg="1"/>
-    </p:bldLst>
-  </p:timing>
-</p:sld>
-</file>
-
-<file path=ppt/slides/slide14.xml><?xml version="1.0" encoding="utf-8"?>
-<p:sld xmlns:a="http://schemas.openxmlformats.org/drawingml/2006/main" xmlns:r="http://schemas.openxmlformats.org/officeDocument/2006/relationships" xmlns:p="http://schemas.openxmlformats.org/presentationml/2006/main">
-  <p:cSld>
-    <p:spTree>
-      <p:nvGrpSpPr>
-        <p:cNvPr id="1" name=""/>
-        <p:cNvGrpSpPr/>
-        <p:nvPr/>
-      </p:nvGrpSpPr>
-      <p:grpSpPr>
-        <a:xfrm>
-          <a:off x="0" y="0"/>
-          <a:ext cx="0" cy="0"/>
-          <a:chOff x="0" y="0"/>
-          <a:chExt cx="0" cy="0"/>
-        </a:xfrm>
-      </p:grpSpPr>
-      <p:sp>
-        <p:nvSpPr>
-          <p:cNvPr id="2" name="Title 1">
-            <a:extLst>
-              <a:ext uri="{FF2B5EF4-FFF2-40B4-BE49-F238E27FC236}">
-                <a16:creationId xmlns:a16="http://schemas.microsoft.com/office/drawing/2014/main" id="{C08D30B1-1864-30EF-7EAB-9BEE656C0012}"/>
-              </a:ext>
-            </a:extLst>
-          </p:cNvPr>
-          <p:cNvSpPr>
-            <a:spLocks noGrp="1"/>
-          </p:cNvSpPr>
-          <p:nvPr>
-            <p:ph type="title"/>
-          </p:nvPr>
-        </p:nvSpPr>
-        <p:spPr/>
-        <p:txBody>
-          <a:bodyPr>
-            <a:noAutofit/>
-          </a:bodyPr>
-          <a:lstStyle/>
-          <a:p>
-            <a:r>
-              <a:rPr lang="en-US">
-                <a:solidFill>
-                  <a:srgbClr val="1F3864"/>
-                </a:solidFill>
-              </a:rPr>
-              <a:t>Example: free throws, again</a:t>
-            </a:r>
-          </a:p>
-        </p:txBody>
-      </p:sp>
-      <p:sp>
-        <p:nvSpPr>
-          <p:cNvPr id="4" name="Slide Number Placeholder 3">
-            <a:extLst>
-              <a:ext uri="{FF2B5EF4-FFF2-40B4-BE49-F238E27FC236}">
-                <a16:creationId xmlns:a16="http://schemas.microsoft.com/office/drawing/2014/main" id="{3F875068-D051-44AE-498E-1BEBEDE3A7C8}"/>
-              </a:ext>
-            </a:extLst>
-          </p:cNvPr>
-          <p:cNvSpPr>
-            <a:spLocks noGrp="1"/>
-          </p:cNvSpPr>
-          <p:nvPr>
-            <p:ph type="sldNum" sz="quarter" idx="12"/>
-          </p:nvPr>
-        </p:nvSpPr>
-        <p:spPr/>
-        <p:txBody>
-          <a:bodyPr/>
-          <a:lstStyle/>
-          <a:p>
-            <a:fld id="{A80A81DD-F10A-4B1C-963A-0ABBB4865886}" type="slidenum">
-              <a:rPr lang="en-US" sz="1600" smtClean="0"/>
-              <a:t>14</a:t>
-            </a:fld>
-            <a:endParaRPr lang="en-US" sz="1600"/>
-          </a:p>
-        </p:txBody>
-      </p:sp>
-      <p:sp>
-        <p:nvSpPr>
-          <p:cNvPr id="3" name="Title rule">
-            <a:extLst>
-              <a:ext uri="{FF2B5EF4-FFF2-40B4-BE49-F238E27FC236}">
-                <a16:creationId xmlns:a16="http://schemas.microsoft.com/office/drawing/2014/main" id="{30656AA8-9645-F028-C769-A313710853CC}"/>
-              </a:ext>
-            </a:extLst>
-          </p:cNvPr>
-          <p:cNvSpPr/>
-          <p:nvPr/>
-        </p:nvSpPr>
-        <p:spPr>
-          <a:xfrm>
-            <a:off x="838200" y="1600200"/>
-            <a:ext cx="10515600" cy="38100"/>
-          </a:xfrm>
-          <a:prstGeom prst="rect">
-            <a:avLst/>
-          </a:prstGeom>
-          <a:solidFill>
-            <a:srgbClr val="4472C4"/>
-          </a:solidFill>
-          <a:ln w="12700" cap="flat" cmpd="sng" algn="ctr">
-            <a:noFill/>
-            <a:prstDash val="solid"/>
-            <a:miter lim="800000"/>
-          </a:ln>
-          <a:effectLst/>
-          <a:extLst>
-            <a:ext uri="{91240B29-F687-4F45-9708-019B960494DF}">
-              <a14:hiddenLine xmlns:a14="http://schemas.microsoft.com/office/drawing/2010/main" w="12700" cap="flat" cmpd="sng" algn="ctr">
-                <a:solidFill>
-                  <a:schemeClr val="accent1">
-                    <a:shade val="15000"/>
-                  </a:schemeClr>
-                </a:solidFill>
-                <a:prstDash val="solid"/>
-                <a:miter lim="800000"/>
-              </a14:hiddenLine>
-            </a:ext>
-          </a:extLst>
-        </p:spPr>
-        <p:style>
-          <a:lnRef idx="2">
-            <a:schemeClr val="accent1">
-              <a:shade val="15000"/>
-            </a:schemeClr>
-          </a:lnRef>
-          <a:fillRef idx="1">
-            <a:schemeClr val="accent1"/>
-          </a:fillRef>
-          <a:effectRef idx="0">
-            <a:schemeClr val="accent1"/>
-          </a:effectRef>
-          <a:fontRef idx="minor">
-            <a:schemeClr val="lt1"/>
-          </a:fontRef>
-        </p:style>
-        <p:txBody>
-          <a:bodyPr rtlCol="0" anchor="ctr"/>
-          <a:lstStyle/>
-          <a:p>
-            <a:pPr algn="ctr"/>
-            <a:endParaRPr lang="en-US"/>
-          </a:p>
-        </p:txBody>
-      </p:sp>
-      <p:sp>
-        <p:nvSpPr>
-          <p:cNvPr id="8" name="Context">
-            <a:extLst>
-              <a:ext uri="{FF2B5EF4-FFF2-40B4-BE49-F238E27FC236}">
-                <a16:creationId xmlns:a16="http://schemas.microsoft.com/office/drawing/2014/main" id="{71E3EA8C-31B4-DAD4-BC4A-65D72E59AD46}"/>
-              </a:ext>
-            </a:extLst>
-          </p:cNvPr>
-          <p:cNvSpPr txBox="1"/>
-          <p:nvPr/>
-        </p:nvSpPr>
-        <p:spPr>
-          <a:xfrm>
-            <a:off x="762000" y="1879600"/>
-            <a:ext cx="10668000" cy="381000"/>
-          </a:xfrm>
-          <a:prstGeom prst="rect">
-            <a:avLst/>
-          </a:prstGeom>
-          <a:noFill/>
-        </p:spPr>
-        <p:txBody>
-          <a:bodyPr vert="horz" wrap="square" rtlCol="0">
-            <a:spAutoFit/>
-          </a:bodyPr>
-          <a:lstStyle/>
-          <a:p>
-            <a:pPr>
-              <a:spcAft>
-                <a:spcPts val="200"/>
-              </a:spcAft>
-            </a:pPr>
-            <a:r>
-              <a:rPr lang="en-US">
-                <a:solidFill>
-                  <a:srgbClr val="000000"/>
-                </a:solidFill>
-                <a:latin typeface="Calibri" panose="020F0502020204030204" pitchFamily="34" charset="0"/>
-              </a:rPr>
-              <a:t>Over a stretch of n = 100 free throws, let p̂ be the proportion Curry makes.</a:t>
-            </a:r>
-          </a:p>
-        </p:txBody>
-      </p:sp>
-      <p:sp>
-        <p:nvSpPr>
-          <p:cNvPr id="9" name="Numbers">
-            <a:extLst>
-              <a:ext uri="{FF2B5EF4-FFF2-40B4-BE49-F238E27FC236}">
-                <a16:creationId xmlns:a16="http://schemas.microsoft.com/office/drawing/2014/main" id="{C419F151-05B2-3E4B-BAE8-BB1F06D9D1FD}"/>
-              </a:ext>
-            </a:extLst>
-          </p:cNvPr>
-          <p:cNvSpPr txBox="1"/>
-          <p:nvPr/>
-        </p:nvSpPr>
-        <p:spPr>
-          <a:xfrm>
-            <a:off x="762000" y="2286000"/>
-            <a:ext cx="10668000" cy="400110"/>
-          </a:xfrm>
-          <a:prstGeom prst="rect">
-            <a:avLst/>
-          </a:prstGeom>
-          <a:noFill/>
-        </p:spPr>
-        <p:txBody>
-          <a:bodyPr vert="horz" wrap="square" rtlCol="0">
-            <a:spAutoFit/>
-          </a:bodyPr>
-          <a:lstStyle/>
-          <a:p>
-            <a:pPr>
-              <a:spcAft>
-                <a:spcPts val="200"/>
-              </a:spcAft>
-            </a:pPr>
-            <a:r>
-              <a:rPr lang="pt-BR" sz="2000" b="1">
-                <a:solidFill>
-                  <a:srgbClr val="000000"/>
-                </a:solidFill>
-                <a:latin typeface="Calibri" panose="020F0502020204030204" pitchFamily="34" charset="0"/>
-              </a:rPr>
-              <a:t>p = 0.912;     n = 100;     n(1 − p) = 8.8 &gt; 5</a:t>
-            </a:r>
-            <a:endParaRPr lang="en-US" sz="2000" b="1">
-              <a:solidFill>
-                <a:srgbClr val="000000"/>
-              </a:solidFill>
-              <a:latin typeface="Calibri" panose="020F0502020204030204" pitchFamily="34" charset="0"/>
-            </a:endParaRPr>
-          </a:p>
-        </p:txBody>
-      </p:sp>
-      <p:sp>
-        <p:nvSpPr>
-          <p:cNvPr id="10" name="Question">
-            <a:extLst>
-              <a:ext uri="{FF2B5EF4-FFF2-40B4-BE49-F238E27FC236}">
-                <a16:creationId xmlns:a16="http://schemas.microsoft.com/office/drawing/2014/main" id="{B31E395F-B84E-D1E9-D22A-222467FC4105}"/>
-              </a:ext>
-            </a:extLst>
-          </p:cNvPr>
-          <p:cNvSpPr txBox="1"/>
-          <p:nvPr/>
-        </p:nvSpPr>
-        <p:spPr>
-          <a:xfrm>
-            <a:off x="762000" y="2711510"/>
-            <a:ext cx="10668000" cy="671979"/>
-          </a:xfrm>
-          <a:prstGeom prst="rect">
-            <a:avLst/>
-          </a:prstGeom>
-          <a:noFill/>
-        </p:spPr>
-        <p:txBody>
-          <a:bodyPr vert="horz" wrap="square" rtlCol="0">
-            <a:spAutoFit/>
-          </a:bodyPr>
-          <a:lstStyle/>
-          <a:p>
-            <a:pPr>
-              <a:spcAft>
-                <a:spcPts val="200"/>
-              </a:spcAft>
-            </a:pPr>
-            <a:r>
-              <a:rPr lang="en-US" b="1">
-                <a:solidFill>
-                  <a:srgbClr val="C00000"/>
-                </a:solidFill>
-                <a:latin typeface="Calibri" panose="020F0502020204030204" pitchFamily="34" charset="0"/>
-              </a:rPr>
-              <a:t>(a)  What are the mean and standard error of p̂?</a:t>
-            </a:r>
-          </a:p>
-          <a:p>
-            <a:pPr>
-              <a:spcAft>
-                <a:spcPts val="200"/>
-              </a:spcAft>
-            </a:pPr>
-            <a:r>
-              <a:rPr lang="en-US" b="1">
-                <a:solidFill>
-                  <a:srgbClr val="C00000"/>
-                </a:solidFill>
-                <a:latin typeface="Calibri" panose="020F0502020204030204" pitchFamily="34" charset="0"/>
-              </a:rPr>
-              <a:t>(b)  About 95% of the time, p̂ falls between what two values?</a:t>
-            </a:r>
-          </a:p>
-        </p:txBody>
-      </p:sp>
-      <p:sp>
-        <p:nvSpPr>
-          <p:cNvPr id="11" name="Result">
-            <a:extLst>
-              <a:ext uri="{FF2B5EF4-FFF2-40B4-BE49-F238E27FC236}">
-                <a16:creationId xmlns:a16="http://schemas.microsoft.com/office/drawing/2014/main" id="{5A70F68E-0D93-07B8-82B2-4D8F2F681D0D}"/>
-              </a:ext>
-            </a:extLst>
-          </p:cNvPr>
-          <p:cNvSpPr/>
-          <p:nvPr/>
-        </p:nvSpPr>
-        <p:spPr>
-          <a:xfrm>
-            <a:off x="762000" y="3535889"/>
-            <a:ext cx="10668000" cy="784324"/>
-          </a:xfrm>
-          <a:prstGeom prst="roundRect">
-            <a:avLst>
-              <a:gd name="adj" fmla="val 4000"/>
-            </a:avLst>
-          </a:prstGeom>
-          <a:solidFill>
-            <a:srgbClr val="F2F6FC"/>
-          </a:solidFill>
-          <a:ln w="15875">
-            <a:solidFill>
-              <a:srgbClr val="4472C4"/>
-            </a:solidFill>
-          </a:ln>
-        </p:spPr>
-        <p:style>
-          <a:lnRef idx="2">
-            <a:schemeClr val="accent1">
-              <a:shade val="15000"/>
-            </a:schemeClr>
-          </a:lnRef>
-          <a:fillRef idx="1">
-            <a:schemeClr val="accent1"/>
-          </a:fillRef>
-          <a:effectRef idx="0">
-            <a:schemeClr val="accent1"/>
-          </a:effectRef>
-          <a:fontRef idx="minor">
-            <a:schemeClr val="lt1"/>
-          </a:fontRef>
-        </p:style>
-        <p:txBody>
-          <a:bodyPr wrap="square" lIns="152400" tIns="76200" rIns="152400" bIns="76200" rtlCol="0" anchor="ctr">
-            <a:spAutoFit/>
-          </a:bodyPr>
-          <a:lstStyle/>
-          <a:p>
-            <a:r>
-              <a:rPr lang="en-US" sz="2000" b="1">
-                <a:solidFill>
-                  <a:srgbClr val="C00000"/>
-                </a:solidFill>
-                <a:latin typeface="Calibri" panose="020F0502020204030204" pitchFamily="34" charset="0"/>
-              </a:rPr>
-              <a:t>(a)  mean 0.912;    SE = √(0.912 × 0.088 / 100) ≈ 0.028</a:t>
-            </a:r>
-          </a:p>
-          <a:p>
-            <a:r>
-              <a:rPr lang="en-US" sz="2000" b="1">
-                <a:solidFill>
-                  <a:srgbClr val="C00000"/>
-                </a:solidFill>
-                <a:latin typeface="Calibri" panose="020F0502020204030204" pitchFamily="34" charset="0"/>
-              </a:rPr>
-              <a:t>(b)  0.912 ± 2(0.028):   0.856 to 0.968</a:t>
-            </a:r>
-          </a:p>
-        </p:txBody>
-      </p:sp>
-    </p:spTree>
-    <p:extLst>
-      <p:ext uri="{BB962C8B-B14F-4D97-AF65-F5344CB8AC3E}">
-        <p14:creationId xmlns:p14="http://schemas.microsoft.com/office/powerpoint/2010/main" val="1255275448"/>
-      </p:ext>
-    </p:extLst>
-  </p:cSld>
-  <p:clrMapOvr>
-    <a:masterClrMapping/>
-  </p:clrMapOvr>
-  <p:timing>
-    <p:tnLst>
-      <p:par>
-        <p:cTn id="1" dur="indefinite" restart="never" nodeType="tmRoot">
-          <p:childTnLst>
-            <p:seq concurrent="1" nextAc="seek">
-              <p:cTn id="2" dur="indefinite" nodeType="mainSeq">
-                <p:childTnLst>
-                  <p:par>
-                    <p:cTn id="3" fill="hold">
-                      <p:stCondLst>
-                        <p:cond delay="indefinite"/>
-                      </p:stCondLst>
-                      <p:childTnLst>
-                        <p:par>
-                          <p:cTn id="4" fill="hold">
-                            <p:stCondLst>
-                              <p:cond delay="0"/>
-                            </p:stCondLst>
-                            <p:childTnLst>
-                              <p:par>
-                                <p:cTn id="5" presetID="1" presetClass="entr" presetSubtype="0" fill="hold" grpId="0" nodeType="clickEffect">
-                                  <p:stCondLst>
-                                    <p:cond delay="0"/>
-                                  </p:stCondLst>
-                                  <p:childTnLst>
-                                    <p:set>
-                                      <p:cBhvr>
-                                        <p:cTn id="6" dur="1" fill="hold">
-                                          <p:stCondLst>
-                                            <p:cond delay="0"/>
-                                          </p:stCondLst>
-                                        </p:cTn>
-                                        <p:tgtEl>
-                                          <p:spTgt spid="11"/>
-                                        </p:tgtEl>
-                                        <p:attrNameLst>
-                                          <p:attrName>style.visibility</p:attrName>
-                                        </p:attrNameLst>
-                                      </p:cBhvr>
-                                      <p:to>
-                                        <p:strVal val="visible"/>
-                                      </p:to>
-                                    </p:set>
-                                  </p:childTnLst>
-                                </p:cTn>
-                              </p:par>
-                            </p:childTnLst>
-                          </p:cTn>
-                        </p:par>
-                      </p:childTnLst>
-                    </p:cTn>
-                  </p:par>
-                </p:childTnLst>
-              </p:cTn>
-              <p:prevCondLst>
-                <p:cond evt="onPrev" delay="0">
-                  <p:tgtEl>
-                    <p:sldTgt/>
-                  </p:tgtEl>
-                </p:cond>
-              </p:prevCondLst>
-              <p:nextCondLst>
-                <p:cond evt="onNext" delay="0">
-                  <p:tgtEl>
-                    <p:sldTgt/>
-                  </p:tgtEl>
-                </p:cond>
-              </p:nextCondLst>
-            </p:seq>
-          </p:childTnLst>
-        </p:cTn>
-      </p:par>
-    </p:tnLst>
-    <p:bldLst>
-      <p:bldP spid="11" grpId="0" animBg="1"/>
-    </p:bldLst>
-  </p:timing>
-</p:sld>
-</file>
-
-<file path=ppt/slides/slide15.xml><?xml version="1.0" encoding="utf-8"?>
-<p:sld xmlns:a="http://schemas.openxmlformats.org/drawingml/2006/main" xmlns:r="http://schemas.openxmlformats.org/officeDocument/2006/relationships" xmlns:p="http://schemas.openxmlformats.org/presentationml/2006/main">
-  <p:cSld>
-    <p:spTree>
-      <p:nvGrpSpPr>
-        <p:cNvPr id="1" name=""/>
-        <p:cNvGrpSpPr/>
-        <p:nvPr/>
-      </p:nvGrpSpPr>
-      <p:grpSpPr>
-        <a:xfrm>
-          <a:off x="0" y="0"/>
-          <a:ext cx="0" cy="0"/>
-          <a:chOff x="0" y="0"/>
-          <a:chExt cx="0" cy="0"/>
-        </a:xfrm>
-      </p:grpSpPr>
-      <p:sp>
-        <p:nvSpPr>
-          <p:cNvPr id="2" name="Title 1">
-            <a:extLst>
-              <a:ext uri="{FF2B5EF4-FFF2-40B4-BE49-F238E27FC236}">
-                <a16:creationId xmlns:a16="http://schemas.microsoft.com/office/drawing/2014/main" id="{C08D30B1-1864-30EF-7EAB-9BEE656C0012}"/>
-              </a:ext>
-            </a:extLst>
-          </p:cNvPr>
-          <p:cNvSpPr>
-            <a:spLocks noGrp="1"/>
-          </p:cNvSpPr>
-          <p:nvPr>
-            <p:ph type="title"/>
-          </p:nvPr>
-        </p:nvSpPr>
-        <p:spPr/>
-        <p:txBody>
-          <a:bodyPr>
-            <a:noAutofit/>
-          </a:bodyPr>
-          <a:lstStyle/>
-          <a:p>
-            <a:r>
-              <a:rPr lang="en-US">
-                <a:solidFill>
-                  <a:srgbClr val="1F3864"/>
-                </a:solidFill>
-              </a:rPr>
-              <a:t>Example: a tournament’s average</a:t>
-            </a:r>
-          </a:p>
-        </p:txBody>
-      </p:sp>
-      <p:sp>
-        <p:nvSpPr>
-          <p:cNvPr id="4" name="Slide Number Placeholder 3">
-            <a:extLst>
-              <a:ext uri="{FF2B5EF4-FFF2-40B4-BE49-F238E27FC236}">
-                <a16:creationId xmlns:a16="http://schemas.microsoft.com/office/drawing/2014/main" id="{3F875068-D051-44AE-498E-1BEBEDE3A7C8}"/>
-              </a:ext>
-            </a:extLst>
-          </p:cNvPr>
-          <p:cNvSpPr>
-            <a:spLocks noGrp="1"/>
-          </p:cNvSpPr>
-          <p:nvPr>
-            <p:ph type="sldNum" sz="quarter" idx="12"/>
-          </p:nvPr>
-        </p:nvSpPr>
-        <p:spPr/>
-        <p:txBody>
-          <a:bodyPr/>
-          <a:lstStyle/>
-          <a:p>
-            <a:fld id="{A80A81DD-F10A-4B1C-963A-0ABBB4865886}" type="slidenum">
-              <a:rPr lang="en-US" sz="1600" smtClean="0"/>
-              <a:t>15</a:t>
-            </a:fld>
-            <a:endParaRPr lang="en-US" sz="1600"/>
-          </a:p>
-        </p:txBody>
-      </p:sp>
-      <p:sp>
-        <p:nvSpPr>
-          <p:cNvPr id="3" name="Title rule">
-            <a:extLst>
-              <a:ext uri="{FF2B5EF4-FFF2-40B4-BE49-F238E27FC236}">
-                <a16:creationId xmlns:a16="http://schemas.microsoft.com/office/drawing/2014/main" id="{30656AA8-9645-F028-C769-A313710853CC}"/>
-              </a:ext>
-            </a:extLst>
-          </p:cNvPr>
-          <p:cNvSpPr/>
-          <p:nvPr/>
-        </p:nvSpPr>
-        <p:spPr>
-          <a:xfrm>
-            <a:off x="838200" y="1600200"/>
-            <a:ext cx="10515600" cy="38100"/>
-          </a:xfrm>
-          <a:prstGeom prst="rect">
-            <a:avLst/>
-          </a:prstGeom>
-          <a:solidFill>
-            <a:srgbClr val="4472C4"/>
-          </a:solidFill>
-          <a:ln w="12700" cap="flat" cmpd="sng" algn="ctr">
-            <a:noFill/>
-            <a:prstDash val="solid"/>
-            <a:miter lim="800000"/>
-          </a:ln>
-          <a:effectLst/>
-          <a:extLst>
-            <a:ext uri="{91240B29-F687-4F45-9708-019B960494DF}">
-              <a14:hiddenLine xmlns:a14="http://schemas.microsoft.com/office/drawing/2010/main" w="12700" cap="flat" cmpd="sng" algn="ctr">
-                <a:solidFill>
-                  <a:schemeClr val="accent1">
-                    <a:shade val="15000"/>
-                  </a:schemeClr>
-                </a:solidFill>
-                <a:prstDash val="solid"/>
-                <a:miter lim="800000"/>
-              </a14:hiddenLine>
-            </a:ext>
-          </a:extLst>
-        </p:spPr>
-        <p:style>
-          <a:lnRef idx="2">
-            <a:schemeClr val="accent1">
-              <a:shade val="15000"/>
-            </a:schemeClr>
-          </a:lnRef>
-          <a:fillRef idx="1">
-            <a:schemeClr val="accent1"/>
-          </a:fillRef>
-          <a:effectRef idx="0">
-            <a:schemeClr val="accent1"/>
-          </a:effectRef>
-          <a:fontRef idx="minor">
-            <a:schemeClr val="lt1"/>
-          </a:fontRef>
-        </p:style>
-        <p:txBody>
-          <a:bodyPr rtlCol="0" anchor="ctr"/>
-          <a:lstStyle/>
-          <a:p>
-            <a:pPr algn="ctr"/>
-            <a:endParaRPr lang="en-US"/>
-          </a:p>
-        </p:txBody>
-      </p:sp>
-      <p:sp>
-        <p:nvSpPr>
-          <p:cNvPr id="8" name="Context">
-            <a:extLst>
-              <a:ext uri="{FF2B5EF4-FFF2-40B4-BE49-F238E27FC236}">
-                <a16:creationId xmlns:a16="http://schemas.microsoft.com/office/drawing/2014/main" id="{71E3EA8C-31B4-DAD4-BC4A-65D72E59AD46}"/>
-              </a:ext>
-            </a:extLst>
-          </p:cNvPr>
-          <p:cNvSpPr txBox="1"/>
-          <p:nvPr/>
-        </p:nvSpPr>
-        <p:spPr>
-          <a:xfrm>
-            <a:off x="762000" y="1879600"/>
-            <a:ext cx="10668000" cy="381000"/>
-          </a:xfrm>
-          <a:prstGeom prst="rect">
-            <a:avLst/>
-          </a:prstGeom>
-          <a:noFill/>
-        </p:spPr>
-        <p:txBody>
-          <a:bodyPr vert="horz" wrap="square" rtlCol="0">
-            <a:spAutoFit/>
-          </a:bodyPr>
-          <a:lstStyle/>
-          <a:p>
-            <a:pPr>
-              <a:spcAft>
-                <a:spcPts val="200"/>
-              </a:spcAft>
-            </a:pPr>
-            <a:r>
-              <a:rPr lang="en-US">
-                <a:solidFill>
-                  <a:srgbClr val="000000"/>
-                </a:solidFill>
-                <a:latin typeface="Calibri" panose="020F0502020204030204" pitchFamily="34" charset="0"/>
-              </a:rPr>
-              <a:t>Goals per World Cup match:  X ~ Poisson(λ = 2.69). A tournament averages over 64 matches.</a:t>
-            </a:r>
-          </a:p>
-        </p:txBody>
-      </p:sp>
-      <p:sp>
-        <p:nvSpPr>
-          <p:cNvPr id="9" name="Numbers">
-            <a:extLst>
-              <a:ext uri="{FF2B5EF4-FFF2-40B4-BE49-F238E27FC236}">
-                <a16:creationId xmlns:a16="http://schemas.microsoft.com/office/drawing/2014/main" id="{C419F151-05B2-3E4B-BAE8-BB1F06D9D1FD}"/>
-              </a:ext>
-            </a:extLst>
-          </p:cNvPr>
-          <p:cNvSpPr txBox="1"/>
-          <p:nvPr/>
-        </p:nvSpPr>
-        <p:spPr>
-          <a:xfrm>
-            <a:off x="762000" y="2286000"/>
-            <a:ext cx="10668000" cy="400110"/>
-          </a:xfrm>
-          <a:prstGeom prst="rect">
-            <a:avLst/>
-          </a:prstGeom>
-          <a:noFill/>
-        </p:spPr>
-        <p:txBody>
-          <a:bodyPr vert="horz" wrap="square" rtlCol="0">
-            <a:spAutoFit/>
-          </a:bodyPr>
-          <a:lstStyle/>
-          <a:p>
-            <a:pPr>
-              <a:spcAft>
-                <a:spcPts val="200"/>
-              </a:spcAft>
-            </a:pPr>
-            <a:r>
-              <a:rPr lang="el-GR" sz="2000" b="1">
-                <a:solidFill>
-                  <a:srgbClr val="000000"/>
-                </a:solidFill>
-                <a:latin typeface="Calibri" panose="020F0502020204030204" pitchFamily="34" charset="0"/>
-              </a:rPr>
-              <a:t>μ = λ = 2.69;     σ = √2.69 ≈ 1.64;     n = 64</a:t>
-            </a:r>
-            <a:endParaRPr lang="en-US" sz="2000" b="1">
-              <a:solidFill>
-                <a:srgbClr val="000000"/>
-              </a:solidFill>
-              <a:latin typeface="Calibri" panose="020F0502020204030204" pitchFamily="34" charset="0"/>
-            </a:endParaRPr>
-          </a:p>
-        </p:txBody>
-      </p:sp>
-      <p:sp>
-        <p:nvSpPr>
-          <p:cNvPr id="10" name="Question">
-            <a:extLst>
-              <a:ext uri="{FF2B5EF4-FFF2-40B4-BE49-F238E27FC236}">
-                <a16:creationId xmlns:a16="http://schemas.microsoft.com/office/drawing/2014/main" id="{B31E395F-B84E-D1E9-D22A-222467FC4105}"/>
-              </a:ext>
-            </a:extLst>
-          </p:cNvPr>
-          <p:cNvSpPr txBox="1"/>
-          <p:nvPr/>
-        </p:nvSpPr>
-        <p:spPr>
-          <a:xfrm>
-            <a:off x="762000" y="2711510"/>
-            <a:ext cx="10668000" cy="974626"/>
-          </a:xfrm>
-          <a:prstGeom prst="rect">
-            <a:avLst/>
-          </a:prstGeom>
-          <a:noFill/>
-        </p:spPr>
-        <p:txBody>
-          <a:bodyPr vert="horz" wrap="square" rtlCol="0">
-            <a:spAutoFit/>
-          </a:bodyPr>
-          <a:lstStyle/>
-          <a:p>
-            <a:pPr>
-              <a:spcAft>
-                <a:spcPts val="200"/>
-              </a:spcAft>
-            </a:pPr>
-            <a:r>
-              <a:rPr lang="en-US" b="1">
-                <a:solidFill>
-                  <a:srgbClr val="C00000"/>
-                </a:solidFill>
-                <a:latin typeface="Calibri" panose="020F0502020204030204" pitchFamily="34" charset="0"/>
-              </a:rPr>
-              <a:t>(a)  What is the standard error of a tournament’s average?</a:t>
-            </a:r>
-          </a:p>
-          <a:p>
-            <a:pPr>
-              <a:spcAft>
-                <a:spcPts val="200"/>
-              </a:spcAft>
-            </a:pPr>
-            <a:r>
-              <a:rPr lang="en-US" b="1">
-                <a:solidFill>
-                  <a:srgbClr val="C00000"/>
-                </a:solidFill>
-                <a:latin typeface="Calibri" panose="020F0502020204030204" pitchFamily="34" charset="0"/>
-              </a:rPr>
-              <a:t>(b)  About 95% of tournaments average between what two values?</a:t>
-            </a:r>
-          </a:p>
-          <a:p>
-            <a:pPr>
-              <a:spcAft>
-                <a:spcPts val="200"/>
-              </a:spcAft>
-            </a:pPr>
-            <a:r>
-              <a:rPr lang="en-US" b="1">
-                <a:solidFill>
-                  <a:srgbClr val="C00000"/>
-                </a:solidFill>
-                <a:latin typeface="Calibri" panose="020F0502020204030204" pitchFamily="34" charset="0"/>
-              </a:rPr>
-              <a:t>(c)  The 2018 World Cup averaged 169 / 64 = 2.64 goals per match. Surprising?</a:t>
-            </a:r>
-          </a:p>
-        </p:txBody>
-      </p:sp>
-      <p:sp>
-        <p:nvSpPr>
-          <p:cNvPr id="11" name="Result">
-            <a:extLst>
-              <a:ext uri="{FF2B5EF4-FFF2-40B4-BE49-F238E27FC236}">
-                <a16:creationId xmlns:a16="http://schemas.microsoft.com/office/drawing/2014/main" id="{5A70F68E-0D93-07B8-82B2-4D8F2F681D0D}"/>
-              </a:ext>
-            </a:extLst>
-          </p:cNvPr>
-          <p:cNvSpPr/>
-          <p:nvPr/>
-        </p:nvSpPr>
-        <p:spPr>
-          <a:xfrm>
-            <a:off x="762000" y="3838536"/>
-            <a:ext cx="10668000" cy="1098054"/>
-          </a:xfrm>
-          <a:prstGeom prst="roundRect">
-            <a:avLst>
-              <a:gd name="adj" fmla="val 4000"/>
-            </a:avLst>
-          </a:prstGeom>
-          <a:solidFill>
-            <a:srgbClr val="F2F6FC"/>
-          </a:solidFill>
-          <a:ln w="15875">
-            <a:solidFill>
-              <a:srgbClr val="4472C4"/>
-            </a:solidFill>
-          </a:ln>
-        </p:spPr>
-        <p:style>
-          <a:lnRef idx="2">
-            <a:schemeClr val="accent1">
-              <a:shade val="15000"/>
-            </a:schemeClr>
-          </a:lnRef>
-          <a:fillRef idx="1">
-            <a:schemeClr val="accent1"/>
-          </a:fillRef>
-          <a:effectRef idx="0">
-            <a:schemeClr val="accent1"/>
-          </a:effectRef>
-          <a:fontRef idx="minor">
-            <a:schemeClr val="lt1"/>
-          </a:fontRef>
-        </p:style>
-        <p:txBody>
-          <a:bodyPr wrap="square" lIns="152400" tIns="76200" rIns="152400" bIns="76200" rtlCol="0" anchor="ctr">
-            <a:spAutoFit/>
-          </a:bodyPr>
-          <a:lstStyle/>
-          <a:p>
-            <a:r>
-              <a:rPr lang="en-US" sz="2000" b="1">
-                <a:solidFill>
-                  <a:srgbClr val="C00000"/>
-                </a:solidFill>
-                <a:latin typeface="Calibri" panose="020F0502020204030204" pitchFamily="34" charset="0"/>
-              </a:rPr>
-              <a:t>(a)  1.64 / √64 ≈ 0.205</a:t>
-            </a:r>
-          </a:p>
-          <a:p>
-            <a:r>
-              <a:rPr lang="en-US" sz="2000" b="1">
-                <a:solidFill>
-                  <a:srgbClr val="C00000"/>
-                </a:solidFill>
-                <a:latin typeface="Calibri" panose="020F0502020204030204" pitchFamily="34" charset="0"/>
-              </a:rPr>
-              <a:t>(b)  2.69 ± 2(0.205):   2.28 to 3.10 goals per match</a:t>
-            </a:r>
-          </a:p>
-          <a:p>
-            <a:r>
-              <a:rPr lang="en-US" sz="2000" b="1">
-                <a:solidFill>
-                  <a:srgbClr val="C00000"/>
-                </a:solidFill>
-                <a:latin typeface="Calibri" panose="020F0502020204030204" pitchFamily="34" charset="0"/>
-              </a:rPr>
-              <a:t>(c)  No:  2.64 is well inside 2.28 to 3.10</a:t>
-            </a:r>
-          </a:p>
-        </p:txBody>
-      </p:sp>
-    </p:spTree>
-    <p:extLst>
-      <p:ext uri="{BB962C8B-B14F-4D97-AF65-F5344CB8AC3E}">
-        <p14:creationId xmlns:p14="http://schemas.microsoft.com/office/powerpoint/2010/main" val="3079557809"/>
-      </p:ext>
-    </p:extLst>
-  </p:cSld>
-  <p:clrMapOvr>
-    <a:masterClrMapping/>
-  </p:clrMapOvr>
-  <p:timing>
-    <p:tnLst>
-      <p:par>
-        <p:cTn id="1" dur="indefinite" restart="never" nodeType="tmRoot">
-          <p:childTnLst>
-            <p:seq concurrent="1" nextAc="seek">
-              <p:cTn id="2" dur="indefinite" nodeType="mainSeq">
-                <p:childTnLst>
-                  <p:par>
-                    <p:cTn id="3" fill="hold">
-                      <p:stCondLst>
-                        <p:cond delay="indefinite"/>
-                      </p:stCondLst>
-                      <p:childTnLst>
-                        <p:par>
-                          <p:cTn id="4" fill="hold">
-                            <p:stCondLst>
-                              <p:cond delay="0"/>
-                            </p:stCondLst>
-                            <p:childTnLst>
-                              <p:par>
-                                <p:cTn id="5" presetID="1" presetClass="entr" presetSubtype="0" fill="hold" grpId="0" nodeType="clickEffect">
-                                  <p:stCondLst>
-                                    <p:cond delay="0"/>
-                                  </p:stCondLst>
-                                  <p:childTnLst>
-                                    <p:set>
-                                      <p:cBhvr>
-                                        <p:cTn id="6" dur="1" fill="hold">
-                                          <p:stCondLst>
-                                            <p:cond delay="0"/>
-                                          </p:stCondLst>
-                                        </p:cTn>
-                                        <p:tgtEl>
-                                          <p:spTgt spid="11"/>
-                                        </p:tgtEl>
-                                        <p:attrNameLst>
-                                          <p:attrName>style.visibility</p:attrName>
-                                        </p:attrNameLst>
-                                      </p:cBhvr>
-                                      <p:to>
-                                        <p:strVal val="visible"/>
-                                      </p:to>
-                                    </p:set>
-                                  </p:childTnLst>
-                                </p:cTn>
-                              </p:par>
-                            </p:childTnLst>
-                          </p:cTn>
-                        </p:par>
-                      </p:childTnLst>
-                    </p:cTn>
-                  </p:par>
-                </p:childTnLst>
-              </p:cTn>
-              <p:prevCondLst>
-                <p:cond evt="onPrev" delay="0">
-                  <p:tgtEl>
-                    <p:sldTgt/>
-                  </p:tgtEl>
-                </p:cond>
-              </p:prevCondLst>
-              <p:nextCondLst>
-                <p:cond evt="onNext" delay="0">
-                  <p:tgtEl>
-                    <p:sldTgt/>
-                  </p:tgtEl>
-                </p:cond>
-              </p:nextCondLst>
-            </p:seq>
-          </p:childTnLst>
-        </p:cTn>
-      </p:par>
-    </p:tnLst>
-    <p:bldLst>
-      <p:bldP spid="11" grpId="0" animBg="1"/>
-    </p:bldLst>
-  </p:timing>
-</p:sld>
-</file>
-
-<file path=ppt/slides/slide16.xml><?xml version="1.0" encoding="utf-8"?>
-<p:sld xmlns:a="http://schemas.openxmlformats.org/drawingml/2006/main" xmlns:r="http://schemas.openxmlformats.org/officeDocument/2006/relationships" xmlns:p="http://schemas.openxmlformats.org/presentationml/2006/main">
-  <p:cSld>
-    <p:spTree>
-      <p:nvGrpSpPr>
-        <p:cNvPr id="1" name=""/>
-        <p:cNvGrpSpPr/>
-        <p:nvPr/>
-      </p:nvGrpSpPr>
-      <p:grpSpPr>
-        <a:xfrm>
-          <a:off x="0" y="0"/>
-          <a:ext cx="0" cy="0"/>
-          <a:chOff x="0" y="0"/>
-          <a:chExt cx="0" cy="0"/>
-        </a:xfrm>
-      </p:grpSpPr>
-      <p:sp>
-        <p:nvSpPr>
-          <p:cNvPr id="2" name="Title 1">
-            <a:extLst>
-              <a:ext uri="{FF2B5EF4-FFF2-40B4-BE49-F238E27FC236}">
-                <a16:creationId xmlns:a16="http://schemas.microsoft.com/office/drawing/2014/main" id="{D617AB41-6AD1-9EF2-7F95-46A904399681}"/>
-              </a:ext>
-            </a:extLst>
-          </p:cNvPr>
-          <p:cNvSpPr>
-            <a:spLocks noGrp="1"/>
-          </p:cNvSpPr>
-          <p:nvPr>
-            <p:ph type="title"/>
-          </p:nvPr>
-        </p:nvSpPr>
-        <p:spPr/>
-        <p:txBody>
-          <a:bodyPr>
-            <a:noAutofit/>
-          </a:bodyPr>
-          <a:lstStyle/>
-          <a:p>
-            <a:r>
-              <a:rPr lang="en-US">
-                <a:solidFill>
-                  <a:srgbClr val="1F3864"/>
-                </a:solidFill>
-              </a:rPr>
-              <a:t>From an estimate to an interval</a:t>
-            </a:r>
-          </a:p>
-        </p:txBody>
-      </p:sp>
-      <p:sp>
-        <p:nvSpPr>
-          <p:cNvPr id="4" name="Slide Number Placeholder 3">
-            <a:extLst>
-              <a:ext uri="{FF2B5EF4-FFF2-40B4-BE49-F238E27FC236}">
-                <a16:creationId xmlns:a16="http://schemas.microsoft.com/office/drawing/2014/main" id="{97D44AE5-98B5-B840-6B8A-D345C7C2E2F0}"/>
-              </a:ext>
-            </a:extLst>
-          </p:cNvPr>
-          <p:cNvSpPr>
-            <a:spLocks noGrp="1"/>
-          </p:cNvSpPr>
-          <p:nvPr>
-            <p:ph type="sldNum" sz="quarter" idx="12"/>
-          </p:nvPr>
-        </p:nvSpPr>
-        <p:spPr/>
-        <p:txBody>
-          <a:bodyPr/>
-          <a:lstStyle/>
-          <a:p>
-            <a:fld id="{A80A81DD-F10A-4B1C-963A-0ABBB4865886}" type="slidenum">
-              <a:rPr lang="en-US" sz="1600" smtClean="0"/>
-              <a:t>16</a:t>
-            </a:fld>
-            <a:endParaRPr lang="en-US" sz="1600"/>
-          </a:p>
-        </p:txBody>
-      </p:sp>
-      <p:sp>
-        <p:nvSpPr>
-          <p:cNvPr id="5" name="TextBox 4">
-            <a:extLst>
-              <a:ext uri="{FF2B5EF4-FFF2-40B4-BE49-F238E27FC236}">
-                <a16:creationId xmlns:a16="http://schemas.microsoft.com/office/drawing/2014/main" id="{A34AAE17-27CE-D7A3-C663-11BB48ACBF5B}"/>
-              </a:ext>
-            </a:extLst>
-          </p:cNvPr>
-          <p:cNvSpPr txBox="1"/>
-          <p:nvPr/>
-        </p:nvSpPr>
-        <p:spPr>
-          <a:xfrm>
-            <a:off x="762000" y="1879600"/>
-            <a:ext cx="10668000" cy="345440"/>
-          </a:xfrm>
-          <a:prstGeom prst="rect">
-            <a:avLst/>
-          </a:prstGeom>
-          <a:noFill/>
-        </p:spPr>
-        <p:txBody>
-          <a:bodyPr vert="horz" wrap="square" rtlCol="0">
-            <a:spAutoFit/>
-          </a:bodyPr>
-          <a:lstStyle/>
-          <a:p>
-            <a:pPr marL="304800" indent="-304800"/>
-            <a:r>
-              <a:rPr lang="en-US" sz="1600">
-                <a:solidFill>
-                  <a:srgbClr val="000000"/>
-                </a:solidFill>
-              </a:rPr>
-              <a:t>point estimate</a:t>
-            </a:r>
-          </a:p>
-        </p:txBody>
-      </p:sp>
-      <p:sp>
-        <p:nvSpPr>
-          <p:cNvPr id="6" name="TextBox 5">
-            <a:extLst>
-              <a:ext uri="{FF2B5EF4-FFF2-40B4-BE49-F238E27FC236}">
-                <a16:creationId xmlns:a16="http://schemas.microsoft.com/office/drawing/2014/main" id="{E410A0F8-5E1E-9A1D-B64C-50827EE6C9B2}"/>
-              </a:ext>
-            </a:extLst>
-          </p:cNvPr>
-          <p:cNvSpPr txBox="1"/>
-          <p:nvPr/>
-        </p:nvSpPr>
-        <p:spPr>
-          <a:xfrm>
-            <a:off x="1117600" y="2225040"/>
-            <a:ext cx="10312400" cy="338554"/>
-          </a:xfrm>
-          <a:prstGeom prst="rect">
-            <a:avLst/>
-          </a:prstGeom>
-          <a:noFill/>
-        </p:spPr>
-        <p:txBody>
-          <a:bodyPr vert="horz" wrap="square" rtlCol="0">
-            <a:spAutoFit/>
-          </a:bodyPr>
-          <a:lstStyle/>
-          <a:p>
-            <a:r>
-              <a:rPr lang="en-US" sz="1600" b="1">
-                <a:solidFill>
-                  <a:srgbClr val="C00000"/>
-                </a:solidFill>
-              </a:rPr>
-              <a:t>a single statistic used to estimate a parameter:  x̄ for μ,  p̂ for p</a:t>
-            </a:r>
-          </a:p>
-        </p:txBody>
-      </p:sp>
-      <p:sp>
-        <p:nvSpPr>
-          <p:cNvPr id="7" name="TextBox 6">
-            <a:extLst>
-              <a:ext uri="{FF2B5EF4-FFF2-40B4-BE49-F238E27FC236}">
-                <a16:creationId xmlns:a16="http://schemas.microsoft.com/office/drawing/2014/main" id="{47D3CD95-D52E-5227-B663-7C0A72677B6E}"/>
-              </a:ext>
-            </a:extLst>
-          </p:cNvPr>
-          <p:cNvSpPr txBox="1"/>
-          <p:nvPr/>
-        </p:nvSpPr>
-        <p:spPr>
-          <a:xfrm>
-            <a:off x="762000" y="2741394"/>
-            <a:ext cx="10668000" cy="345440"/>
-          </a:xfrm>
-          <a:prstGeom prst="rect">
-            <a:avLst/>
-          </a:prstGeom>
-          <a:noFill/>
-        </p:spPr>
-        <p:txBody>
-          <a:bodyPr vert="horz" wrap="square" rtlCol="0">
-            <a:spAutoFit/>
-          </a:bodyPr>
-          <a:lstStyle/>
-          <a:p>
-            <a:pPr marL="304800" indent="-304800"/>
-            <a:r>
-              <a:rPr lang="en-US" sz="1600">
-                <a:solidFill>
-                  <a:srgbClr val="000000"/>
-                </a:solidFill>
-              </a:rPr>
-              <a:t>confidence interval</a:t>
-            </a:r>
-          </a:p>
-        </p:txBody>
-      </p:sp>
-      <p:sp>
-        <p:nvSpPr>
-          <p:cNvPr id="8" name="TextBox 7">
-            <a:extLst>
-              <a:ext uri="{FF2B5EF4-FFF2-40B4-BE49-F238E27FC236}">
-                <a16:creationId xmlns:a16="http://schemas.microsoft.com/office/drawing/2014/main" id="{1CE3E601-601D-C6B1-8265-C079CB8C9269}"/>
-              </a:ext>
-            </a:extLst>
-          </p:cNvPr>
-          <p:cNvSpPr txBox="1"/>
-          <p:nvPr/>
-        </p:nvSpPr>
-        <p:spPr>
-          <a:xfrm>
-            <a:off x="1117600" y="3086834"/>
-            <a:ext cx="10312400" cy="338554"/>
-          </a:xfrm>
-          <a:prstGeom prst="rect">
-            <a:avLst/>
-          </a:prstGeom>
-          <a:noFill/>
-        </p:spPr>
-        <p:txBody>
-          <a:bodyPr vert="horz" wrap="square" rtlCol="0">
-            <a:spAutoFit/>
-          </a:bodyPr>
-          <a:lstStyle/>
-          <a:p>
-            <a:r>
-              <a:rPr lang="en-US" sz="1600" b="1">
-                <a:solidFill>
-                  <a:srgbClr val="C00000"/>
-                </a:solidFill>
-              </a:rPr>
-              <a:t>a range of plausible values for the parameter:  estimate ± margin of error</a:t>
-            </a:r>
-          </a:p>
-        </p:txBody>
-      </p:sp>
-      <p:sp>
-        <p:nvSpPr>
-          <p:cNvPr id="9" name="TextBox 8">
-            <a:extLst>
-              <a:ext uri="{FF2B5EF4-FFF2-40B4-BE49-F238E27FC236}">
-                <a16:creationId xmlns:a16="http://schemas.microsoft.com/office/drawing/2014/main" id="{FB002BF4-8037-2F73-E27A-7A453477E389}"/>
-              </a:ext>
-            </a:extLst>
-          </p:cNvPr>
-          <p:cNvSpPr txBox="1"/>
-          <p:nvPr/>
-        </p:nvSpPr>
-        <p:spPr>
-          <a:xfrm>
-            <a:off x="762000" y="3603188"/>
-            <a:ext cx="10668000" cy="345440"/>
-          </a:xfrm>
-          <a:prstGeom prst="rect">
-            <a:avLst/>
-          </a:prstGeom>
-          <a:noFill/>
-        </p:spPr>
-        <p:txBody>
-          <a:bodyPr vert="horz" wrap="square" rtlCol="0">
-            <a:spAutoFit/>
-          </a:bodyPr>
-          <a:lstStyle/>
-          <a:p>
-            <a:pPr marL="304800" indent="-304800"/>
-            <a:r>
-              <a:rPr lang="en-US" sz="1600">
-                <a:solidFill>
-                  <a:srgbClr val="000000"/>
-                </a:solidFill>
-              </a:rPr>
-              <a:t>95% confidence</a:t>
-            </a:r>
-          </a:p>
-        </p:txBody>
-      </p:sp>
-      <p:sp>
-        <p:nvSpPr>
-          <p:cNvPr id="10" name="TextBox 9">
-            <a:extLst>
-              <a:ext uri="{FF2B5EF4-FFF2-40B4-BE49-F238E27FC236}">
-                <a16:creationId xmlns:a16="http://schemas.microsoft.com/office/drawing/2014/main" id="{10F3B3E3-D27C-E008-C93E-ED70BD2A4754}"/>
-              </a:ext>
-            </a:extLst>
-          </p:cNvPr>
-          <p:cNvSpPr txBox="1"/>
-          <p:nvPr/>
-        </p:nvSpPr>
-        <p:spPr>
-          <a:xfrm>
-            <a:off x="1117600" y="3948628"/>
-            <a:ext cx="10312400" cy="338554"/>
-          </a:xfrm>
-          <a:prstGeom prst="rect">
-            <a:avLst/>
-          </a:prstGeom>
-          <a:noFill/>
-        </p:spPr>
-        <p:txBody>
-          <a:bodyPr vert="horz" wrap="square" rtlCol="0">
-            <a:spAutoFit/>
-          </a:bodyPr>
-          <a:lstStyle/>
-          <a:p>
-            <a:r>
-              <a:rPr lang="en-US" sz="1600" b="1">
-                <a:solidFill>
-                  <a:srgbClr val="C00000"/>
-                </a:solidFill>
-              </a:rPr>
-              <a:t>the method captures the parameter in about 95% of all possible samples</a:t>
-            </a:r>
-            <a:endParaRPr lang="en-US" sz="1600" b="1" dirty="0">
-              <a:solidFill>
-                <a:srgbClr val="C00000"/>
-              </a:solidFill>
-            </a:endParaRPr>
-          </a:p>
-        </p:txBody>
-      </p:sp>
-      <p:sp>
-        <p:nvSpPr>
-          <p:cNvPr id="3" name="Title rule">
-            <a:extLst>
-              <a:ext uri="{FF2B5EF4-FFF2-40B4-BE49-F238E27FC236}">
-                <a16:creationId xmlns:a16="http://schemas.microsoft.com/office/drawing/2014/main" id="{B469CAAB-2B69-6863-7C28-0C5959E5734B}"/>
-              </a:ext>
-            </a:extLst>
-          </p:cNvPr>
-          <p:cNvSpPr/>
-          <p:nvPr/>
-        </p:nvSpPr>
-        <p:spPr>
-          <a:xfrm>
-            <a:off x="838200" y="1600200"/>
-            <a:ext cx="10515600" cy="38100"/>
-          </a:xfrm>
-          <a:prstGeom prst="rect">
-            <a:avLst/>
-          </a:prstGeom>
-          <a:solidFill>
-            <a:srgbClr val="4472C4"/>
-          </a:solidFill>
-          <a:ln w="12700" cap="flat" cmpd="sng" algn="ctr">
-            <a:noFill/>
-            <a:prstDash val="solid"/>
-            <a:miter lim="800000"/>
-          </a:ln>
-          <a:effectLst/>
-          <a:extLst>
-            <a:ext uri="{91240B29-F687-4F45-9708-019B960494DF}">
-              <a14:hiddenLine xmlns:a14="http://schemas.microsoft.com/office/drawing/2010/main" w="12700" cap="flat" cmpd="sng" algn="ctr">
-                <a:solidFill>
-                  <a:schemeClr val="accent1">
-                    <a:shade val="15000"/>
-                  </a:schemeClr>
-                </a:solidFill>
-                <a:prstDash val="solid"/>
-                <a:miter lim="800000"/>
-              </a14:hiddenLine>
-            </a:ext>
-          </a:extLst>
-        </p:spPr>
-        <p:style>
-          <a:lnRef idx="2">
-            <a:schemeClr val="accent1">
-              <a:shade val="15000"/>
-            </a:schemeClr>
-          </a:lnRef>
-          <a:fillRef idx="1">
-            <a:schemeClr val="accent1"/>
-          </a:fillRef>
-          <a:effectRef idx="0">
-            <a:schemeClr val="accent1"/>
-          </a:effectRef>
-          <a:fontRef idx="minor">
-            <a:schemeClr val="lt1"/>
-          </a:fontRef>
-        </p:style>
-        <p:txBody>
-          <a:bodyPr rtlCol="0" anchor="ctr"/>
-          <a:lstStyle/>
-          <a:p>
-            <a:pPr algn="ctr"/>
-            <a:endParaRPr lang="en-US"/>
-          </a:p>
-        </p:txBody>
-      </p:sp>
-    </p:spTree>
-    <p:extLst>
-      <p:ext uri="{BB962C8B-B14F-4D97-AF65-F5344CB8AC3E}">
-        <p14:creationId xmlns:p14="http://schemas.microsoft.com/office/powerpoint/2010/main" val="4109572498"/>
-      </p:ext>
-    </p:extLst>
-  </p:cSld>
-  <p:clrMapOvr>
-    <a:masterClrMapping/>
-  </p:clrMapOvr>
-  <p:timing>
-    <p:tnLst>
-      <p:par>
-        <p:cTn id="1" dur="indefinite" restart="never" nodeType="tmRoot">
-          <p:childTnLst>
-            <p:seq concurrent="1" nextAc="seek">
-              <p:cTn id="2" dur="indefinite" nodeType="mainSeq">
-                <p:childTnLst>
-                  <p:par>
-                    <p:cTn id="3" fill="hold">
-                      <p:stCondLst>
-                        <p:cond delay="indefinite"/>
-                      </p:stCondLst>
-                      <p:childTnLst>
-                        <p:par>
-                          <p:cTn id="4" fill="hold">
-                            <p:stCondLst>
-                              <p:cond delay="0"/>
-                            </p:stCondLst>
-                            <p:childTnLst>
-                              <p:par>
-                                <p:cTn id="5" presetID="34" presetClass="entr" presetSubtype="0" fill="hold" grpId="0" nodeType="clickEffect">
-                                  <p:stCondLst>
-                                    <p:cond delay="0"/>
-                                  </p:stCondLst>
-                                  <p:childTnLst>
-                                    <p:set>
-                                      <p:cBhvr>
-                                        <p:cTn id="6" dur="1" fill="hold">
-                                          <p:stCondLst>
-                                            <p:cond delay="0"/>
-                                          </p:stCondLst>
-                                        </p:cTn>
-                                        <p:tgtEl>
-                                          <p:spTgt spid="6"/>
-                                        </p:tgtEl>
-                                        <p:attrNameLst>
-                                          <p:attrName>style.visibility</p:attrName>
-                                        </p:attrNameLst>
-                                      </p:cBhvr>
-                                      <p:to>
-                                        <p:strVal val="visible"/>
-                                      </p:to>
-                                    </p:set>
-                                    <p:anim from="(-#ppt_w/2)" to="(#ppt_x)" calcmode="lin" valueType="num">
-                                      <p:cBhvr>
-                                        <p:cTn id="7" dur="600" fill="hold">
-                                          <p:stCondLst>
-                                            <p:cond delay="0"/>
-                                          </p:stCondLst>
-                                        </p:cTn>
-                                        <p:tgtEl>
-                                          <p:spTgt spid="6"/>
-                                        </p:tgtEl>
-                                        <p:attrNameLst>
-                                          <p:attrName>ppt_x</p:attrName>
-                                        </p:attrNameLst>
-                                      </p:cBhvr>
-                                    </p:anim>
-                                    <p:anim from="0" to="-1.0" calcmode="lin" valueType="num">
-                                      <p:cBhvr>
-                                        <p:cTn id="8" dur="200" decel="50000" autoRev="1" fill="hold">
-                                          <p:stCondLst>
-                                            <p:cond delay="600"/>
-                                          </p:stCondLst>
-                                        </p:cTn>
-                                        <p:tgtEl>
-                                          <p:spTgt spid="6"/>
-                                        </p:tgtEl>
-                                        <p:attrNameLst>
-                                          <p:attrName>xshear</p:attrName>
-                                        </p:attrNameLst>
-                                      </p:cBhvr>
-                                    </p:anim>
-                                    <p:animScale>
-                                      <p:cBhvr>
-                                        <p:cTn id="9" dur="200" decel="100000" autoRev="1" fill="hold">
-                                          <p:stCondLst>
-                                            <p:cond delay="600"/>
-                                          </p:stCondLst>
-                                        </p:cTn>
-                                        <p:tgtEl>
-                                          <p:spTgt spid="6"/>
-                                        </p:tgtEl>
-                                      </p:cBhvr>
-                                      <p:from x="100000" y="100000"/>
-                                      <p:to x="80000" y="100000"/>
-                                    </p:animScale>
-                                    <p:anim by="(#ppt_h/3+#ppt_w*0.1)" calcmode="lin" valueType="num">
-                                      <p:cBhvr additive="sum">
-                                        <p:cTn id="10" dur="200" decel="100000" autoRev="1" fill="hold">
-                                          <p:stCondLst>
-                                            <p:cond delay="600"/>
-                                          </p:stCondLst>
-                                        </p:cTn>
-                                        <p:tgtEl>
-                                          <p:spTgt spid="6"/>
-                                        </p:tgtEl>
-                                        <p:attrNameLst>
-                                          <p:attrName>ppt_x</p:attrName>
-                                        </p:attrNameLst>
-                                      </p:cBhvr>
-                                    </p:anim>
-                                  </p:childTnLst>
-                                </p:cTn>
-                              </p:par>
-                            </p:childTnLst>
-                          </p:cTn>
-                        </p:par>
-                      </p:childTnLst>
-                    </p:cTn>
-                  </p:par>
-                  <p:par>
-                    <p:cTn id="11" fill="hold">
-                      <p:stCondLst>
-                        <p:cond delay="indefinite"/>
-                      </p:stCondLst>
-                      <p:childTnLst>
-                        <p:par>
-                          <p:cTn id="12" fill="hold">
-                            <p:stCondLst>
-                              <p:cond delay="0"/>
-                            </p:stCondLst>
-                            <p:childTnLst>
-                              <p:par>
-                                <p:cTn id="13" presetID="34" presetClass="entr" presetSubtype="0" fill="hold" grpId="0" nodeType="clickEffect">
-                                  <p:stCondLst>
-                                    <p:cond delay="0"/>
-                                  </p:stCondLst>
-                                  <p:childTnLst>
-                                    <p:set>
-                                      <p:cBhvr>
-                                        <p:cTn id="14" dur="1" fill="hold">
-                                          <p:stCondLst>
-                                            <p:cond delay="0"/>
-                                          </p:stCondLst>
-                                        </p:cTn>
-                                        <p:tgtEl>
-                                          <p:spTgt spid="8"/>
-                                        </p:tgtEl>
-                                        <p:attrNameLst>
-                                          <p:attrName>style.visibility</p:attrName>
-                                        </p:attrNameLst>
-                                      </p:cBhvr>
-                                      <p:to>
-                                        <p:strVal val="visible"/>
-                                      </p:to>
-                                    </p:set>
-                                    <p:anim from="(-#ppt_w/2)" to="(#ppt_x)" calcmode="lin" valueType="num">
-                                      <p:cBhvr>
-                                        <p:cTn id="15" dur="600" fill="hold">
-                                          <p:stCondLst>
-                                            <p:cond delay="0"/>
-                                          </p:stCondLst>
-                                        </p:cTn>
-                                        <p:tgtEl>
-                                          <p:spTgt spid="8"/>
-                                        </p:tgtEl>
-                                        <p:attrNameLst>
-                                          <p:attrName>ppt_x</p:attrName>
-                                        </p:attrNameLst>
-                                      </p:cBhvr>
-                                    </p:anim>
-                                    <p:anim from="0" to="-1.0" calcmode="lin" valueType="num">
-                                      <p:cBhvr>
-                                        <p:cTn id="16" dur="200" decel="50000" autoRev="1" fill="hold">
-                                          <p:stCondLst>
-                                            <p:cond delay="600"/>
-                                          </p:stCondLst>
-                                        </p:cTn>
-                                        <p:tgtEl>
-                                          <p:spTgt spid="8"/>
-                                        </p:tgtEl>
-                                        <p:attrNameLst>
-                                          <p:attrName>xshear</p:attrName>
-                                        </p:attrNameLst>
-                                      </p:cBhvr>
-                                    </p:anim>
-                                    <p:animScale>
-                                      <p:cBhvr>
-                                        <p:cTn id="17" dur="200" decel="100000" autoRev="1" fill="hold">
-                                          <p:stCondLst>
-                                            <p:cond delay="600"/>
-                                          </p:stCondLst>
-                                        </p:cTn>
-                                        <p:tgtEl>
-                                          <p:spTgt spid="8"/>
-                                        </p:tgtEl>
-                                      </p:cBhvr>
-                                      <p:from x="100000" y="100000"/>
-                                      <p:to x="80000" y="100000"/>
-                                    </p:animScale>
-                                    <p:anim by="(#ppt_h/3+#ppt_w*0.1)" calcmode="lin" valueType="num">
-                                      <p:cBhvr additive="sum">
-                                        <p:cTn id="18" dur="200" decel="100000" autoRev="1" fill="hold">
-                                          <p:stCondLst>
-                                            <p:cond delay="600"/>
-                                          </p:stCondLst>
-                                        </p:cTn>
-                                        <p:tgtEl>
-                                          <p:spTgt spid="8"/>
-                                        </p:tgtEl>
-                                        <p:attrNameLst>
-                                          <p:attrName>ppt_x</p:attrName>
-                                        </p:attrNameLst>
-                                      </p:cBhvr>
-                                    </p:anim>
-                                  </p:childTnLst>
-                                </p:cTn>
-                              </p:par>
-                            </p:childTnLst>
-                          </p:cTn>
-                        </p:par>
-                      </p:childTnLst>
-                    </p:cTn>
-                  </p:par>
-                  <p:par>
-                    <p:cTn id="19" fill="hold">
-                      <p:stCondLst>
-                        <p:cond delay="indefinite"/>
-                      </p:stCondLst>
-                      <p:childTnLst>
-                        <p:par>
-                          <p:cTn id="20" fill="hold">
-                            <p:stCondLst>
-                              <p:cond delay="0"/>
-                            </p:stCondLst>
-                            <p:childTnLst>
-                              <p:par>
-                                <p:cTn id="21" presetID="34" presetClass="entr" presetSubtype="0" fill="hold" grpId="0" nodeType="clickEffect">
-                                  <p:stCondLst>
-                                    <p:cond delay="0"/>
-                                  </p:stCondLst>
-                                  <p:childTnLst>
-                                    <p:set>
-                                      <p:cBhvr>
-                                        <p:cTn id="22" dur="1" fill="hold">
-                                          <p:stCondLst>
-                                            <p:cond delay="0"/>
-                                          </p:stCondLst>
-                                        </p:cTn>
-                                        <p:tgtEl>
-                                          <p:spTgt spid="10"/>
-                                        </p:tgtEl>
-                                        <p:attrNameLst>
-                                          <p:attrName>style.visibility</p:attrName>
-                                        </p:attrNameLst>
-                                      </p:cBhvr>
-                                      <p:to>
-                                        <p:strVal val="visible"/>
-                                      </p:to>
-                                    </p:set>
-                                    <p:anim from="(-#ppt_w/2)" to="(#ppt_x)" calcmode="lin" valueType="num">
-                                      <p:cBhvr>
-                                        <p:cTn id="23" dur="600" fill="hold">
-                                          <p:stCondLst>
-                                            <p:cond delay="0"/>
-                                          </p:stCondLst>
-                                        </p:cTn>
-                                        <p:tgtEl>
-                                          <p:spTgt spid="10"/>
-                                        </p:tgtEl>
-                                        <p:attrNameLst>
-                                          <p:attrName>ppt_x</p:attrName>
-                                        </p:attrNameLst>
-                                      </p:cBhvr>
-                                    </p:anim>
-                                    <p:anim from="0" to="-1.0" calcmode="lin" valueType="num">
-                                      <p:cBhvr>
-                                        <p:cTn id="24" dur="200" decel="50000" autoRev="1" fill="hold">
-                                          <p:stCondLst>
-                                            <p:cond delay="600"/>
-                                          </p:stCondLst>
-                                        </p:cTn>
-                                        <p:tgtEl>
-                                          <p:spTgt spid="10"/>
-                                        </p:tgtEl>
-                                        <p:attrNameLst>
-                                          <p:attrName>xshear</p:attrName>
-                                        </p:attrNameLst>
-                                      </p:cBhvr>
-                                    </p:anim>
-                                    <p:animScale>
-                                      <p:cBhvr>
-                                        <p:cTn id="25" dur="200" decel="100000" autoRev="1" fill="hold">
-                                          <p:stCondLst>
-                                            <p:cond delay="600"/>
-                                          </p:stCondLst>
-                                        </p:cTn>
-                                        <p:tgtEl>
-                                          <p:spTgt spid="10"/>
-                                        </p:tgtEl>
-                                      </p:cBhvr>
-                                      <p:from x="100000" y="100000"/>
-                                      <p:to x="80000" y="100000"/>
-                                    </p:animScale>
-                                    <p:anim by="(#ppt_h/3+#ppt_w*0.1)" calcmode="lin" valueType="num">
-                                      <p:cBhvr additive="sum">
-                                        <p:cTn id="26" dur="200" decel="100000" autoRev="1" fill="hold">
-                                          <p:stCondLst>
-                                            <p:cond delay="600"/>
-                                          </p:stCondLst>
-                                        </p:cTn>
-                                        <p:tgtEl>
-                                          <p:spTgt spid="10"/>
-                                        </p:tgtEl>
-                                        <p:attrNameLst>
-                                          <p:attrName>ppt_x</p:attrName>
-                                        </p:attrNameLst>
-                                      </p:cBhvr>
-                                    </p:anim>
-                                  </p:childTnLst>
-                                </p:cTn>
-                              </p:par>
-                            </p:childTnLst>
-                          </p:cTn>
-                        </p:par>
-                      </p:childTnLst>
-                    </p:cTn>
-                  </p:par>
-                </p:childTnLst>
-              </p:cTn>
-              <p:prevCondLst>
-                <p:cond evt="onPrev" delay="0">
-                  <p:tgtEl>
-                    <p:sldTgt/>
-                  </p:tgtEl>
-                </p:cond>
-              </p:prevCondLst>
-              <p:nextCondLst>
-                <p:cond evt="onNext" delay="0">
-                  <p:tgtEl>
-                    <p:sldTgt/>
-                  </p:tgtEl>
-                </p:cond>
-              </p:nextCondLst>
-            </p:seq>
-          </p:childTnLst>
-        </p:cTn>
-      </p:par>
-    </p:tnLst>
-    <p:bldLst>
-      <p:bldP spid="6" grpId="0"/>
-      <p:bldP spid="8" grpId="0"/>
-      <p:bldP spid="10" grpId="0"/>
-    </p:bldLst>
-  </p:timing>
-</p:sld>
-</file>
-
-<file path=ppt/slides/slide17.xml><?xml version="1.0" encoding="utf-8"?>
-<p:sld xmlns:a="http://schemas.openxmlformats.org/drawingml/2006/main" xmlns:r="http://schemas.openxmlformats.org/officeDocument/2006/relationships" xmlns:p="http://schemas.openxmlformats.org/presentationml/2006/main">
-  <p:cSld>
-    <p:spTree>
-      <p:nvGrpSpPr>
-        <p:cNvPr id="1" name=""/>
-        <p:cNvGrpSpPr/>
-        <p:nvPr/>
-      </p:nvGrpSpPr>
-      <p:grpSpPr>
-        <a:xfrm>
-          <a:off x="0" y="0"/>
-          <a:ext cx="0" cy="0"/>
-          <a:chOff x="0" y="0"/>
-          <a:chExt cx="0" cy="0"/>
-        </a:xfrm>
-      </p:grpSpPr>
-      <p:sp>
-        <p:nvSpPr>
-          <p:cNvPr id="2" name="Title 1">
-            <a:extLst>
-              <a:ext uri="{FF2B5EF4-FFF2-40B4-BE49-F238E27FC236}">
-                <a16:creationId xmlns:a16="http://schemas.microsoft.com/office/drawing/2014/main" id="{C08D30B1-1864-30EF-7EAB-9BEE656C0012}"/>
-              </a:ext>
-            </a:extLst>
-          </p:cNvPr>
-          <p:cNvSpPr>
-            <a:spLocks noGrp="1"/>
-          </p:cNvSpPr>
-          <p:nvPr>
-            <p:ph type="title"/>
-          </p:nvPr>
-        </p:nvSpPr>
-        <p:spPr/>
-        <p:txBody>
-          <a:bodyPr>
-            <a:noAutofit/>
-          </a:bodyPr>
-          <a:lstStyle/>
-          <a:p>
-            <a:r>
-              <a:rPr lang="en-US">
-                <a:solidFill>
-                  <a:srgbClr val="1F3864"/>
-                </a:solidFill>
-              </a:rPr>
-              <a:t>How often does an interval capture μ?</a:t>
-            </a:r>
-          </a:p>
-        </p:txBody>
-      </p:sp>
-      <p:sp>
-        <p:nvSpPr>
-          <p:cNvPr id="4" name="Slide Number Placeholder 3">
-            <a:extLst>
-              <a:ext uri="{FF2B5EF4-FFF2-40B4-BE49-F238E27FC236}">
-                <a16:creationId xmlns:a16="http://schemas.microsoft.com/office/drawing/2014/main" id="{3F875068-D051-44AE-498E-1BEBEDE3A7C8}"/>
-              </a:ext>
-            </a:extLst>
-          </p:cNvPr>
-          <p:cNvSpPr>
-            <a:spLocks noGrp="1"/>
-          </p:cNvSpPr>
-          <p:nvPr>
-            <p:ph type="sldNum" sz="quarter" idx="12"/>
-          </p:nvPr>
-        </p:nvSpPr>
-        <p:spPr/>
-        <p:txBody>
-          <a:bodyPr/>
-          <a:lstStyle/>
-          <a:p>
-            <a:fld id="{A80A81DD-F10A-4B1C-963A-0ABBB4865886}" type="slidenum">
-              <a:rPr lang="en-US" sz="1600" smtClean="0"/>
-              <a:t>17</a:t>
-            </a:fld>
-            <a:endParaRPr lang="en-US" sz="1600"/>
-          </a:p>
-        </p:txBody>
-      </p:sp>
-      <p:sp>
-        <p:nvSpPr>
-          <p:cNvPr id="3" name="Title rule">
-            <a:extLst>
-              <a:ext uri="{FF2B5EF4-FFF2-40B4-BE49-F238E27FC236}">
-                <a16:creationId xmlns:a16="http://schemas.microsoft.com/office/drawing/2014/main" id="{30656AA8-9645-F028-C769-A313710853CC}"/>
-              </a:ext>
-            </a:extLst>
-          </p:cNvPr>
-          <p:cNvSpPr/>
-          <p:nvPr/>
-        </p:nvSpPr>
-        <p:spPr>
-          <a:xfrm>
-            <a:off x="838200" y="1600200"/>
-            <a:ext cx="10515600" cy="38100"/>
-          </a:xfrm>
-          <a:prstGeom prst="rect">
-            <a:avLst/>
-          </a:prstGeom>
-          <a:solidFill>
-            <a:srgbClr val="4472C4"/>
-          </a:solidFill>
-          <a:ln w="12700" cap="flat" cmpd="sng" algn="ctr">
-            <a:noFill/>
-            <a:prstDash val="solid"/>
-            <a:miter lim="800000"/>
-          </a:ln>
-          <a:effectLst/>
-          <a:extLst>
-            <a:ext uri="{91240B29-F687-4F45-9708-019B960494DF}">
-              <a14:hiddenLine xmlns:a14="http://schemas.microsoft.com/office/drawing/2010/main" w="12700" cap="flat" cmpd="sng" algn="ctr">
-                <a:solidFill>
-                  <a:schemeClr val="accent1">
-                    <a:shade val="15000"/>
-                  </a:schemeClr>
-                </a:solidFill>
-                <a:prstDash val="solid"/>
-                <a:miter lim="800000"/>
-              </a14:hiddenLine>
-            </a:ext>
-          </a:extLst>
-        </p:spPr>
-        <p:style>
-          <a:lnRef idx="2">
-            <a:schemeClr val="accent1">
-              <a:shade val="15000"/>
-            </a:schemeClr>
-          </a:lnRef>
-          <a:fillRef idx="1">
-            <a:schemeClr val="accent1"/>
-          </a:fillRef>
-          <a:effectRef idx="0">
-            <a:schemeClr val="accent1"/>
-          </a:effectRef>
-          <a:fontRef idx="minor">
-            <a:schemeClr val="lt1"/>
-          </a:fontRef>
-        </p:style>
-        <p:txBody>
-          <a:bodyPr rtlCol="0" anchor="ctr"/>
-          <a:lstStyle/>
-          <a:p>
-            <a:pPr algn="ctr"/>
-            <a:endParaRPr lang="en-US"/>
-          </a:p>
-        </p:txBody>
-      </p:sp>
-      <p:sp>
-        <p:nvSpPr>
-          <p:cNvPr id="8" name="Context">
-            <a:extLst>
-              <a:ext uri="{FF2B5EF4-FFF2-40B4-BE49-F238E27FC236}">
-                <a16:creationId xmlns:a16="http://schemas.microsoft.com/office/drawing/2014/main" id="{71E3EA8C-31B4-DAD4-BC4A-65D72E59AD46}"/>
-              </a:ext>
-            </a:extLst>
-          </p:cNvPr>
-          <p:cNvSpPr txBox="1"/>
-          <p:nvPr/>
-        </p:nvSpPr>
-        <p:spPr>
-          <a:xfrm>
-            <a:off x="762000" y="1879600"/>
-            <a:ext cx="10668000" cy="381000"/>
-          </a:xfrm>
-          <a:prstGeom prst="rect">
-            <a:avLst/>
-          </a:prstGeom>
-          <a:noFill/>
-        </p:spPr>
-        <p:txBody>
-          <a:bodyPr vert="horz" wrap="square" rtlCol="0">
-            <a:spAutoFit/>
-          </a:bodyPr>
-          <a:lstStyle/>
-          <a:p>
-            <a:pPr>
-              <a:spcAft>
-                <a:spcPts val="200"/>
-              </a:spcAft>
-            </a:pPr>
-            <a:r>
-              <a:rPr lang="en-US">
-                <a:solidFill>
-                  <a:srgbClr val="000000"/>
-                </a:solidFill>
-                <a:latin typeface="Calibri" panose="020F0502020204030204" pitchFamily="34" charset="0"/>
-              </a:rPr>
-              <a:t>25 random samples of n = 20 songs;  each line is x̄ ± 2(0.34), the margin of error.</a:t>
-            </a:r>
-          </a:p>
-        </p:txBody>
-      </p:sp>
-      <p:sp>
-        <p:nvSpPr>
-          <p:cNvPr id="10" name="Question">
-            <a:extLst>
-              <a:ext uri="{FF2B5EF4-FFF2-40B4-BE49-F238E27FC236}">
-                <a16:creationId xmlns:a16="http://schemas.microsoft.com/office/drawing/2014/main" id="{B31E395F-B84E-D1E9-D22A-222467FC4105}"/>
-              </a:ext>
-            </a:extLst>
-          </p:cNvPr>
-          <p:cNvSpPr txBox="1"/>
-          <p:nvPr/>
-        </p:nvSpPr>
-        <p:spPr>
-          <a:xfrm>
-            <a:off x="762000" y="2286000"/>
-            <a:ext cx="10668000" cy="369332"/>
-          </a:xfrm>
-          <a:prstGeom prst="rect">
-            <a:avLst/>
-          </a:prstGeom>
-          <a:noFill/>
-        </p:spPr>
-        <p:txBody>
-          <a:bodyPr vert="horz" wrap="square" rtlCol="0">
-            <a:spAutoFit/>
-          </a:bodyPr>
-          <a:lstStyle/>
-          <a:p>
-            <a:pPr>
-              <a:spcAft>
-                <a:spcPts val="200"/>
-              </a:spcAft>
-            </a:pPr>
-            <a:r>
-              <a:rPr lang="en-US" b="1">
-                <a:solidFill>
-                  <a:srgbClr val="C00000"/>
-                </a:solidFill>
-                <a:latin typeface="Calibri" panose="020F0502020204030204" pitchFamily="34" charset="0"/>
-              </a:rPr>
-              <a:t>How many of the 25 intervals capture μ = 3.71?</a:t>
-            </a:r>
-          </a:p>
-        </p:txBody>
-      </p:sp>
-      <p:sp>
-        <p:nvSpPr>
-          <p:cNvPr id="11" name="Result">
-            <a:extLst>
-              <a:ext uri="{FF2B5EF4-FFF2-40B4-BE49-F238E27FC236}">
-                <a16:creationId xmlns:a16="http://schemas.microsoft.com/office/drawing/2014/main" id="{5A70F68E-0D93-07B8-82B2-4D8F2F681D0D}"/>
-              </a:ext>
-            </a:extLst>
-          </p:cNvPr>
-          <p:cNvSpPr/>
-          <p:nvPr/>
-        </p:nvSpPr>
-        <p:spPr>
-          <a:xfrm>
-            <a:off x="762000" y="5487432"/>
-            <a:ext cx="10668000" cy="470595"/>
-          </a:xfrm>
-          <a:prstGeom prst="roundRect">
-            <a:avLst>
-              <a:gd name="adj" fmla="val 4000"/>
-            </a:avLst>
-          </a:prstGeom>
-          <a:solidFill>
-            <a:srgbClr val="F2F6FC"/>
-          </a:solidFill>
-          <a:ln w="15875">
-            <a:solidFill>
-              <a:srgbClr val="4472C4"/>
-            </a:solidFill>
-          </a:ln>
-        </p:spPr>
-        <p:style>
-          <a:lnRef idx="2">
-            <a:schemeClr val="accent1">
-              <a:shade val="15000"/>
-            </a:schemeClr>
-          </a:lnRef>
-          <a:fillRef idx="1">
-            <a:schemeClr val="accent1"/>
-          </a:fillRef>
-          <a:effectRef idx="0">
-            <a:schemeClr val="accent1"/>
-          </a:effectRef>
-          <a:fontRef idx="minor">
-            <a:schemeClr val="lt1"/>
-          </a:fontRef>
-        </p:style>
-        <p:txBody>
-          <a:bodyPr wrap="square" lIns="152400" tIns="76200" rIns="152400" bIns="76200" rtlCol="0" anchor="ctr">
-            <a:spAutoFit/>
-          </a:bodyPr>
-          <a:lstStyle/>
-          <a:p>
-            <a:r>
-              <a:rPr lang="en-US" sz="2000" b="1">
-                <a:solidFill>
-                  <a:srgbClr val="C00000"/>
-                </a:solidFill>
-                <a:latin typeface="Calibri" panose="020F0502020204030204" pitchFamily="34" charset="0"/>
-              </a:rPr>
-              <a:t>24 of 25:  about 95% of intervals made this way capture μ</a:t>
-            </a:r>
-          </a:p>
-        </p:txBody>
-      </p:sp>
-      <p:pic>
-        <p:nvPicPr>
-          <p:cNvPr id="6" name="l18_ci_cover.png">
-            <a:extLst>
-              <a:ext uri="{FF2B5EF4-FFF2-40B4-BE49-F238E27FC236}">
-                <a16:creationId xmlns:a16="http://schemas.microsoft.com/office/drawing/2014/main" id="{B7ADDB0A-1FE2-1E34-7D02-8FC4D818928C}"/>
-              </a:ext>
-            </a:extLst>
-          </p:cNvPr>
-          <p:cNvPicPr>
-            <a:picLocks/>
-          </p:cNvPicPr>
-          <p:nvPr/>
-        </p:nvPicPr>
-        <p:blipFill>
-          <a:blip r:embed="rId2">
-            <a:extLst>
-              <a:ext uri="{28A0092B-C50C-407E-A947-70E740481C1C}">
-                <a14:useLocalDpi xmlns:a14="http://schemas.microsoft.com/office/drawing/2010/main" val="0"/>
-              </a:ext>
-            </a:extLst>
-          </a:blip>
-          <a:stretch>
-            <a:fillRect/>
-          </a:stretch>
-        </p:blipFill>
-        <p:spPr>
-          <a:xfrm>
-            <a:off x="2032000" y="2706132"/>
-            <a:ext cx="8128000" cy="2730500"/>
-          </a:xfrm>
-          <a:prstGeom prst="rect">
-            <a:avLst/>
-          </a:prstGeom>
-        </p:spPr>
-      </p:pic>
-    </p:spTree>
-    <p:extLst>
-      <p:ext uri="{BB962C8B-B14F-4D97-AF65-F5344CB8AC3E}">
-        <p14:creationId xmlns:p14="http://schemas.microsoft.com/office/powerpoint/2010/main" val="3380394677"/>
-      </p:ext>
-    </p:extLst>
-  </p:cSld>
-  <p:clrMapOvr>
-    <a:masterClrMapping/>
-  </p:clrMapOvr>
-  <p:timing>
-    <p:tnLst>
-      <p:par>
-        <p:cTn id="1" dur="indefinite" restart="never" nodeType="tmRoot">
-          <p:childTnLst>
-            <p:seq concurrent="1" nextAc="seek">
-              <p:cTn id="2" dur="indefinite" nodeType="mainSeq">
-                <p:childTnLst>
-                  <p:par>
-                    <p:cTn id="3" fill="hold">
-                      <p:stCondLst>
-                        <p:cond delay="indefinite"/>
-                      </p:stCondLst>
-                      <p:childTnLst>
-                        <p:par>
-                          <p:cTn id="4" fill="hold">
-                            <p:stCondLst>
-                              <p:cond delay="0"/>
-                            </p:stCondLst>
-                            <p:childTnLst>
-                              <p:par>
-                                <p:cTn id="5" presetID="1" presetClass="entr" presetSubtype="0" fill="hold" grpId="0" nodeType="clickEffect">
-                                  <p:stCondLst>
-                                    <p:cond delay="0"/>
-                                  </p:stCondLst>
-                                  <p:childTnLst>
-                                    <p:set>
-                                      <p:cBhvr>
-                                        <p:cTn id="6" dur="1" fill="hold">
-                                          <p:stCondLst>
-                                            <p:cond delay="0"/>
-                                          </p:stCondLst>
-                                        </p:cTn>
-                                        <p:tgtEl>
-                                          <p:spTgt spid="11"/>
-                                        </p:tgtEl>
-                                        <p:attrNameLst>
-                                          <p:attrName>style.visibility</p:attrName>
-                                        </p:attrNameLst>
-                                      </p:cBhvr>
-                                      <p:to>
-                                        <p:strVal val="visible"/>
-                                      </p:to>
-                                    </p:set>
-                                  </p:childTnLst>
-                                </p:cTn>
-                              </p:par>
-                            </p:childTnLst>
-                          </p:cTn>
-                        </p:par>
-                      </p:childTnLst>
-                    </p:cTn>
-                  </p:par>
-                </p:childTnLst>
-              </p:cTn>
-              <p:prevCondLst>
-                <p:cond evt="onPrev" delay="0">
-                  <p:tgtEl>
-                    <p:sldTgt/>
-                  </p:tgtEl>
-                </p:cond>
-              </p:prevCondLst>
-              <p:nextCondLst>
-                <p:cond evt="onNext" delay="0">
-                  <p:tgtEl>
-                    <p:sldTgt/>
-                  </p:tgtEl>
-                </p:cond>
-              </p:nextCondLst>
-            </p:seq>
-          </p:childTnLst>
-        </p:cTn>
-      </p:par>
-    </p:tnLst>
-    <p:bldLst>
-      <p:bldP spid="11" grpId="0" animBg="1"/>
-    </p:bldLst>
-  </p:timing>
-</p:sld>
-</file>
-
-<file path=ppt/slides/slide18.xml><?xml version="1.0" encoding="utf-8"?>
-<p:sld xmlns:a="http://schemas.openxmlformats.org/drawingml/2006/main" xmlns:r="http://schemas.openxmlformats.org/officeDocument/2006/relationships" xmlns:p="http://schemas.openxmlformats.org/presentationml/2006/main">
-  <p:cSld>
-    <p:spTree>
-      <p:nvGrpSpPr>
-        <p:cNvPr id="1" name=""/>
-        <p:cNvGrpSpPr/>
-        <p:nvPr/>
-      </p:nvGrpSpPr>
-      <p:grpSpPr>
-        <a:xfrm>
-          <a:off x="0" y="0"/>
-          <a:ext cx="0" cy="0"/>
-          <a:chOff x="0" y="0"/>
-          <a:chExt cx="0" cy="0"/>
-        </a:xfrm>
-      </p:grpSpPr>
-      <p:sp>
-        <p:nvSpPr>
-          <p:cNvPr id="2" name="Title 1">
-            <a:extLst>
-              <a:ext uri="{FF2B5EF4-FFF2-40B4-BE49-F238E27FC236}">
-                <a16:creationId xmlns:a16="http://schemas.microsoft.com/office/drawing/2014/main" id="{C08D30B1-1864-30EF-7EAB-9BEE656C0012}"/>
-              </a:ext>
-            </a:extLst>
-          </p:cNvPr>
-          <p:cNvSpPr>
-            <a:spLocks noGrp="1"/>
-          </p:cNvSpPr>
-          <p:nvPr>
-            <p:ph type="title"/>
-          </p:nvPr>
-        </p:nvSpPr>
-        <p:spPr/>
-        <p:txBody>
-          <a:bodyPr>
-            <a:noAutofit/>
-          </a:bodyPr>
-          <a:lstStyle/>
-          <a:p>
-            <a:r>
-              <a:rPr lang="en-US">
-                <a:solidFill>
-                  <a:srgbClr val="1F3864"/>
-                </a:solidFill>
-              </a:rPr>
-              <a:t>Example: an interval for mean song length</a:t>
-            </a:r>
-          </a:p>
-        </p:txBody>
-      </p:sp>
-      <p:sp>
-        <p:nvSpPr>
-          <p:cNvPr id="4" name="Slide Number Placeholder 3">
-            <a:extLst>
-              <a:ext uri="{FF2B5EF4-FFF2-40B4-BE49-F238E27FC236}">
-                <a16:creationId xmlns:a16="http://schemas.microsoft.com/office/drawing/2014/main" id="{3F875068-D051-44AE-498E-1BEBEDE3A7C8}"/>
-              </a:ext>
-            </a:extLst>
-          </p:cNvPr>
-          <p:cNvSpPr>
-            <a:spLocks noGrp="1"/>
-          </p:cNvSpPr>
-          <p:nvPr>
-            <p:ph type="sldNum" sz="quarter" idx="12"/>
-          </p:nvPr>
-        </p:nvSpPr>
-        <p:spPr/>
-        <p:txBody>
-          <a:bodyPr/>
-          <a:lstStyle/>
-          <a:p>
-            <a:fld id="{A80A81DD-F10A-4B1C-963A-0ABBB4865886}" type="slidenum">
-              <a:rPr lang="en-US" sz="1600" smtClean="0"/>
-              <a:t>18</a:t>
-            </a:fld>
-            <a:endParaRPr lang="en-US" sz="1600"/>
-          </a:p>
-        </p:txBody>
-      </p:sp>
-      <p:sp>
-        <p:nvSpPr>
-          <p:cNvPr id="3" name="Title rule">
-            <a:extLst>
-              <a:ext uri="{FF2B5EF4-FFF2-40B4-BE49-F238E27FC236}">
-                <a16:creationId xmlns:a16="http://schemas.microsoft.com/office/drawing/2014/main" id="{30656AA8-9645-F028-C769-A313710853CC}"/>
-              </a:ext>
-            </a:extLst>
-          </p:cNvPr>
-          <p:cNvSpPr/>
-          <p:nvPr/>
-        </p:nvSpPr>
-        <p:spPr>
-          <a:xfrm>
-            <a:off x="838200" y="1600200"/>
-            <a:ext cx="10515600" cy="38100"/>
-          </a:xfrm>
-          <a:prstGeom prst="rect">
-            <a:avLst/>
-          </a:prstGeom>
-          <a:solidFill>
-            <a:srgbClr val="4472C4"/>
-          </a:solidFill>
-          <a:ln w="12700" cap="flat" cmpd="sng" algn="ctr">
-            <a:noFill/>
-            <a:prstDash val="solid"/>
-            <a:miter lim="800000"/>
-          </a:ln>
-          <a:effectLst/>
-          <a:extLst>
-            <a:ext uri="{91240B29-F687-4F45-9708-019B960494DF}">
-              <a14:hiddenLine xmlns:a14="http://schemas.microsoft.com/office/drawing/2010/main" w="12700" cap="flat" cmpd="sng" algn="ctr">
-                <a:solidFill>
-                  <a:schemeClr val="accent1">
-                    <a:shade val="15000"/>
-                  </a:schemeClr>
-                </a:solidFill>
-                <a:prstDash val="solid"/>
-                <a:miter lim="800000"/>
-              </a14:hiddenLine>
-            </a:ext>
-          </a:extLst>
-        </p:spPr>
-        <p:style>
-          <a:lnRef idx="2">
-            <a:schemeClr val="accent1">
-              <a:shade val="15000"/>
-            </a:schemeClr>
-          </a:lnRef>
-          <a:fillRef idx="1">
-            <a:schemeClr val="accent1"/>
-          </a:fillRef>
-          <a:effectRef idx="0">
-            <a:schemeClr val="accent1"/>
-          </a:effectRef>
-          <a:fontRef idx="minor">
-            <a:schemeClr val="lt1"/>
-          </a:fontRef>
-        </p:style>
-        <p:txBody>
-          <a:bodyPr rtlCol="0" anchor="ctr"/>
-          <a:lstStyle/>
-          <a:p>
-            <a:pPr algn="ctr"/>
-            <a:endParaRPr lang="en-US"/>
-          </a:p>
-        </p:txBody>
-      </p:sp>
-      <p:sp>
-        <p:nvSpPr>
-          <p:cNvPr id="8" name="Context">
-            <a:extLst>
-              <a:ext uri="{FF2B5EF4-FFF2-40B4-BE49-F238E27FC236}">
-                <a16:creationId xmlns:a16="http://schemas.microsoft.com/office/drawing/2014/main" id="{71E3EA8C-31B4-DAD4-BC4A-65D72E59AD46}"/>
-              </a:ext>
-            </a:extLst>
-          </p:cNvPr>
-          <p:cNvSpPr txBox="1"/>
-          <p:nvPr/>
-        </p:nvSpPr>
-        <p:spPr>
-          <a:xfrm>
-            <a:off x="762000" y="1879600"/>
-            <a:ext cx="10668000" cy="381000"/>
-          </a:xfrm>
-          <a:prstGeom prst="rect">
-            <a:avLst/>
-          </a:prstGeom>
-          <a:noFill/>
-        </p:spPr>
-        <p:txBody>
-          <a:bodyPr vert="horz" wrap="square" rtlCol="0">
-            <a:spAutoFit/>
-          </a:bodyPr>
-          <a:lstStyle/>
-          <a:p>
-            <a:pPr>
-              <a:spcAft>
-                <a:spcPts val="200"/>
-              </a:spcAft>
-            </a:pPr>
-            <a:r>
-              <a:rPr lang="en-US">
-                <a:solidFill>
-                  <a:srgbClr val="000000"/>
-                </a:solidFill>
-                <a:latin typeface="Calibri" panose="020F0502020204030204" pitchFamily="34" charset="0"/>
-              </a:rPr>
-              <a:t>In practice we see only one sample:  n = 20 songs (the bottom interval on the last slide).</a:t>
-            </a:r>
-          </a:p>
-        </p:txBody>
-      </p:sp>
-      <p:sp>
-        <p:nvSpPr>
-          <p:cNvPr id="9" name="Numbers">
-            <a:extLst>
-              <a:ext uri="{FF2B5EF4-FFF2-40B4-BE49-F238E27FC236}">
-                <a16:creationId xmlns:a16="http://schemas.microsoft.com/office/drawing/2014/main" id="{C419F151-05B2-3E4B-BAE8-BB1F06D9D1FD}"/>
-              </a:ext>
-            </a:extLst>
-          </p:cNvPr>
-          <p:cNvSpPr txBox="1"/>
-          <p:nvPr/>
-        </p:nvSpPr>
-        <p:spPr>
-          <a:xfrm>
-            <a:off x="762000" y="2286000"/>
-            <a:ext cx="10668000" cy="400110"/>
-          </a:xfrm>
-          <a:prstGeom prst="rect">
-            <a:avLst/>
-          </a:prstGeom>
-          <a:noFill/>
-        </p:spPr>
-        <p:txBody>
-          <a:bodyPr vert="horz" wrap="square" rtlCol="0">
-            <a:spAutoFit/>
-          </a:bodyPr>
-          <a:lstStyle/>
-          <a:p>
-            <a:pPr>
-              <a:spcAft>
-                <a:spcPts val="200"/>
-              </a:spcAft>
-            </a:pPr>
-            <a:r>
-              <a:rPr lang="it-IT" sz="2000" b="1">
-                <a:solidFill>
-                  <a:srgbClr val="000000"/>
-                </a:solidFill>
-                <a:latin typeface="Calibri" panose="020F0502020204030204" pitchFamily="34" charset="0"/>
-              </a:rPr>
-              <a:t>x̄ = 3.64 min;     σ = 1.51 min;     SE = 0.34 min</a:t>
-            </a:r>
-            <a:endParaRPr lang="en-US" sz="2000" b="1">
-              <a:solidFill>
-                <a:srgbClr val="000000"/>
-              </a:solidFill>
-              <a:latin typeface="Calibri" panose="020F0502020204030204" pitchFamily="34" charset="0"/>
-            </a:endParaRPr>
-          </a:p>
-        </p:txBody>
-      </p:sp>
-      <p:sp>
-        <p:nvSpPr>
-          <p:cNvPr id="10" name="Question">
-            <a:extLst>
-              <a:ext uri="{FF2B5EF4-FFF2-40B4-BE49-F238E27FC236}">
-                <a16:creationId xmlns:a16="http://schemas.microsoft.com/office/drawing/2014/main" id="{B31E395F-B84E-D1E9-D22A-222467FC4105}"/>
-              </a:ext>
-            </a:extLst>
-          </p:cNvPr>
-          <p:cNvSpPr txBox="1"/>
-          <p:nvPr/>
-        </p:nvSpPr>
-        <p:spPr>
-          <a:xfrm>
-            <a:off x="762000" y="2711510"/>
-            <a:ext cx="10668000" cy="974626"/>
-          </a:xfrm>
-          <a:prstGeom prst="rect">
-            <a:avLst/>
-          </a:prstGeom>
-          <a:noFill/>
-        </p:spPr>
-        <p:txBody>
-          <a:bodyPr vert="horz" wrap="square" rtlCol="0">
-            <a:spAutoFit/>
-          </a:bodyPr>
-          <a:lstStyle/>
-          <a:p>
-            <a:pPr>
-              <a:spcAft>
-                <a:spcPts val="200"/>
-              </a:spcAft>
-            </a:pPr>
-            <a:r>
-              <a:rPr lang="en-US" b="1">
-                <a:solidFill>
-                  <a:srgbClr val="C00000"/>
-                </a:solidFill>
-                <a:latin typeface="Calibri" panose="020F0502020204030204" pitchFamily="34" charset="0"/>
-              </a:rPr>
-              <a:t>(a)  What is the 95% confidence interval for μ?</a:t>
-            </a:r>
-          </a:p>
-          <a:p>
-            <a:pPr>
-              <a:spcAft>
-                <a:spcPts val="200"/>
-              </a:spcAft>
-            </a:pPr>
-            <a:r>
-              <a:rPr lang="en-US" b="1">
-                <a:solidFill>
-                  <a:srgbClr val="C00000"/>
-                </a:solidFill>
-                <a:latin typeface="Calibri" panose="020F0502020204030204" pitchFamily="34" charset="0"/>
-              </a:rPr>
-              <a:t>(b)  Does it capture μ = 3.71?</a:t>
-            </a:r>
-          </a:p>
-          <a:p>
-            <a:pPr>
-              <a:spcAft>
-                <a:spcPts val="200"/>
-              </a:spcAft>
-            </a:pPr>
-            <a:r>
-              <a:rPr lang="en-US" b="1">
-                <a:solidFill>
-                  <a:srgbClr val="C00000"/>
-                </a:solidFill>
-                <a:latin typeface="Calibri" panose="020F0502020204030204" pitchFamily="34" charset="0"/>
-              </a:rPr>
-              <a:t>(c)  If we did not know μ, what would “95% confident” mean?</a:t>
-            </a:r>
-          </a:p>
-        </p:txBody>
-      </p:sp>
-      <p:sp>
-        <p:nvSpPr>
-          <p:cNvPr id="11" name="Result">
-            <a:extLst>
-              <a:ext uri="{FF2B5EF4-FFF2-40B4-BE49-F238E27FC236}">
-                <a16:creationId xmlns:a16="http://schemas.microsoft.com/office/drawing/2014/main" id="{5A70F68E-0D93-07B8-82B2-4D8F2F681D0D}"/>
-              </a:ext>
-            </a:extLst>
-          </p:cNvPr>
-          <p:cNvSpPr/>
-          <p:nvPr/>
-        </p:nvSpPr>
-        <p:spPr>
-          <a:xfrm>
-            <a:off x="762000" y="3838536"/>
-            <a:ext cx="10668000" cy="784324"/>
-          </a:xfrm>
-          <a:prstGeom prst="roundRect">
-            <a:avLst>
-              <a:gd name="adj" fmla="val 4000"/>
-            </a:avLst>
-          </a:prstGeom>
-          <a:solidFill>
-            <a:srgbClr val="F2F6FC"/>
-          </a:solidFill>
-          <a:ln w="15875">
-            <a:solidFill>
-              <a:srgbClr val="4472C4"/>
-            </a:solidFill>
-          </a:ln>
-        </p:spPr>
-        <p:style>
-          <a:lnRef idx="2">
-            <a:schemeClr val="accent1">
-              <a:shade val="15000"/>
-            </a:schemeClr>
-          </a:lnRef>
-          <a:fillRef idx="1">
-            <a:schemeClr val="accent1"/>
-          </a:fillRef>
-          <a:effectRef idx="0">
-            <a:schemeClr val="accent1"/>
-          </a:effectRef>
-          <a:fontRef idx="minor">
-            <a:schemeClr val="lt1"/>
-          </a:fontRef>
-        </p:style>
-        <p:txBody>
-          <a:bodyPr wrap="square" lIns="152400" tIns="76200" rIns="152400" bIns="76200" rtlCol="0" anchor="ctr">
-            <a:spAutoFit/>
-          </a:bodyPr>
-          <a:lstStyle/>
-          <a:p>
-            <a:r>
-              <a:rPr lang="en-US" sz="2000" b="1">
-                <a:solidFill>
-                  <a:srgbClr val="C00000"/>
-                </a:solidFill>
-                <a:latin typeface="Calibri" panose="020F0502020204030204" pitchFamily="34" charset="0"/>
-              </a:rPr>
-              <a:t>(a)  3.64 ± 2(0.34):   2.96 to 4.32 min          (b)  Yes</a:t>
-            </a:r>
-          </a:p>
-          <a:p>
-            <a:r>
-              <a:rPr lang="en-US" sz="2000" b="1">
-                <a:solidFill>
-                  <a:srgbClr val="C00000"/>
-                </a:solidFill>
-                <a:latin typeface="Calibri" panose="020F0502020204030204" pitchFamily="34" charset="0"/>
-              </a:rPr>
-              <a:t>(c)  95% of intervals built this way capture μ;  this one either does or does not</a:t>
-            </a:r>
-          </a:p>
-        </p:txBody>
-      </p:sp>
-    </p:spTree>
-    <p:extLst>
-      <p:ext uri="{BB962C8B-B14F-4D97-AF65-F5344CB8AC3E}">
-        <p14:creationId xmlns:p14="http://schemas.microsoft.com/office/powerpoint/2010/main" val="1134575590"/>
-      </p:ext>
-    </p:extLst>
-  </p:cSld>
-  <p:clrMapOvr>
-    <a:masterClrMapping/>
-  </p:clrMapOvr>
-  <p:timing>
-    <p:tnLst>
-      <p:par>
-        <p:cTn id="1" dur="indefinite" restart="never" nodeType="tmRoot">
-          <p:childTnLst>
-            <p:seq concurrent="1" nextAc="seek">
-              <p:cTn id="2" dur="indefinite" nodeType="mainSeq">
-                <p:childTnLst>
-                  <p:par>
-                    <p:cTn id="3" fill="hold">
-                      <p:stCondLst>
-                        <p:cond delay="indefinite"/>
-                      </p:stCondLst>
-                      <p:childTnLst>
-                        <p:par>
-                          <p:cTn id="4" fill="hold">
-                            <p:stCondLst>
-                              <p:cond delay="0"/>
-                            </p:stCondLst>
-                            <p:childTnLst>
-                              <p:par>
-                                <p:cTn id="5" presetID="1" presetClass="entr" presetSubtype="0" fill="hold" grpId="0" nodeType="clickEffect">
-                                  <p:stCondLst>
-                                    <p:cond delay="0"/>
-                                  </p:stCondLst>
-                                  <p:childTnLst>
-                                    <p:set>
-                                      <p:cBhvr>
-                                        <p:cTn id="6" dur="1" fill="hold">
-                                          <p:stCondLst>
-                                            <p:cond delay="0"/>
-                                          </p:stCondLst>
-                                        </p:cTn>
-                                        <p:tgtEl>
-                                          <p:spTgt spid="11"/>
-                                        </p:tgtEl>
-                                        <p:attrNameLst>
-                                          <p:attrName>style.visibility</p:attrName>
-                                        </p:attrNameLst>
-                                      </p:cBhvr>
-                                      <p:to>
-                                        <p:strVal val="visible"/>
-                                      </p:to>
-                                    </p:set>
-                                  </p:childTnLst>
-                                </p:cTn>
-                              </p:par>
-                            </p:childTnLst>
-                          </p:cTn>
-                        </p:par>
-                      </p:childTnLst>
-                    </p:cTn>
-                  </p:par>
-                </p:childTnLst>
-              </p:cTn>
-              <p:prevCondLst>
-                <p:cond evt="onPrev" delay="0">
-                  <p:tgtEl>
-                    <p:sldTgt/>
-                  </p:tgtEl>
-                </p:cond>
-              </p:prevCondLst>
-              <p:nextCondLst>
-                <p:cond evt="onNext" delay="0">
-                  <p:tgtEl>
-                    <p:sldTgt/>
-                  </p:tgtEl>
-                </p:cond>
-              </p:nextCondLst>
-            </p:seq>
-          </p:childTnLst>
-        </p:cTn>
-      </p:par>
-    </p:tnLst>
-    <p:bldLst>
-      <p:bldP spid="11" grpId="0" animBg="1"/>
-    </p:bldLst>
-  </p:timing>
-</p:sld>
-</file>
-
-<file path=ppt/slides/slide19.xml><?xml version="1.0" encoding="utf-8"?>
-<p:sld xmlns:a="http://schemas.openxmlformats.org/drawingml/2006/main" xmlns:r="http://schemas.openxmlformats.org/officeDocument/2006/relationships" xmlns:p="http://schemas.openxmlformats.org/presentationml/2006/main">
-  <p:cSld>
-    <p:spTree>
-      <p:nvGrpSpPr>
-        <p:cNvPr id="1" name=""/>
-        <p:cNvGrpSpPr/>
-        <p:nvPr/>
-      </p:nvGrpSpPr>
-      <p:grpSpPr>
-        <a:xfrm>
-          <a:off x="0" y="0"/>
-          <a:ext cx="0" cy="0"/>
-          <a:chOff x="0" y="0"/>
-          <a:chExt cx="0" cy="0"/>
-        </a:xfrm>
-      </p:grpSpPr>
-      <p:sp>
-        <p:nvSpPr>
-          <p:cNvPr id="2" name="Title 1">
-            <a:extLst>
-              <a:ext uri="{FF2B5EF4-FFF2-40B4-BE49-F238E27FC236}">
-                <a16:creationId xmlns:a16="http://schemas.microsoft.com/office/drawing/2014/main" id="{D617AB41-6AD1-9EF2-7F95-46A904399681}"/>
-              </a:ext>
-            </a:extLst>
-          </p:cNvPr>
-          <p:cNvSpPr>
-            <a:spLocks noGrp="1"/>
-          </p:cNvSpPr>
-          <p:nvPr>
-            <p:ph type="title"/>
-          </p:nvPr>
-        </p:nvSpPr>
-        <p:spPr/>
-        <p:txBody>
-          <a:bodyPr>
-            <a:noAutofit/>
-          </a:bodyPr>
-          <a:lstStyle/>
-          <a:p>
-            <a:r>
-              <a:rPr lang="en-US">
-                <a:solidFill>
-                  <a:srgbClr val="1F3864"/>
-                </a:solidFill>
-              </a:rPr>
-              <a:t>What you should know</a:t>
-            </a:r>
-          </a:p>
-        </p:txBody>
-      </p:sp>
-      <p:sp>
-        <p:nvSpPr>
-          <p:cNvPr id="4" name="Slide Number Placeholder 3">
-            <a:extLst>
-              <a:ext uri="{FF2B5EF4-FFF2-40B4-BE49-F238E27FC236}">
-                <a16:creationId xmlns:a16="http://schemas.microsoft.com/office/drawing/2014/main" id="{97D44AE5-98B5-B840-6B8A-D345C7C2E2F0}"/>
-              </a:ext>
-            </a:extLst>
-          </p:cNvPr>
-          <p:cNvSpPr>
-            <a:spLocks noGrp="1"/>
-          </p:cNvSpPr>
-          <p:nvPr>
-            <p:ph type="sldNum" sz="quarter" idx="12"/>
-          </p:nvPr>
-        </p:nvSpPr>
-        <p:spPr/>
-        <p:txBody>
-          <a:bodyPr/>
-          <a:lstStyle/>
-          <a:p>
-            <a:fld id="{A80A81DD-F10A-4B1C-963A-0ABBB4865886}" type="slidenum">
-              <a:rPr lang="en-US" sz="1600" smtClean="0"/>
-              <a:t>19</a:t>
-            </a:fld>
-            <a:endParaRPr lang="en-US" sz="1600"/>
-          </a:p>
-        </p:txBody>
-      </p:sp>
-      <p:sp>
-        <p:nvSpPr>
-          <p:cNvPr id="5" name="TextBox 4">
-            <a:extLst>
-              <a:ext uri="{FF2B5EF4-FFF2-40B4-BE49-F238E27FC236}">
-                <a16:creationId xmlns:a16="http://schemas.microsoft.com/office/drawing/2014/main" id="{A34AAE17-27CE-D7A3-C663-11BB48ACBF5B}"/>
-              </a:ext>
-            </a:extLst>
-          </p:cNvPr>
-          <p:cNvSpPr txBox="1"/>
-          <p:nvPr/>
-        </p:nvSpPr>
-        <p:spPr>
-          <a:xfrm>
-            <a:off x="762000" y="1879600"/>
-            <a:ext cx="10668000" cy="345440"/>
-          </a:xfrm>
-          <a:prstGeom prst="rect">
-            <a:avLst/>
-          </a:prstGeom>
-          <a:noFill/>
-        </p:spPr>
-        <p:txBody>
-          <a:bodyPr vert="horz" wrap="square" rtlCol="0">
-            <a:spAutoFit/>
-          </a:bodyPr>
-          <a:lstStyle/>
-          <a:p>
-            <a:pPr marL="304800" indent="-304800"/>
-            <a:r>
-              <a:rPr lang="en-US" sz="1600">
-                <a:solidFill>
-                  <a:srgbClr val="000000"/>
-                </a:solidFill>
-              </a:rPr>
-              <a:t>sampling distribution</a:t>
-            </a:r>
-          </a:p>
-        </p:txBody>
-      </p:sp>
-      <p:sp>
-        <p:nvSpPr>
-          <p:cNvPr id="6" name="TextBox 5">
-            <a:extLst>
-              <a:ext uri="{FF2B5EF4-FFF2-40B4-BE49-F238E27FC236}">
-                <a16:creationId xmlns:a16="http://schemas.microsoft.com/office/drawing/2014/main" id="{E410A0F8-5E1E-9A1D-B64C-50827EE6C9B2}"/>
-              </a:ext>
-            </a:extLst>
-          </p:cNvPr>
-          <p:cNvSpPr txBox="1"/>
-          <p:nvPr/>
-        </p:nvSpPr>
-        <p:spPr>
-          <a:xfrm>
-            <a:off x="1117600" y="2225040"/>
-            <a:ext cx="10312400" cy="338554"/>
-          </a:xfrm>
-          <a:prstGeom prst="rect">
-            <a:avLst/>
-          </a:prstGeom>
-          <a:noFill/>
-        </p:spPr>
-        <p:txBody>
-          <a:bodyPr vert="horz" wrap="square" rtlCol="0">
-            <a:spAutoFit/>
-          </a:bodyPr>
-          <a:lstStyle/>
-          <a:p>
-            <a:r>
-              <a:rPr lang="en-US" sz="1600" b="1">
-                <a:solidFill>
-                  <a:srgbClr val="C00000"/>
-                </a:solidFill>
-              </a:rPr>
-              <a:t>the distribution of a statistic over all possible samples of size n</a:t>
-            </a:r>
-          </a:p>
-        </p:txBody>
-      </p:sp>
-      <p:sp>
-        <p:nvSpPr>
-          <p:cNvPr id="7" name="TextBox 6">
-            <a:extLst>
-              <a:ext uri="{FF2B5EF4-FFF2-40B4-BE49-F238E27FC236}">
-                <a16:creationId xmlns:a16="http://schemas.microsoft.com/office/drawing/2014/main" id="{47D3CD95-D52E-5227-B663-7C0A72677B6E}"/>
-              </a:ext>
-            </a:extLst>
-          </p:cNvPr>
-          <p:cNvSpPr txBox="1"/>
-          <p:nvPr/>
-        </p:nvSpPr>
-        <p:spPr>
-          <a:xfrm>
-            <a:off x="762000" y="2741394"/>
-            <a:ext cx="10668000" cy="345440"/>
-          </a:xfrm>
-          <a:prstGeom prst="rect">
-            <a:avLst/>
-          </a:prstGeom>
-          <a:noFill/>
-        </p:spPr>
-        <p:txBody>
-          <a:bodyPr vert="horz" wrap="square" rtlCol="0">
-            <a:spAutoFit/>
-          </a:bodyPr>
-          <a:lstStyle/>
-          <a:p>
-            <a:pPr marL="304800" indent="-304800"/>
-            <a:r>
-              <a:rPr lang="en-US" sz="1600">
-                <a:solidFill>
-                  <a:srgbClr val="000000"/>
-                </a:solidFill>
-              </a:rPr>
-              <a:t>standard error</a:t>
-            </a:r>
-          </a:p>
-        </p:txBody>
-      </p:sp>
-      <p:sp>
-        <p:nvSpPr>
-          <p:cNvPr id="8" name="TextBox 7">
-            <a:extLst>
-              <a:ext uri="{FF2B5EF4-FFF2-40B4-BE49-F238E27FC236}">
-                <a16:creationId xmlns:a16="http://schemas.microsoft.com/office/drawing/2014/main" id="{1CE3E601-601D-C6B1-8265-C079CB8C9269}"/>
-              </a:ext>
-            </a:extLst>
-          </p:cNvPr>
-          <p:cNvSpPr txBox="1"/>
-          <p:nvPr/>
-        </p:nvSpPr>
-        <p:spPr>
-          <a:xfrm>
-            <a:off x="1117600" y="3086834"/>
-            <a:ext cx="10312400" cy="338554"/>
-          </a:xfrm>
-          <a:prstGeom prst="rect">
-            <a:avLst/>
-          </a:prstGeom>
-          <a:noFill/>
-        </p:spPr>
-        <p:txBody>
-          <a:bodyPr vert="horz" wrap="square" rtlCol="0">
-            <a:spAutoFit/>
-          </a:bodyPr>
-          <a:lstStyle/>
-          <a:p>
-            <a:r>
-              <a:rPr lang="en-US" sz="1600" b="1">
-                <a:solidFill>
-                  <a:srgbClr val="C00000"/>
-                </a:solidFill>
-              </a:rPr>
-              <a:t>σ</a:t>
-            </a:r>
-            <a:r>
-              <a:rPr lang="en-US" sz="1600" b="1" baseline="-25000">
-                <a:solidFill>
-                  <a:srgbClr val="C00000"/>
-                </a:solidFill>
-              </a:rPr>
-              <a:t>x̄</a:t>
-            </a:r>
-            <a:r>
-              <a:rPr lang="en-US" sz="1600" b="1">
-                <a:solidFill>
-                  <a:srgbClr val="C00000"/>
-                </a:solidFill>
-              </a:rPr>
-              <a:t> = σ / √n   and   σ</a:t>
-            </a:r>
-            <a:r>
-              <a:rPr lang="en-US" sz="1600" b="1" baseline="-25000">
-                <a:solidFill>
-                  <a:srgbClr val="C00000"/>
-                </a:solidFill>
-              </a:rPr>
-              <a:t>p̂</a:t>
-            </a:r>
-            <a:r>
-              <a:rPr lang="en-US" sz="1600" b="1">
-                <a:solidFill>
-                  <a:srgbClr val="C00000"/>
-                </a:solidFill>
-              </a:rPr>
-              <a:t> = √(p(1 − p) / n):   both shrink as n grows</a:t>
-            </a:r>
-          </a:p>
-        </p:txBody>
-      </p:sp>
-      <p:sp>
-        <p:nvSpPr>
-          <p:cNvPr id="9" name="TextBox 8">
-            <a:extLst>
-              <a:ext uri="{FF2B5EF4-FFF2-40B4-BE49-F238E27FC236}">
-                <a16:creationId xmlns:a16="http://schemas.microsoft.com/office/drawing/2014/main" id="{FB002BF4-8037-2F73-E27A-7A453477E389}"/>
-              </a:ext>
-            </a:extLst>
-          </p:cNvPr>
-          <p:cNvSpPr txBox="1"/>
-          <p:nvPr/>
-        </p:nvSpPr>
-        <p:spPr>
-          <a:xfrm>
-            <a:off x="762000" y="3603188"/>
-            <a:ext cx="10668000" cy="345440"/>
-          </a:xfrm>
-          <a:prstGeom prst="rect">
-            <a:avLst/>
-          </a:prstGeom>
-          <a:noFill/>
-        </p:spPr>
-        <p:txBody>
-          <a:bodyPr vert="horz" wrap="square" rtlCol="0">
-            <a:spAutoFit/>
-          </a:bodyPr>
-          <a:lstStyle/>
-          <a:p>
-            <a:pPr marL="304800" indent="-304800"/>
-            <a:r>
-              <a:rPr lang="en-US" sz="1600">
-                <a:solidFill>
-                  <a:srgbClr val="000000"/>
-                </a:solidFill>
-              </a:rPr>
-              <a:t>central limit theorem</a:t>
-            </a:r>
-          </a:p>
-        </p:txBody>
-      </p:sp>
-      <p:sp>
-        <p:nvSpPr>
-          <p:cNvPr id="10" name="TextBox 9">
-            <a:extLst>
-              <a:ext uri="{FF2B5EF4-FFF2-40B4-BE49-F238E27FC236}">
-                <a16:creationId xmlns:a16="http://schemas.microsoft.com/office/drawing/2014/main" id="{10F3B3E3-D27C-E008-C93E-ED70BD2A4754}"/>
-              </a:ext>
-            </a:extLst>
-          </p:cNvPr>
-          <p:cNvSpPr txBox="1"/>
-          <p:nvPr/>
-        </p:nvSpPr>
-        <p:spPr>
-          <a:xfrm>
-            <a:off x="1117600" y="3948628"/>
-            <a:ext cx="10312400" cy="338554"/>
-          </a:xfrm>
-          <a:prstGeom prst="rect">
-            <a:avLst/>
-          </a:prstGeom>
-          <a:noFill/>
-        </p:spPr>
-        <p:txBody>
-          <a:bodyPr vert="horz" wrap="square" rtlCol="0">
-            <a:spAutoFit/>
-          </a:bodyPr>
-          <a:lstStyle/>
-          <a:p>
-            <a:r>
-              <a:rPr lang="en-US" sz="1600" b="1">
-                <a:solidFill>
-                  <a:srgbClr val="C00000"/>
-                </a:solidFill>
-              </a:rPr>
-              <a:t>for large n, x̄ and p̂ are approximately normal, whatever the population</a:t>
-            </a:r>
-          </a:p>
-        </p:txBody>
-      </p:sp>
-      <p:sp>
-        <p:nvSpPr>
-          <p:cNvPr id="3" name="Title rule">
-            <a:extLst>
-              <a:ext uri="{FF2B5EF4-FFF2-40B4-BE49-F238E27FC236}">
-                <a16:creationId xmlns:a16="http://schemas.microsoft.com/office/drawing/2014/main" id="{B469CAAB-2B69-6863-7C28-0C5959E5734B}"/>
-              </a:ext>
-            </a:extLst>
-          </p:cNvPr>
-          <p:cNvSpPr/>
-          <p:nvPr/>
-        </p:nvSpPr>
-        <p:spPr>
-          <a:xfrm>
-            <a:off x="838200" y="1600200"/>
-            <a:ext cx="10515600" cy="38100"/>
-          </a:xfrm>
-          <a:prstGeom prst="rect">
-            <a:avLst/>
-          </a:prstGeom>
-          <a:solidFill>
-            <a:srgbClr val="4472C4"/>
-          </a:solidFill>
-          <a:ln w="12700" cap="flat" cmpd="sng" algn="ctr">
-            <a:noFill/>
-            <a:prstDash val="solid"/>
-            <a:miter lim="800000"/>
-          </a:ln>
-          <a:effectLst/>
-          <a:extLst>
-            <a:ext uri="{91240B29-F687-4F45-9708-019B960494DF}">
-              <a14:hiddenLine xmlns:a14="http://schemas.microsoft.com/office/drawing/2010/main" w="12700" cap="flat" cmpd="sng" algn="ctr">
-                <a:solidFill>
-                  <a:schemeClr val="accent1">
-                    <a:shade val="15000"/>
-                  </a:schemeClr>
-                </a:solidFill>
-                <a:prstDash val="solid"/>
-                <a:miter lim="800000"/>
-              </a14:hiddenLine>
-            </a:ext>
-          </a:extLst>
-        </p:spPr>
-        <p:style>
-          <a:lnRef idx="2">
-            <a:schemeClr val="accent1">
-              <a:shade val="15000"/>
-            </a:schemeClr>
-          </a:lnRef>
-          <a:fillRef idx="1">
-            <a:schemeClr val="accent1"/>
-          </a:fillRef>
-          <a:effectRef idx="0">
-            <a:schemeClr val="accent1"/>
-          </a:effectRef>
-          <a:fontRef idx="minor">
-            <a:schemeClr val="lt1"/>
-          </a:fontRef>
-        </p:style>
-        <p:txBody>
-          <a:bodyPr rtlCol="0" anchor="ctr"/>
-          <a:lstStyle/>
-          <a:p>
-            <a:pPr algn="ctr"/>
-            <a:endParaRPr lang="en-US"/>
-          </a:p>
-        </p:txBody>
-      </p:sp>
-      <p:sp>
-        <p:nvSpPr>
-          <p:cNvPr id="11" name="TextBox 10">
-            <a:extLst>
-              <a:ext uri="{FF2B5EF4-FFF2-40B4-BE49-F238E27FC236}">
-                <a16:creationId xmlns:a16="http://schemas.microsoft.com/office/drawing/2014/main" id="{7E252B31-0A80-8297-9AB5-9AED735ACDE2}"/>
-              </a:ext>
-            </a:extLst>
-          </p:cNvPr>
-          <p:cNvSpPr txBox="1"/>
-          <p:nvPr/>
-        </p:nvSpPr>
-        <p:spPr>
-          <a:xfrm>
-            <a:off x="762000" y="4464982"/>
-            <a:ext cx="10668000" cy="345440"/>
-          </a:xfrm>
-          <a:prstGeom prst="rect">
-            <a:avLst/>
-          </a:prstGeom>
-          <a:noFill/>
-        </p:spPr>
-        <p:txBody>
-          <a:bodyPr vert="horz" wrap="square" rtlCol="0">
-            <a:spAutoFit/>
-          </a:bodyPr>
-          <a:lstStyle/>
-          <a:p>
-            <a:pPr marL="304800" indent="-304800"/>
-            <a:r>
-              <a:rPr lang="en-US" sz="1600">
-                <a:solidFill>
-                  <a:srgbClr val="000000"/>
-                </a:solidFill>
-              </a:rPr>
-              <a:t>confidence interval</a:t>
-            </a:r>
-          </a:p>
-        </p:txBody>
-      </p:sp>
-      <p:sp>
-        <p:nvSpPr>
-          <p:cNvPr id="12" name="TextBox 11">
-            <a:extLst>
-              <a:ext uri="{FF2B5EF4-FFF2-40B4-BE49-F238E27FC236}">
-                <a16:creationId xmlns:a16="http://schemas.microsoft.com/office/drawing/2014/main" id="{A1980B2D-2D53-A814-88AF-46C2FDF3E298}"/>
-              </a:ext>
-            </a:extLst>
-          </p:cNvPr>
-          <p:cNvSpPr txBox="1"/>
-          <p:nvPr/>
-        </p:nvSpPr>
-        <p:spPr>
-          <a:xfrm>
-            <a:off x="1117600" y="4810422"/>
-            <a:ext cx="10312400" cy="338554"/>
-          </a:xfrm>
-          <a:prstGeom prst="rect">
-            <a:avLst/>
-          </a:prstGeom>
-          <a:noFill/>
-        </p:spPr>
-        <p:txBody>
-          <a:bodyPr vert="horz" wrap="square" rtlCol="0">
-            <a:spAutoFit/>
-          </a:bodyPr>
-          <a:lstStyle/>
-          <a:p>
-            <a:r>
-              <a:rPr lang="en-US" sz="1600" b="1">
-                <a:solidFill>
-                  <a:srgbClr val="C00000"/>
-                </a:solidFill>
-              </a:rPr>
-              <a:t>estimate ± 2 SE:  captures the parameter for about 95% of samples</a:t>
-            </a:r>
-          </a:p>
-        </p:txBody>
-      </p:sp>
-    </p:spTree>
-    <p:extLst>
-      <p:ext uri="{BB962C8B-B14F-4D97-AF65-F5344CB8AC3E}">
-        <p14:creationId xmlns:p14="http://schemas.microsoft.com/office/powerpoint/2010/main" val="1780468389"/>
-      </p:ext>
-    </p:extLst>
-  </p:cSld>
-  <p:clrMapOvr>
-    <a:masterClrMapping/>
-  </p:clrMapOvr>
-  <p:timing>
-    <p:tnLst>
-      <p:par>
-        <p:cTn id="1" dur="indefinite" restart="never" nodeType="tmRoot">
-          <p:childTnLst>
-            <p:seq concurrent="1" nextAc="seek">
-              <p:cTn id="2" dur="indefinite" nodeType="mainSeq">
-                <p:childTnLst>
-                  <p:par>
-                    <p:cTn id="3" fill="hold">
-                      <p:stCondLst>
-                        <p:cond delay="indefinite"/>
-                      </p:stCondLst>
-                      <p:childTnLst>
-                        <p:par>
-                          <p:cTn id="4" fill="hold">
-                            <p:stCondLst>
-                              <p:cond delay="0"/>
-                            </p:stCondLst>
-                            <p:childTnLst>
-                              <p:par>
-                                <p:cTn id="5" presetID="34" presetClass="entr" presetSubtype="0" fill="hold" grpId="0" nodeType="clickEffect">
-                                  <p:stCondLst>
-                                    <p:cond delay="0"/>
-                                  </p:stCondLst>
-                                  <p:childTnLst>
-                                    <p:set>
-                                      <p:cBhvr>
-                                        <p:cTn id="6" dur="1" fill="hold">
-                                          <p:stCondLst>
-                                            <p:cond delay="0"/>
-                                          </p:stCondLst>
-                                        </p:cTn>
-                                        <p:tgtEl>
-                                          <p:spTgt spid="6"/>
-                                        </p:tgtEl>
-                                        <p:attrNameLst>
-                                          <p:attrName>style.visibility</p:attrName>
-                                        </p:attrNameLst>
-                                      </p:cBhvr>
-                                      <p:to>
-                                        <p:strVal val="visible"/>
-                                      </p:to>
-                                    </p:set>
-                                    <p:anim from="(-#ppt_w/2)" to="(#ppt_x)" calcmode="lin" valueType="num">
-                                      <p:cBhvr>
-                                        <p:cTn id="7" dur="600" fill="hold">
-                                          <p:stCondLst>
-                                            <p:cond delay="0"/>
-                                          </p:stCondLst>
-                                        </p:cTn>
-                                        <p:tgtEl>
-                                          <p:spTgt spid="6"/>
-                                        </p:tgtEl>
-                                        <p:attrNameLst>
-                                          <p:attrName>ppt_x</p:attrName>
-                                        </p:attrNameLst>
-                                      </p:cBhvr>
-                                    </p:anim>
-                                    <p:anim from="0" to="-1.0" calcmode="lin" valueType="num">
-                                      <p:cBhvr>
-                                        <p:cTn id="8" dur="200" decel="50000" autoRev="1" fill="hold">
-                                          <p:stCondLst>
-                                            <p:cond delay="600"/>
-                                          </p:stCondLst>
-                                        </p:cTn>
-                                        <p:tgtEl>
-                                          <p:spTgt spid="6"/>
-                                        </p:tgtEl>
-                                        <p:attrNameLst>
-                                          <p:attrName>xshear</p:attrName>
-                                        </p:attrNameLst>
-                                      </p:cBhvr>
-                                    </p:anim>
-                                    <p:animScale>
-                                      <p:cBhvr>
-                                        <p:cTn id="9" dur="200" decel="100000" autoRev="1" fill="hold">
-                                          <p:stCondLst>
-                                            <p:cond delay="600"/>
-                                          </p:stCondLst>
-                                        </p:cTn>
-                                        <p:tgtEl>
-                                          <p:spTgt spid="6"/>
-                                        </p:tgtEl>
-                                      </p:cBhvr>
-                                      <p:from x="100000" y="100000"/>
-                                      <p:to x="80000" y="100000"/>
-                                    </p:animScale>
-                                    <p:anim by="(#ppt_h/3+#ppt_w*0.1)" calcmode="lin" valueType="num">
-                                      <p:cBhvr additive="sum">
-                                        <p:cTn id="10" dur="200" decel="100000" autoRev="1" fill="hold">
-                                          <p:stCondLst>
-                                            <p:cond delay="600"/>
-                                          </p:stCondLst>
-                                        </p:cTn>
-                                        <p:tgtEl>
-                                          <p:spTgt spid="6"/>
-                                        </p:tgtEl>
-                                        <p:attrNameLst>
-                                          <p:attrName>ppt_x</p:attrName>
-                                        </p:attrNameLst>
-                                      </p:cBhvr>
-                                    </p:anim>
-                                  </p:childTnLst>
-                                </p:cTn>
-                              </p:par>
-                            </p:childTnLst>
-                          </p:cTn>
-                        </p:par>
-                      </p:childTnLst>
-                    </p:cTn>
-                  </p:par>
-                  <p:par>
-                    <p:cTn id="11" fill="hold">
-                      <p:stCondLst>
-                        <p:cond delay="indefinite"/>
-                      </p:stCondLst>
-                      <p:childTnLst>
-                        <p:par>
-                          <p:cTn id="12" fill="hold">
-                            <p:stCondLst>
-                              <p:cond delay="0"/>
-                            </p:stCondLst>
-                            <p:childTnLst>
-                              <p:par>
-                                <p:cTn id="13" presetID="34" presetClass="entr" presetSubtype="0" fill="hold" grpId="0" nodeType="clickEffect">
-                                  <p:stCondLst>
-                                    <p:cond delay="0"/>
-                                  </p:stCondLst>
-                                  <p:childTnLst>
-                                    <p:set>
-                                      <p:cBhvr>
-                                        <p:cTn id="14" dur="1" fill="hold">
-                                          <p:stCondLst>
-                                            <p:cond delay="0"/>
-                                          </p:stCondLst>
-                                        </p:cTn>
-                                        <p:tgtEl>
-                                          <p:spTgt spid="8"/>
-                                        </p:tgtEl>
-                                        <p:attrNameLst>
-                                          <p:attrName>style.visibility</p:attrName>
-                                        </p:attrNameLst>
-                                      </p:cBhvr>
-                                      <p:to>
-                                        <p:strVal val="visible"/>
-                                      </p:to>
-                                    </p:set>
-                                    <p:anim from="(-#ppt_w/2)" to="(#ppt_x)" calcmode="lin" valueType="num">
-                                      <p:cBhvr>
-                                        <p:cTn id="15" dur="600" fill="hold">
-                                          <p:stCondLst>
-                                            <p:cond delay="0"/>
-                                          </p:stCondLst>
-                                        </p:cTn>
-                                        <p:tgtEl>
-                                          <p:spTgt spid="8"/>
-                                        </p:tgtEl>
-                                        <p:attrNameLst>
-                                          <p:attrName>ppt_x</p:attrName>
-                                        </p:attrNameLst>
-                                      </p:cBhvr>
-                                    </p:anim>
-                                    <p:anim from="0" to="-1.0" calcmode="lin" valueType="num">
-                                      <p:cBhvr>
-                                        <p:cTn id="16" dur="200" decel="50000" autoRev="1" fill="hold">
-                                          <p:stCondLst>
-                                            <p:cond delay="600"/>
-                                          </p:stCondLst>
-                                        </p:cTn>
-                                        <p:tgtEl>
-                                          <p:spTgt spid="8"/>
-                                        </p:tgtEl>
-                                        <p:attrNameLst>
-                                          <p:attrName>xshear</p:attrName>
-                                        </p:attrNameLst>
-                                      </p:cBhvr>
-                                    </p:anim>
-                                    <p:animScale>
-                                      <p:cBhvr>
-                                        <p:cTn id="17" dur="200" decel="100000" autoRev="1" fill="hold">
-                                          <p:stCondLst>
-                                            <p:cond delay="600"/>
-                                          </p:stCondLst>
-                                        </p:cTn>
-                                        <p:tgtEl>
-                                          <p:spTgt spid="8"/>
-                                        </p:tgtEl>
-                                      </p:cBhvr>
-                                      <p:from x="100000" y="100000"/>
-                                      <p:to x="80000" y="100000"/>
-                                    </p:animScale>
-                                    <p:anim by="(#ppt_h/3+#ppt_w*0.1)" calcmode="lin" valueType="num">
-                                      <p:cBhvr additive="sum">
-                                        <p:cTn id="18" dur="200" decel="100000" autoRev="1" fill="hold">
-                                          <p:stCondLst>
-                                            <p:cond delay="600"/>
-                                          </p:stCondLst>
-                                        </p:cTn>
-                                        <p:tgtEl>
-                                          <p:spTgt spid="8"/>
-                                        </p:tgtEl>
-                                        <p:attrNameLst>
-                                          <p:attrName>ppt_x</p:attrName>
-                                        </p:attrNameLst>
-                                      </p:cBhvr>
-                                    </p:anim>
-                                  </p:childTnLst>
-                                </p:cTn>
-                              </p:par>
-                            </p:childTnLst>
-                          </p:cTn>
-                        </p:par>
-                      </p:childTnLst>
-                    </p:cTn>
-                  </p:par>
-                  <p:par>
-                    <p:cTn id="19" fill="hold">
-                      <p:stCondLst>
-                        <p:cond delay="indefinite"/>
-                      </p:stCondLst>
-                      <p:childTnLst>
-                        <p:par>
-                          <p:cTn id="20" fill="hold">
-                            <p:stCondLst>
-                              <p:cond delay="0"/>
-                            </p:stCondLst>
-                            <p:childTnLst>
-                              <p:par>
-                                <p:cTn id="21" presetID="34" presetClass="entr" presetSubtype="0" fill="hold" grpId="0" nodeType="clickEffect">
-                                  <p:stCondLst>
-                                    <p:cond delay="0"/>
-                                  </p:stCondLst>
-                                  <p:childTnLst>
-                                    <p:set>
-                                      <p:cBhvr>
-                                        <p:cTn id="22" dur="1" fill="hold">
-                                          <p:stCondLst>
-                                            <p:cond delay="0"/>
-                                          </p:stCondLst>
-                                        </p:cTn>
-                                        <p:tgtEl>
-                                          <p:spTgt spid="10"/>
-                                        </p:tgtEl>
-                                        <p:attrNameLst>
-                                          <p:attrName>style.visibility</p:attrName>
-                                        </p:attrNameLst>
-                                      </p:cBhvr>
-                                      <p:to>
-                                        <p:strVal val="visible"/>
-                                      </p:to>
-                                    </p:set>
-                                    <p:anim from="(-#ppt_w/2)" to="(#ppt_x)" calcmode="lin" valueType="num">
-                                      <p:cBhvr>
-                                        <p:cTn id="23" dur="600" fill="hold">
-                                          <p:stCondLst>
-                                            <p:cond delay="0"/>
-                                          </p:stCondLst>
-                                        </p:cTn>
-                                        <p:tgtEl>
-                                          <p:spTgt spid="10"/>
-                                        </p:tgtEl>
-                                        <p:attrNameLst>
-                                          <p:attrName>ppt_x</p:attrName>
-                                        </p:attrNameLst>
-                                      </p:cBhvr>
-                                    </p:anim>
-                                    <p:anim from="0" to="-1.0" calcmode="lin" valueType="num">
-                                      <p:cBhvr>
-                                        <p:cTn id="24" dur="200" decel="50000" autoRev="1" fill="hold">
-                                          <p:stCondLst>
-                                            <p:cond delay="600"/>
-                                          </p:stCondLst>
-                                        </p:cTn>
-                                        <p:tgtEl>
-                                          <p:spTgt spid="10"/>
-                                        </p:tgtEl>
-                                        <p:attrNameLst>
-                                          <p:attrName>xshear</p:attrName>
-                                        </p:attrNameLst>
-                                      </p:cBhvr>
-                                    </p:anim>
-                                    <p:animScale>
-                                      <p:cBhvr>
-                                        <p:cTn id="25" dur="200" decel="100000" autoRev="1" fill="hold">
-                                          <p:stCondLst>
-                                            <p:cond delay="600"/>
-                                          </p:stCondLst>
-                                        </p:cTn>
-                                        <p:tgtEl>
-                                          <p:spTgt spid="10"/>
-                                        </p:tgtEl>
-                                      </p:cBhvr>
-                                      <p:from x="100000" y="100000"/>
-                                      <p:to x="80000" y="100000"/>
-                                    </p:animScale>
-                                    <p:anim by="(#ppt_h/3+#ppt_w*0.1)" calcmode="lin" valueType="num">
-                                      <p:cBhvr additive="sum">
-                                        <p:cTn id="26" dur="200" decel="100000" autoRev="1" fill="hold">
-                                          <p:stCondLst>
-                                            <p:cond delay="600"/>
-                                          </p:stCondLst>
-                                        </p:cTn>
-                                        <p:tgtEl>
-                                          <p:spTgt spid="10"/>
-                                        </p:tgtEl>
-                                        <p:attrNameLst>
-                                          <p:attrName>ppt_x</p:attrName>
-                                        </p:attrNameLst>
-                                      </p:cBhvr>
-                                    </p:anim>
-                                  </p:childTnLst>
-                                </p:cTn>
-                              </p:par>
-                            </p:childTnLst>
-                          </p:cTn>
-                        </p:par>
-                      </p:childTnLst>
-                    </p:cTn>
-                  </p:par>
-                  <p:par>
-                    <p:cTn id="27" fill="hold">
-                      <p:stCondLst>
-                        <p:cond delay="indefinite"/>
-                      </p:stCondLst>
-                      <p:childTnLst>
-                        <p:par>
-                          <p:cTn id="28" fill="hold">
-                            <p:stCondLst>
-                              <p:cond delay="0"/>
-                            </p:stCondLst>
-                            <p:childTnLst>
-                              <p:par>
-                                <p:cTn id="29" presetID="34" presetClass="entr" presetSubtype="0" fill="hold" grpId="1" nodeType="clickEffect">
-                                  <p:stCondLst>
-                                    <p:cond delay="0"/>
-                                  </p:stCondLst>
-                                  <p:childTnLst>
-                                    <p:set>
-                                      <p:cBhvr>
-                                        <p:cTn id="30" dur="1" fill="hold">
-                                          <p:stCondLst>
-                                            <p:cond delay="0"/>
-                                          </p:stCondLst>
-                                        </p:cTn>
-                                        <p:tgtEl>
-                                          <p:spTgt spid="12"/>
-                                        </p:tgtEl>
-                                        <p:attrNameLst>
-                                          <p:attrName>style.visibility</p:attrName>
-                                        </p:attrNameLst>
-                                      </p:cBhvr>
-                                      <p:to>
-                                        <p:strVal val="visible"/>
-                                      </p:to>
-                                    </p:set>
-                                    <p:anim from="(-#ppt_w/2)" to="(#ppt_x)" calcmode="lin" valueType="num">
-                                      <p:cBhvr>
-                                        <p:cTn id="31" dur="600" fill="hold">
-                                          <p:stCondLst>
-                                            <p:cond delay="0"/>
-                                          </p:stCondLst>
-                                        </p:cTn>
-                                        <p:tgtEl>
-                                          <p:spTgt spid="12"/>
-                                        </p:tgtEl>
-                                        <p:attrNameLst>
-                                          <p:attrName>ppt_x</p:attrName>
-                                        </p:attrNameLst>
-                                      </p:cBhvr>
-                                    </p:anim>
-                                    <p:anim from="0" to="-1.0" calcmode="lin" valueType="num">
-                                      <p:cBhvr>
-                                        <p:cTn id="32" dur="200" decel="50000" autoRev="1" fill="hold">
-                                          <p:stCondLst>
-                                            <p:cond delay="600"/>
-                                          </p:stCondLst>
-                                        </p:cTn>
-                                        <p:tgtEl>
-                                          <p:spTgt spid="12"/>
-                                        </p:tgtEl>
-                                        <p:attrNameLst>
-                                          <p:attrName>xshear</p:attrName>
-                                        </p:attrNameLst>
-                                      </p:cBhvr>
-                                    </p:anim>
-                                    <p:animScale>
-                                      <p:cBhvr>
-                                        <p:cTn id="33" dur="200" decel="100000" autoRev="1" fill="hold">
-                                          <p:stCondLst>
-                                            <p:cond delay="600"/>
-                                          </p:stCondLst>
-                                        </p:cTn>
-                                        <p:tgtEl>
-                                          <p:spTgt spid="12"/>
-                                        </p:tgtEl>
-                                      </p:cBhvr>
-                                      <p:from x="100000" y="100000"/>
-                                      <p:to x="80000" y="100000"/>
-                                    </p:animScale>
-                                    <p:anim by="(#ppt_h/3+#ppt_w*0.1)" calcmode="lin" valueType="num">
-                                      <p:cBhvr additive="sum">
-                                        <p:cTn id="34" dur="200" decel="100000" autoRev="1" fill="hold">
-                                          <p:stCondLst>
-                                            <p:cond delay="600"/>
-                                          </p:stCondLst>
-                                        </p:cTn>
-                                        <p:tgtEl>
-                                          <p:spTgt spid="12"/>
-                                        </p:tgtEl>
-                                        <p:attrNameLst>
-                                          <p:attrName>ppt_x</p:attrName>
-                                        </p:attrNameLst>
-                                      </p:cBhvr>
-                                    </p:anim>
-                                  </p:childTnLst>
-                                </p:cTn>
-                              </p:par>
-                            </p:childTnLst>
-                          </p:cTn>
-                        </p:par>
-                      </p:childTnLst>
-                    </p:cTn>
-                  </p:par>
-                </p:childTnLst>
-              </p:cTn>
-              <p:prevCondLst>
-                <p:cond evt="onPrev" delay="0">
-                  <p:tgtEl>
-                    <p:sldTgt/>
-                  </p:tgtEl>
-                </p:cond>
-              </p:prevCondLst>
-              <p:nextCondLst>
-                <p:cond evt="onNext" delay="0">
-                  <p:tgtEl>
-                    <p:sldTgt/>
-                  </p:tgtEl>
-                </p:cond>
-              </p:nextCondLst>
-            </p:seq>
-          </p:childTnLst>
-        </p:cTn>
-      </p:par>
-    </p:tnLst>
-    <p:bldLst>
-      <p:bldP spid="6" grpId="0"/>
-      <p:bldP spid="8" grpId="0"/>
-      <p:bldP spid="10" grpId="0"/>
-      <p:bldP spid="12" grpId="1"/>
-    </p:bldLst>
-  </p:timing>
 </p:sld>
 </file>
 
